--- a/presentation/three-tier-slides.pptx
+++ b/presentation/three-tier-slides.pptx
@@ -2501,7 +2501,7 @@
                 <a:ea typeface="Arial" pitchFamily="34" charset="-122"/>
                 <a:cs typeface="Arial" pitchFamily="34" charset="-120"/>
               </a:rPr>
-              <a:t>Data DB  ·  data-subnet-1a</a:t>
+              <a:t>Data DB primary  ·  data-subnet-1a</a:t>
             </a:r>
             <a:pPr algn="ctr" indent="0" marL="0">
               <a:buNone/>
@@ -2521,7 +2521,7 @@
                 <a:ea typeface="Arial" pitchFamily="34" charset="-122"/>
                 <a:cs typeface="Arial" pitchFamily="34" charset="-120"/>
               </a:rPr>
-              <a:t>simulated :3306 · isolated (no internet)</a:t>
+              <a:t>10.0.21.110:3306 · simulated · isolated</a:t>
             </a:r>
             <a:endParaRPr lang="en-US" sz="1250" dirty="0"/>
           </a:p>
@@ -2587,7 +2587,7 @@
                 <a:ea typeface="Arial" pitchFamily="34" charset="-122"/>
                 <a:cs typeface="Arial" pitchFamily="34" charset="-120"/>
               </a:rPr>
-              <a:t>Data standby  ·  data-subnet-1b</a:t>
+              <a:t>Data DB standby  ·  data-subnet-1b</a:t>
             </a:r>
             <a:pPr algn="ctr" indent="0" marL="0">
               <a:buNone/>
@@ -2607,7 +2607,7 @@
                 <a:ea typeface="Arial" pitchFamily="34" charset="-122"/>
                 <a:cs typeface="Arial" pitchFamily="34" charset="-120"/>
               </a:rPr>
-              <a:t>route table: local only</a:t>
+              <a:t>10.0.22.147:3306 · app fails over here</a:t>
             </a:r>
             <a:endParaRPr lang="en-US" sz="1250" dirty="0"/>
           </a:p>

--- a/presentation/three-tier-slides.pptx
+++ b/presentation/three-tier-slides.pptx
@@ -14,9 +14,22 @@
     <p:sldId id="262" r:id="rId8"/>
     <p:sldId id="263" r:id="rId9"/>
     <p:sldId id="264" r:id="rId10"/>
+    <p:sldId id="265" r:id="rId11"/>
+    <p:sldId id="266" r:id="rId12"/>
+    <p:sldId id="267" r:id="rId13"/>
+    <p:sldId id="268" r:id="rId14"/>
+    <p:sldId id="269" r:id="rId15"/>
+    <p:sldId id="270" r:id="rId16"/>
+    <p:sldId id="271" r:id="rId17"/>
+    <p:sldId id="272" r:id="rId18"/>
+    <p:sldId id="273" r:id="rId19"/>
+    <p:sldId id="274" r:id="rId20"/>
+    <p:sldId id="275" r:id="rId21"/>
+    <p:sldId id="276" r:id="rId22"/>
+    <p:sldId id="277" r:id="rId23"/>
   </p:sldIdLst>
   <p:notesMasterIdLst>
-    <p:notesMasterId r:id="rId11"/>
+    <p:notesMasterId r:id="rId24"/>
   </p:notesMasterIdLst>
   <p:sldSz cx="12191695" cy="6858000"/>
   <p:notesSz cx="6858000" cy="12191695"/>
@@ -552,6 +565,886 @@
 </p:notes>
 </file>
 
+<file path=ppt/notesSlides/notesSlide10.xml><?xml version="1.0" encoding="utf-8"?>
+<p:notes xmlns:a="http://schemas.openxmlformats.org/drawingml/2006/main" xmlns:r="http://schemas.openxmlformats.org/officeDocument/2006/relationships" xmlns:p="http://schemas.openxmlformats.org/presentationml/2006/main">
+  <p:cSld>
+    <p:spTree>
+      <p:nvGrpSpPr>
+        <p:cNvPr id="1" name=""/>
+        <p:cNvGrpSpPr/>
+        <p:nvPr/>
+      </p:nvGrpSpPr>
+      <p:grpSpPr>
+        <a:xfrm>
+          <a:off x="0" y="0"/>
+          <a:ext cx="0" cy="0"/>
+          <a:chOff x="0" y="0"/>
+          <a:chExt cx="0" cy="0"/>
+        </a:xfrm>
+      </p:grpSpPr>
+      <p:sp>
+        <p:nvSpPr>
+          <p:cNvPr id="2" name="Slide Image Placeholder 1"/>
+          <p:cNvSpPr>
+            <a:spLocks noGrp="1" noRot="1" noChangeAspect="1"/>
+          </p:cNvSpPr>
+          <p:nvPr>
+            <p:ph type="sldImg"/>
+          </p:nvPr>
+        </p:nvSpPr>
+        <p:spPr/>
+      </p:sp>
+      <p:sp>
+        <p:nvSpPr>
+          <p:cNvPr id="3" name="Notes Placeholder 2"/>
+          <p:cNvSpPr>
+            <a:spLocks noGrp="1"/>
+          </p:cNvSpPr>
+          <p:nvPr>
+            <p:ph type="body" idx="1"/>
+          </p:nvPr>
+        </p:nvSpPr>
+        <p:spPr/>
+        <p:txBody>
+          <a:bodyPr/>
+          <a:lstStyle/>
+          <a:p>
+            <a:r>
+              <a:rPr lang="en-US" dirty="0"/>
+              <a:t/>
+            </a:r>
+            <a:endParaRPr lang="en-US" dirty="0"/>
+          </a:p>
+        </p:txBody>
+      </p:sp>
+      <p:sp>
+        <p:nvSpPr>
+          <p:cNvPr id="4" name="Slide Number Placeholder 3"/>
+          <p:cNvSpPr>
+            <a:spLocks noGrp="1"/>
+          </p:cNvSpPr>
+          <p:nvPr>
+            <p:ph type="sldNum" sz="quarter" idx="10"/>
+          </p:nvPr>
+        </p:nvSpPr>
+        <p:spPr/>
+        <p:txBody>
+          <a:bodyPr/>
+          <a:lstStyle/>
+          <a:p>
+            <a:fld id="{F7021451-1387-4CA6-816F-3879F97B5CBC}" type="slidenum">
+              <a:rPr lang="en-US"/>
+              <a:t>10</a:t>
+            </a:fld>
+            <a:endParaRPr lang="en-US"/>
+          </a:p>
+        </p:txBody>
+      </p:sp>
+    </p:spTree>
+    <p:extLst>
+      <p:ext uri="{BB962C8B-B14F-4D97-AF65-F5344CB8AC3E}">
+        <p14:creationId xmlns:p14="http://schemas.microsoft.com/office/powerpoint/2010/main" val="1024086991"/>
+      </p:ext>
+    </p:extLst>
+  </p:cSld>
+  <p:clrMapOvr>
+    <a:masterClrMapping/>
+  </p:clrMapOvr>
+</p:notes>
+</file>
+
+<file path=ppt/notesSlides/notesSlide11.xml><?xml version="1.0" encoding="utf-8"?>
+<p:notes xmlns:a="http://schemas.openxmlformats.org/drawingml/2006/main" xmlns:r="http://schemas.openxmlformats.org/officeDocument/2006/relationships" xmlns:p="http://schemas.openxmlformats.org/presentationml/2006/main">
+  <p:cSld>
+    <p:spTree>
+      <p:nvGrpSpPr>
+        <p:cNvPr id="1" name=""/>
+        <p:cNvGrpSpPr/>
+        <p:nvPr/>
+      </p:nvGrpSpPr>
+      <p:grpSpPr>
+        <a:xfrm>
+          <a:off x="0" y="0"/>
+          <a:ext cx="0" cy="0"/>
+          <a:chOff x="0" y="0"/>
+          <a:chExt cx="0" cy="0"/>
+        </a:xfrm>
+      </p:grpSpPr>
+      <p:sp>
+        <p:nvSpPr>
+          <p:cNvPr id="2" name="Slide Image Placeholder 1"/>
+          <p:cNvSpPr>
+            <a:spLocks noGrp="1" noRot="1" noChangeAspect="1"/>
+          </p:cNvSpPr>
+          <p:nvPr>
+            <p:ph type="sldImg"/>
+          </p:nvPr>
+        </p:nvSpPr>
+        <p:spPr/>
+      </p:sp>
+      <p:sp>
+        <p:nvSpPr>
+          <p:cNvPr id="3" name="Notes Placeholder 2"/>
+          <p:cNvSpPr>
+            <a:spLocks noGrp="1"/>
+          </p:cNvSpPr>
+          <p:nvPr>
+            <p:ph type="body" idx="1"/>
+          </p:nvPr>
+        </p:nvSpPr>
+        <p:spPr/>
+        <p:txBody>
+          <a:bodyPr/>
+          <a:lstStyle/>
+          <a:p>
+            <a:r>
+              <a:rPr lang="en-US" dirty="0"/>
+              <a:t/>
+            </a:r>
+            <a:endParaRPr lang="en-US" dirty="0"/>
+          </a:p>
+        </p:txBody>
+      </p:sp>
+      <p:sp>
+        <p:nvSpPr>
+          <p:cNvPr id="4" name="Slide Number Placeholder 3"/>
+          <p:cNvSpPr>
+            <a:spLocks noGrp="1"/>
+          </p:cNvSpPr>
+          <p:nvPr>
+            <p:ph type="sldNum" sz="quarter" idx="10"/>
+          </p:nvPr>
+        </p:nvSpPr>
+        <p:spPr/>
+        <p:txBody>
+          <a:bodyPr/>
+          <a:lstStyle/>
+          <a:p>
+            <a:fld id="{F7021451-1387-4CA6-816F-3879F97B5CBC}" type="slidenum">
+              <a:rPr lang="en-US"/>
+              <a:t>11</a:t>
+            </a:fld>
+            <a:endParaRPr lang="en-US"/>
+          </a:p>
+        </p:txBody>
+      </p:sp>
+    </p:spTree>
+    <p:extLst>
+      <p:ext uri="{BB962C8B-B14F-4D97-AF65-F5344CB8AC3E}">
+        <p14:creationId xmlns:p14="http://schemas.microsoft.com/office/powerpoint/2010/main" val="1024086991"/>
+      </p:ext>
+    </p:extLst>
+  </p:cSld>
+  <p:clrMapOvr>
+    <a:masterClrMapping/>
+  </p:clrMapOvr>
+</p:notes>
+</file>
+
+<file path=ppt/notesSlides/notesSlide12.xml><?xml version="1.0" encoding="utf-8"?>
+<p:notes xmlns:a="http://schemas.openxmlformats.org/drawingml/2006/main" xmlns:r="http://schemas.openxmlformats.org/officeDocument/2006/relationships" xmlns:p="http://schemas.openxmlformats.org/presentationml/2006/main">
+  <p:cSld>
+    <p:spTree>
+      <p:nvGrpSpPr>
+        <p:cNvPr id="1" name=""/>
+        <p:cNvGrpSpPr/>
+        <p:nvPr/>
+      </p:nvGrpSpPr>
+      <p:grpSpPr>
+        <a:xfrm>
+          <a:off x="0" y="0"/>
+          <a:ext cx="0" cy="0"/>
+          <a:chOff x="0" y="0"/>
+          <a:chExt cx="0" cy="0"/>
+        </a:xfrm>
+      </p:grpSpPr>
+      <p:sp>
+        <p:nvSpPr>
+          <p:cNvPr id="2" name="Slide Image Placeholder 1"/>
+          <p:cNvSpPr>
+            <a:spLocks noGrp="1" noRot="1" noChangeAspect="1"/>
+          </p:cNvSpPr>
+          <p:nvPr>
+            <p:ph type="sldImg"/>
+          </p:nvPr>
+        </p:nvSpPr>
+        <p:spPr/>
+      </p:sp>
+      <p:sp>
+        <p:nvSpPr>
+          <p:cNvPr id="3" name="Notes Placeholder 2"/>
+          <p:cNvSpPr>
+            <a:spLocks noGrp="1"/>
+          </p:cNvSpPr>
+          <p:nvPr>
+            <p:ph type="body" idx="1"/>
+          </p:nvPr>
+        </p:nvSpPr>
+        <p:spPr/>
+        <p:txBody>
+          <a:bodyPr/>
+          <a:lstStyle/>
+          <a:p>
+            <a:r>
+              <a:rPr lang="en-US" dirty="0"/>
+              <a:t/>
+            </a:r>
+            <a:endParaRPr lang="en-US" dirty="0"/>
+          </a:p>
+        </p:txBody>
+      </p:sp>
+      <p:sp>
+        <p:nvSpPr>
+          <p:cNvPr id="4" name="Slide Number Placeholder 3"/>
+          <p:cNvSpPr>
+            <a:spLocks noGrp="1"/>
+          </p:cNvSpPr>
+          <p:nvPr>
+            <p:ph type="sldNum" sz="quarter" idx="10"/>
+          </p:nvPr>
+        </p:nvSpPr>
+        <p:spPr/>
+        <p:txBody>
+          <a:bodyPr/>
+          <a:lstStyle/>
+          <a:p>
+            <a:fld id="{F7021451-1387-4CA6-816F-3879F97B5CBC}" type="slidenum">
+              <a:rPr lang="en-US"/>
+              <a:t>12</a:t>
+            </a:fld>
+            <a:endParaRPr lang="en-US"/>
+          </a:p>
+        </p:txBody>
+      </p:sp>
+    </p:spTree>
+    <p:extLst>
+      <p:ext uri="{BB962C8B-B14F-4D97-AF65-F5344CB8AC3E}">
+        <p14:creationId xmlns:p14="http://schemas.microsoft.com/office/powerpoint/2010/main" val="1024086991"/>
+      </p:ext>
+    </p:extLst>
+  </p:cSld>
+  <p:clrMapOvr>
+    <a:masterClrMapping/>
+  </p:clrMapOvr>
+</p:notes>
+</file>
+
+<file path=ppt/notesSlides/notesSlide13.xml><?xml version="1.0" encoding="utf-8"?>
+<p:notes xmlns:a="http://schemas.openxmlformats.org/drawingml/2006/main" xmlns:r="http://schemas.openxmlformats.org/officeDocument/2006/relationships" xmlns:p="http://schemas.openxmlformats.org/presentationml/2006/main">
+  <p:cSld>
+    <p:spTree>
+      <p:nvGrpSpPr>
+        <p:cNvPr id="1" name=""/>
+        <p:cNvGrpSpPr/>
+        <p:nvPr/>
+      </p:nvGrpSpPr>
+      <p:grpSpPr>
+        <a:xfrm>
+          <a:off x="0" y="0"/>
+          <a:ext cx="0" cy="0"/>
+          <a:chOff x="0" y="0"/>
+          <a:chExt cx="0" cy="0"/>
+        </a:xfrm>
+      </p:grpSpPr>
+      <p:sp>
+        <p:nvSpPr>
+          <p:cNvPr id="2" name="Slide Image Placeholder 1"/>
+          <p:cNvSpPr>
+            <a:spLocks noGrp="1" noRot="1" noChangeAspect="1"/>
+          </p:cNvSpPr>
+          <p:nvPr>
+            <p:ph type="sldImg"/>
+          </p:nvPr>
+        </p:nvSpPr>
+        <p:spPr/>
+      </p:sp>
+      <p:sp>
+        <p:nvSpPr>
+          <p:cNvPr id="3" name="Notes Placeholder 2"/>
+          <p:cNvSpPr>
+            <a:spLocks noGrp="1"/>
+          </p:cNvSpPr>
+          <p:nvPr>
+            <p:ph type="body" idx="1"/>
+          </p:nvPr>
+        </p:nvSpPr>
+        <p:spPr/>
+        <p:txBody>
+          <a:bodyPr/>
+          <a:lstStyle/>
+          <a:p>
+            <a:r>
+              <a:rPr lang="en-US" dirty="0"/>
+              <a:t/>
+            </a:r>
+            <a:endParaRPr lang="en-US" dirty="0"/>
+          </a:p>
+        </p:txBody>
+      </p:sp>
+      <p:sp>
+        <p:nvSpPr>
+          <p:cNvPr id="4" name="Slide Number Placeholder 3"/>
+          <p:cNvSpPr>
+            <a:spLocks noGrp="1"/>
+          </p:cNvSpPr>
+          <p:nvPr>
+            <p:ph type="sldNum" sz="quarter" idx="10"/>
+          </p:nvPr>
+        </p:nvSpPr>
+        <p:spPr/>
+        <p:txBody>
+          <a:bodyPr/>
+          <a:lstStyle/>
+          <a:p>
+            <a:fld id="{F7021451-1387-4CA6-816F-3879F97B5CBC}" type="slidenum">
+              <a:rPr lang="en-US"/>
+              <a:t>13</a:t>
+            </a:fld>
+            <a:endParaRPr lang="en-US"/>
+          </a:p>
+        </p:txBody>
+      </p:sp>
+    </p:spTree>
+    <p:extLst>
+      <p:ext uri="{BB962C8B-B14F-4D97-AF65-F5344CB8AC3E}">
+        <p14:creationId xmlns:p14="http://schemas.microsoft.com/office/powerpoint/2010/main" val="1024086991"/>
+      </p:ext>
+    </p:extLst>
+  </p:cSld>
+  <p:clrMapOvr>
+    <a:masterClrMapping/>
+  </p:clrMapOvr>
+</p:notes>
+</file>
+
+<file path=ppt/notesSlides/notesSlide14.xml><?xml version="1.0" encoding="utf-8"?>
+<p:notes xmlns:a="http://schemas.openxmlformats.org/drawingml/2006/main" xmlns:r="http://schemas.openxmlformats.org/officeDocument/2006/relationships" xmlns:p="http://schemas.openxmlformats.org/presentationml/2006/main">
+  <p:cSld>
+    <p:spTree>
+      <p:nvGrpSpPr>
+        <p:cNvPr id="1" name=""/>
+        <p:cNvGrpSpPr/>
+        <p:nvPr/>
+      </p:nvGrpSpPr>
+      <p:grpSpPr>
+        <a:xfrm>
+          <a:off x="0" y="0"/>
+          <a:ext cx="0" cy="0"/>
+          <a:chOff x="0" y="0"/>
+          <a:chExt cx="0" cy="0"/>
+        </a:xfrm>
+      </p:grpSpPr>
+      <p:sp>
+        <p:nvSpPr>
+          <p:cNvPr id="2" name="Slide Image Placeholder 1"/>
+          <p:cNvSpPr>
+            <a:spLocks noGrp="1" noRot="1" noChangeAspect="1"/>
+          </p:cNvSpPr>
+          <p:nvPr>
+            <p:ph type="sldImg"/>
+          </p:nvPr>
+        </p:nvSpPr>
+        <p:spPr/>
+      </p:sp>
+      <p:sp>
+        <p:nvSpPr>
+          <p:cNvPr id="3" name="Notes Placeholder 2"/>
+          <p:cNvSpPr>
+            <a:spLocks noGrp="1"/>
+          </p:cNvSpPr>
+          <p:nvPr>
+            <p:ph type="body" idx="1"/>
+          </p:nvPr>
+        </p:nvSpPr>
+        <p:spPr/>
+        <p:txBody>
+          <a:bodyPr/>
+          <a:lstStyle/>
+          <a:p>
+            <a:r>
+              <a:rPr lang="en-US" dirty="0"/>
+              <a:t/>
+            </a:r>
+            <a:endParaRPr lang="en-US" dirty="0"/>
+          </a:p>
+        </p:txBody>
+      </p:sp>
+      <p:sp>
+        <p:nvSpPr>
+          <p:cNvPr id="4" name="Slide Number Placeholder 3"/>
+          <p:cNvSpPr>
+            <a:spLocks noGrp="1"/>
+          </p:cNvSpPr>
+          <p:nvPr>
+            <p:ph type="sldNum" sz="quarter" idx="10"/>
+          </p:nvPr>
+        </p:nvSpPr>
+        <p:spPr/>
+        <p:txBody>
+          <a:bodyPr/>
+          <a:lstStyle/>
+          <a:p>
+            <a:fld id="{F7021451-1387-4CA6-816F-3879F97B5CBC}" type="slidenum">
+              <a:rPr lang="en-US"/>
+              <a:t>14</a:t>
+            </a:fld>
+            <a:endParaRPr lang="en-US"/>
+          </a:p>
+        </p:txBody>
+      </p:sp>
+    </p:spTree>
+    <p:extLst>
+      <p:ext uri="{BB962C8B-B14F-4D97-AF65-F5344CB8AC3E}">
+        <p14:creationId xmlns:p14="http://schemas.microsoft.com/office/powerpoint/2010/main" val="1024086991"/>
+      </p:ext>
+    </p:extLst>
+  </p:cSld>
+  <p:clrMapOvr>
+    <a:masterClrMapping/>
+  </p:clrMapOvr>
+</p:notes>
+</file>
+
+<file path=ppt/notesSlides/notesSlide15.xml><?xml version="1.0" encoding="utf-8"?>
+<p:notes xmlns:a="http://schemas.openxmlformats.org/drawingml/2006/main" xmlns:r="http://schemas.openxmlformats.org/officeDocument/2006/relationships" xmlns:p="http://schemas.openxmlformats.org/presentationml/2006/main">
+  <p:cSld>
+    <p:spTree>
+      <p:nvGrpSpPr>
+        <p:cNvPr id="1" name=""/>
+        <p:cNvGrpSpPr/>
+        <p:nvPr/>
+      </p:nvGrpSpPr>
+      <p:grpSpPr>
+        <a:xfrm>
+          <a:off x="0" y="0"/>
+          <a:ext cx="0" cy="0"/>
+          <a:chOff x="0" y="0"/>
+          <a:chExt cx="0" cy="0"/>
+        </a:xfrm>
+      </p:grpSpPr>
+      <p:sp>
+        <p:nvSpPr>
+          <p:cNvPr id="2" name="Slide Image Placeholder 1"/>
+          <p:cNvSpPr>
+            <a:spLocks noGrp="1" noRot="1" noChangeAspect="1"/>
+          </p:cNvSpPr>
+          <p:nvPr>
+            <p:ph type="sldImg"/>
+          </p:nvPr>
+        </p:nvSpPr>
+        <p:spPr/>
+      </p:sp>
+      <p:sp>
+        <p:nvSpPr>
+          <p:cNvPr id="3" name="Notes Placeholder 2"/>
+          <p:cNvSpPr>
+            <a:spLocks noGrp="1"/>
+          </p:cNvSpPr>
+          <p:nvPr>
+            <p:ph type="body" idx="1"/>
+          </p:nvPr>
+        </p:nvSpPr>
+        <p:spPr/>
+        <p:txBody>
+          <a:bodyPr/>
+          <a:lstStyle/>
+          <a:p>
+            <a:r>
+              <a:rPr lang="en-US" dirty="0"/>
+              <a:t/>
+            </a:r>
+            <a:endParaRPr lang="en-US" dirty="0"/>
+          </a:p>
+        </p:txBody>
+      </p:sp>
+      <p:sp>
+        <p:nvSpPr>
+          <p:cNvPr id="4" name="Slide Number Placeholder 3"/>
+          <p:cNvSpPr>
+            <a:spLocks noGrp="1"/>
+          </p:cNvSpPr>
+          <p:nvPr>
+            <p:ph type="sldNum" sz="quarter" idx="10"/>
+          </p:nvPr>
+        </p:nvSpPr>
+        <p:spPr/>
+        <p:txBody>
+          <a:bodyPr/>
+          <a:lstStyle/>
+          <a:p>
+            <a:fld id="{F7021451-1387-4CA6-816F-3879F97B5CBC}" type="slidenum">
+              <a:rPr lang="en-US"/>
+              <a:t>15</a:t>
+            </a:fld>
+            <a:endParaRPr lang="en-US"/>
+          </a:p>
+        </p:txBody>
+      </p:sp>
+    </p:spTree>
+    <p:extLst>
+      <p:ext uri="{BB962C8B-B14F-4D97-AF65-F5344CB8AC3E}">
+        <p14:creationId xmlns:p14="http://schemas.microsoft.com/office/powerpoint/2010/main" val="1024086991"/>
+      </p:ext>
+    </p:extLst>
+  </p:cSld>
+  <p:clrMapOvr>
+    <a:masterClrMapping/>
+  </p:clrMapOvr>
+</p:notes>
+</file>
+
+<file path=ppt/notesSlides/notesSlide16.xml><?xml version="1.0" encoding="utf-8"?>
+<p:notes xmlns:a="http://schemas.openxmlformats.org/drawingml/2006/main" xmlns:r="http://schemas.openxmlformats.org/officeDocument/2006/relationships" xmlns:p="http://schemas.openxmlformats.org/presentationml/2006/main">
+  <p:cSld>
+    <p:spTree>
+      <p:nvGrpSpPr>
+        <p:cNvPr id="1" name=""/>
+        <p:cNvGrpSpPr/>
+        <p:nvPr/>
+      </p:nvGrpSpPr>
+      <p:grpSpPr>
+        <a:xfrm>
+          <a:off x="0" y="0"/>
+          <a:ext cx="0" cy="0"/>
+          <a:chOff x="0" y="0"/>
+          <a:chExt cx="0" cy="0"/>
+        </a:xfrm>
+      </p:grpSpPr>
+      <p:sp>
+        <p:nvSpPr>
+          <p:cNvPr id="2" name="Slide Image Placeholder 1"/>
+          <p:cNvSpPr>
+            <a:spLocks noGrp="1" noRot="1" noChangeAspect="1"/>
+          </p:cNvSpPr>
+          <p:nvPr>
+            <p:ph type="sldImg"/>
+          </p:nvPr>
+        </p:nvSpPr>
+        <p:spPr/>
+      </p:sp>
+      <p:sp>
+        <p:nvSpPr>
+          <p:cNvPr id="3" name="Notes Placeholder 2"/>
+          <p:cNvSpPr>
+            <a:spLocks noGrp="1"/>
+          </p:cNvSpPr>
+          <p:nvPr>
+            <p:ph type="body" idx="1"/>
+          </p:nvPr>
+        </p:nvSpPr>
+        <p:spPr/>
+        <p:txBody>
+          <a:bodyPr/>
+          <a:lstStyle/>
+          <a:p>
+            <a:r>
+              <a:rPr lang="en-US" dirty="0"/>
+              <a:t/>
+            </a:r>
+            <a:endParaRPr lang="en-US" dirty="0"/>
+          </a:p>
+        </p:txBody>
+      </p:sp>
+      <p:sp>
+        <p:nvSpPr>
+          <p:cNvPr id="4" name="Slide Number Placeholder 3"/>
+          <p:cNvSpPr>
+            <a:spLocks noGrp="1"/>
+          </p:cNvSpPr>
+          <p:nvPr>
+            <p:ph type="sldNum" sz="quarter" idx="10"/>
+          </p:nvPr>
+        </p:nvSpPr>
+        <p:spPr/>
+        <p:txBody>
+          <a:bodyPr/>
+          <a:lstStyle/>
+          <a:p>
+            <a:fld id="{F7021451-1387-4CA6-816F-3879F97B5CBC}" type="slidenum">
+              <a:rPr lang="en-US"/>
+              <a:t>16</a:t>
+            </a:fld>
+            <a:endParaRPr lang="en-US"/>
+          </a:p>
+        </p:txBody>
+      </p:sp>
+    </p:spTree>
+    <p:extLst>
+      <p:ext uri="{BB962C8B-B14F-4D97-AF65-F5344CB8AC3E}">
+        <p14:creationId xmlns:p14="http://schemas.microsoft.com/office/powerpoint/2010/main" val="1024086991"/>
+      </p:ext>
+    </p:extLst>
+  </p:cSld>
+  <p:clrMapOvr>
+    <a:masterClrMapping/>
+  </p:clrMapOvr>
+</p:notes>
+</file>
+
+<file path=ppt/notesSlides/notesSlide17.xml><?xml version="1.0" encoding="utf-8"?>
+<p:notes xmlns:a="http://schemas.openxmlformats.org/drawingml/2006/main" xmlns:r="http://schemas.openxmlformats.org/officeDocument/2006/relationships" xmlns:p="http://schemas.openxmlformats.org/presentationml/2006/main">
+  <p:cSld>
+    <p:spTree>
+      <p:nvGrpSpPr>
+        <p:cNvPr id="1" name=""/>
+        <p:cNvGrpSpPr/>
+        <p:nvPr/>
+      </p:nvGrpSpPr>
+      <p:grpSpPr>
+        <a:xfrm>
+          <a:off x="0" y="0"/>
+          <a:ext cx="0" cy="0"/>
+          <a:chOff x="0" y="0"/>
+          <a:chExt cx="0" cy="0"/>
+        </a:xfrm>
+      </p:grpSpPr>
+      <p:sp>
+        <p:nvSpPr>
+          <p:cNvPr id="2" name="Slide Image Placeholder 1"/>
+          <p:cNvSpPr>
+            <a:spLocks noGrp="1" noRot="1" noChangeAspect="1"/>
+          </p:cNvSpPr>
+          <p:nvPr>
+            <p:ph type="sldImg"/>
+          </p:nvPr>
+        </p:nvSpPr>
+        <p:spPr/>
+      </p:sp>
+      <p:sp>
+        <p:nvSpPr>
+          <p:cNvPr id="3" name="Notes Placeholder 2"/>
+          <p:cNvSpPr>
+            <a:spLocks noGrp="1"/>
+          </p:cNvSpPr>
+          <p:nvPr>
+            <p:ph type="body" idx="1"/>
+          </p:nvPr>
+        </p:nvSpPr>
+        <p:spPr/>
+        <p:txBody>
+          <a:bodyPr/>
+          <a:lstStyle/>
+          <a:p>
+            <a:r>
+              <a:rPr lang="en-US" dirty="0"/>
+              <a:t/>
+            </a:r>
+            <a:endParaRPr lang="en-US" dirty="0"/>
+          </a:p>
+        </p:txBody>
+      </p:sp>
+      <p:sp>
+        <p:nvSpPr>
+          <p:cNvPr id="4" name="Slide Number Placeholder 3"/>
+          <p:cNvSpPr>
+            <a:spLocks noGrp="1"/>
+          </p:cNvSpPr>
+          <p:nvPr>
+            <p:ph type="sldNum" sz="quarter" idx="10"/>
+          </p:nvPr>
+        </p:nvSpPr>
+        <p:spPr/>
+        <p:txBody>
+          <a:bodyPr/>
+          <a:lstStyle/>
+          <a:p>
+            <a:fld id="{F7021451-1387-4CA6-816F-3879F97B5CBC}" type="slidenum">
+              <a:rPr lang="en-US"/>
+              <a:t>17</a:t>
+            </a:fld>
+            <a:endParaRPr lang="en-US"/>
+          </a:p>
+        </p:txBody>
+      </p:sp>
+    </p:spTree>
+    <p:extLst>
+      <p:ext uri="{BB962C8B-B14F-4D97-AF65-F5344CB8AC3E}">
+        <p14:creationId xmlns:p14="http://schemas.microsoft.com/office/powerpoint/2010/main" val="1024086991"/>
+      </p:ext>
+    </p:extLst>
+  </p:cSld>
+  <p:clrMapOvr>
+    <a:masterClrMapping/>
+  </p:clrMapOvr>
+</p:notes>
+</file>
+
+<file path=ppt/notesSlides/notesSlide18.xml><?xml version="1.0" encoding="utf-8"?>
+<p:notes xmlns:a="http://schemas.openxmlformats.org/drawingml/2006/main" xmlns:r="http://schemas.openxmlformats.org/officeDocument/2006/relationships" xmlns:p="http://schemas.openxmlformats.org/presentationml/2006/main">
+  <p:cSld>
+    <p:spTree>
+      <p:nvGrpSpPr>
+        <p:cNvPr id="1" name=""/>
+        <p:cNvGrpSpPr/>
+        <p:nvPr/>
+      </p:nvGrpSpPr>
+      <p:grpSpPr>
+        <a:xfrm>
+          <a:off x="0" y="0"/>
+          <a:ext cx="0" cy="0"/>
+          <a:chOff x="0" y="0"/>
+          <a:chExt cx="0" cy="0"/>
+        </a:xfrm>
+      </p:grpSpPr>
+      <p:sp>
+        <p:nvSpPr>
+          <p:cNvPr id="2" name="Slide Image Placeholder 1"/>
+          <p:cNvSpPr>
+            <a:spLocks noGrp="1" noRot="1" noChangeAspect="1"/>
+          </p:cNvSpPr>
+          <p:nvPr>
+            <p:ph type="sldImg"/>
+          </p:nvPr>
+        </p:nvSpPr>
+        <p:spPr/>
+      </p:sp>
+      <p:sp>
+        <p:nvSpPr>
+          <p:cNvPr id="3" name="Notes Placeholder 2"/>
+          <p:cNvSpPr>
+            <a:spLocks noGrp="1"/>
+          </p:cNvSpPr>
+          <p:nvPr>
+            <p:ph type="body" idx="1"/>
+          </p:nvPr>
+        </p:nvSpPr>
+        <p:spPr/>
+        <p:txBody>
+          <a:bodyPr/>
+          <a:lstStyle/>
+          <a:p>
+            <a:r>
+              <a:rPr lang="en-US" dirty="0"/>
+              <a:t/>
+            </a:r>
+            <a:endParaRPr lang="en-US" dirty="0"/>
+          </a:p>
+        </p:txBody>
+      </p:sp>
+      <p:sp>
+        <p:nvSpPr>
+          <p:cNvPr id="4" name="Slide Number Placeholder 3"/>
+          <p:cNvSpPr>
+            <a:spLocks noGrp="1"/>
+          </p:cNvSpPr>
+          <p:nvPr>
+            <p:ph type="sldNum" sz="quarter" idx="10"/>
+          </p:nvPr>
+        </p:nvSpPr>
+        <p:spPr/>
+        <p:txBody>
+          <a:bodyPr/>
+          <a:lstStyle/>
+          <a:p>
+            <a:fld id="{F7021451-1387-4CA6-816F-3879F97B5CBC}" type="slidenum">
+              <a:rPr lang="en-US"/>
+              <a:t>18</a:t>
+            </a:fld>
+            <a:endParaRPr lang="en-US"/>
+          </a:p>
+        </p:txBody>
+      </p:sp>
+    </p:spTree>
+    <p:extLst>
+      <p:ext uri="{BB962C8B-B14F-4D97-AF65-F5344CB8AC3E}">
+        <p14:creationId xmlns:p14="http://schemas.microsoft.com/office/powerpoint/2010/main" val="1024086991"/>
+      </p:ext>
+    </p:extLst>
+  </p:cSld>
+  <p:clrMapOvr>
+    <a:masterClrMapping/>
+  </p:clrMapOvr>
+</p:notes>
+</file>
+
+<file path=ppt/notesSlides/notesSlide19.xml><?xml version="1.0" encoding="utf-8"?>
+<p:notes xmlns:a="http://schemas.openxmlformats.org/drawingml/2006/main" xmlns:r="http://schemas.openxmlformats.org/officeDocument/2006/relationships" xmlns:p="http://schemas.openxmlformats.org/presentationml/2006/main">
+  <p:cSld>
+    <p:spTree>
+      <p:nvGrpSpPr>
+        <p:cNvPr id="1" name=""/>
+        <p:cNvGrpSpPr/>
+        <p:nvPr/>
+      </p:nvGrpSpPr>
+      <p:grpSpPr>
+        <a:xfrm>
+          <a:off x="0" y="0"/>
+          <a:ext cx="0" cy="0"/>
+          <a:chOff x="0" y="0"/>
+          <a:chExt cx="0" cy="0"/>
+        </a:xfrm>
+      </p:grpSpPr>
+      <p:sp>
+        <p:nvSpPr>
+          <p:cNvPr id="2" name="Slide Image Placeholder 1"/>
+          <p:cNvSpPr>
+            <a:spLocks noGrp="1" noRot="1" noChangeAspect="1"/>
+          </p:cNvSpPr>
+          <p:nvPr>
+            <p:ph type="sldImg"/>
+          </p:nvPr>
+        </p:nvSpPr>
+        <p:spPr/>
+      </p:sp>
+      <p:sp>
+        <p:nvSpPr>
+          <p:cNvPr id="3" name="Notes Placeholder 2"/>
+          <p:cNvSpPr>
+            <a:spLocks noGrp="1"/>
+          </p:cNvSpPr>
+          <p:nvPr>
+            <p:ph type="body" idx="1"/>
+          </p:nvPr>
+        </p:nvSpPr>
+        <p:spPr/>
+        <p:txBody>
+          <a:bodyPr/>
+          <a:lstStyle/>
+          <a:p>
+            <a:r>
+              <a:rPr lang="en-US" dirty="0"/>
+              <a:t/>
+            </a:r>
+            <a:endParaRPr lang="en-US" dirty="0"/>
+          </a:p>
+        </p:txBody>
+      </p:sp>
+      <p:sp>
+        <p:nvSpPr>
+          <p:cNvPr id="4" name="Slide Number Placeholder 3"/>
+          <p:cNvSpPr>
+            <a:spLocks noGrp="1"/>
+          </p:cNvSpPr>
+          <p:nvPr>
+            <p:ph type="sldNum" sz="quarter" idx="10"/>
+          </p:nvPr>
+        </p:nvSpPr>
+        <p:spPr/>
+        <p:txBody>
+          <a:bodyPr/>
+          <a:lstStyle/>
+          <a:p>
+            <a:fld id="{F7021451-1387-4CA6-816F-3879F97B5CBC}" type="slidenum">
+              <a:rPr lang="en-US"/>
+              <a:t>19</a:t>
+            </a:fld>
+            <a:endParaRPr lang="en-US"/>
+          </a:p>
+        </p:txBody>
+      </p:sp>
+    </p:spTree>
+    <p:extLst>
+      <p:ext uri="{BB962C8B-B14F-4D97-AF65-F5344CB8AC3E}">
+        <p14:creationId xmlns:p14="http://schemas.microsoft.com/office/powerpoint/2010/main" val="1024086991"/>
+      </p:ext>
+    </p:extLst>
+  </p:cSld>
+  <p:clrMapOvr>
+    <a:masterClrMapping/>
+  </p:clrMapOvr>
+</p:notes>
+</file>
+
 <file path=ppt/notesSlides/notesSlide2.xml><?xml version="1.0" encoding="utf-8"?>
 <p:notes xmlns:a="http://schemas.openxmlformats.org/drawingml/2006/main" xmlns:r="http://schemas.openxmlformats.org/officeDocument/2006/relationships" xmlns:p="http://schemas.openxmlformats.org/presentationml/2006/main">
   <p:cSld>
@@ -622,6 +1515,270 @@
             <a:fld id="{F7021451-1387-4CA6-816F-3879F97B5CBC}" type="slidenum">
               <a:rPr lang="en-US"/>
               <a:t>2</a:t>
+            </a:fld>
+            <a:endParaRPr lang="en-US"/>
+          </a:p>
+        </p:txBody>
+      </p:sp>
+    </p:spTree>
+    <p:extLst>
+      <p:ext uri="{BB962C8B-B14F-4D97-AF65-F5344CB8AC3E}">
+        <p14:creationId xmlns:p14="http://schemas.microsoft.com/office/powerpoint/2010/main" val="1024086991"/>
+      </p:ext>
+    </p:extLst>
+  </p:cSld>
+  <p:clrMapOvr>
+    <a:masterClrMapping/>
+  </p:clrMapOvr>
+</p:notes>
+</file>
+
+<file path=ppt/notesSlides/notesSlide20.xml><?xml version="1.0" encoding="utf-8"?>
+<p:notes xmlns:a="http://schemas.openxmlformats.org/drawingml/2006/main" xmlns:r="http://schemas.openxmlformats.org/officeDocument/2006/relationships" xmlns:p="http://schemas.openxmlformats.org/presentationml/2006/main">
+  <p:cSld>
+    <p:spTree>
+      <p:nvGrpSpPr>
+        <p:cNvPr id="1" name=""/>
+        <p:cNvGrpSpPr/>
+        <p:nvPr/>
+      </p:nvGrpSpPr>
+      <p:grpSpPr>
+        <a:xfrm>
+          <a:off x="0" y="0"/>
+          <a:ext cx="0" cy="0"/>
+          <a:chOff x="0" y="0"/>
+          <a:chExt cx="0" cy="0"/>
+        </a:xfrm>
+      </p:grpSpPr>
+      <p:sp>
+        <p:nvSpPr>
+          <p:cNvPr id="2" name="Slide Image Placeholder 1"/>
+          <p:cNvSpPr>
+            <a:spLocks noGrp="1" noRot="1" noChangeAspect="1"/>
+          </p:cNvSpPr>
+          <p:nvPr>
+            <p:ph type="sldImg"/>
+          </p:nvPr>
+        </p:nvSpPr>
+        <p:spPr/>
+      </p:sp>
+      <p:sp>
+        <p:nvSpPr>
+          <p:cNvPr id="3" name="Notes Placeholder 2"/>
+          <p:cNvSpPr>
+            <a:spLocks noGrp="1"/>
+          </p:cNvSpPr>
+          <p:nvPr>
+            <p:ph type="body" idx="1"/>
+          </p:nvPr>
+        </p:nvSpPr>
+        <p:spPr/>
+        <p:txBody>
+          <a:bodyPr/>
+          <a:lstStyle/>
+          <a:p>
+            <a:r>
+              <a:rPr lang="en-US" dirty="0"/>
+              <a:t/>
+            </a:r>
+            <a:endParaRPr lang="en-US" dirty="0"/>
+          </a:p>
+        </p:txBody>
+      </p:sp>
+      <p:sp>
+        <p:nvSpPr>
+          <p:cNvPr id="4" name="Slide Number Placeholder 3"/>
+          <p:cNvSpPr>
+            <a:spLocks noGrp="1"/>
+          </p:cNvSpPr>
+          <p:nvPr>
+            <p:ph type="sldNum" sz="quarter" idx="10"/>
+          </p:nvPr>
+        </p:nvSpPr>
+        <p:spPr/>
+        <p:txBody>
+          <a:bodyPr/>
+          <a:lstStyle/>
+          <a:p>
+            <a:fld id="{F7021451-1387-4CA6-816F-3879F97B5CBC}" type="slidenum">
+              <a:rPr lang="en-US"/>
+              <a:t>20</a:t>
+            </a:fld>
+            <a:endParaRPr lang="en-US"/>
+          </a:p>
+        </p:txBody>
+      </p:sp>
+    </p:spTree>
+    <p:extLst>
+      <p:ext uri="{BB962C8B-B14F-4D97-AF65-F5344CB8AC3E}">
+        <p14:creationId xmlns:p14="http://schemas.microsoft.com/office/powerpoint/2010/main" val="1024086991"/>
+      </p:ext>
+    </p:extLst>
+  </p:cSld>
+  <p:clrMapOvr>
+    <a:masterClrMapping/>
+  </p:clrMapOvr>
+</p:notes>
+</file>
+
+<file path=ppt/notesSlides/notesSlide21.xml><?xml version="1.0" encoding="utf-8"?>
+<p:notes xmlns:a="http://schemas.openxmlformats.org/drawingml/2006/main" xmlns:r="http://schemas.openxmlformats.org/officeDocument/2006/relationships" xmlns:p="http://schemas.openxmlformats.org/presentationml/2006/main">
+  <p:cSld>
+    <p:spTree>
+      <p:nvGrpSpPr>
+        <p:cNvPr id="1" name=""/>
+        <p:cNvGrpSpPr/>
+        <p:nvPr/>
+      </p:nvGrpSpPr>
+      <p:grpSpPr>
+        <a:xfrm>
+          <a:off x="0" y="0"/>
+          <a:ext cx="0" cy="0"/>
+          <a:chOff x="0" y="0"/>
+          <a:chExt cx="0" cy="0"/>
+        </a:xfrm>
+      </p:grpSpPr>
+      <p:sp>
+        <p:nvSpPr>
+          <p:cNvPr id="2" name="Slide Image Placeholder 1"/>
+          <p:cNvSpPr>
+            <a:spLocks noGrp="1" noRot="1" noChangeAspect="1"/>
+          </p:cNvSpPr>
+          <p:nvPr>
+            <p:ph type="sldImg"/>
+          </p:nvPr>
+        </p:nvSpPr>
+        <p:spPr/>
+      </p:sp>
+      <p:sp>
+        <p:nvSpPr>
+          <p:cNvPr id="3" name="Notes Placeholder 2"/>
+          <p:cNvSpPr>
+            <a:spLocks noGrp="1"/>
+          </p:cNvSpPr>
+          <p:nvPr>
+            <p:ph type="body" idx="1"/>
+          </p:nvPr>
+        </p:nvSpPr>
+        <p:spPr/>
+        <p:txBody>
+          <a:bodyPr/>
+          <a:lstStyle/>
+          <a:p>
+            <a:r>
+              <a:rPr lang="en-US" dirty="0"/>
+              <a:t/>
+            </a:r>
+            <a:endParaRPr lang="en-US" dirty="0"/>
+          </a:p>
+        </p:txBody>
+      </p:sp>
+      <p:sp>
+        <p:nvSpPr>
+          <p:cNvPr id="4" name="Slide Number Placeholder 3"/>
+          <p:cNvSpPr>
+            <a:spLocks noGrp="1"/>
+          </p:cNvSpPr>
+          <p:nvPr>
+            <p:ph type="sldNum" sz="quarter" idx="10"/>
+          </p:nvPr>
+        </p:nvSpPr>
+        <p:spPr/>
+        <p:txBody>
+          <a:bodyPr/>
+          <a:lstStyle/>
+          <a:p>
+            <a:fld id="{F7021451-1387-4CA6-816F-3879F97B5CBC}" type="slidenum">
+              <a:rPr lang="en-US"/>
+              <a:t>21</a:t>
+            </a:fld>
+            <a:endParaRPr lang="en-US"/>
+          </a:p>
+        </p:txBody>
+      </p:sp>
+    </p:spTree>
+    <p:extLst>
+      <p:ext uri="{BB962C8B-B14F-4D97-AF65-F5344CB8AC3E}">
+        <p14:creationId xmlns:p14="http://schemas.microsoft.com/office/powerpoint/2010/main" val="1024086991"/>
+      </p:ext>
+    </p:extLst>
+  </p:cSld>
+  <p:clrMapOvr>
+    <a:masterClrMapping/>
+  </p:clrMapOvr>
+</p:notes>
+</file>
+
+<file path=ppt/notesSlides/notesSlide22.xml><?xml version="1.0" encoding="utf-8"?>
+<p:notes xmlns:a="http://schemas.openxmlformats.org/drawingml/2006/main" xmlns:r="http://schemas.openxmlformats.org/officeDocument/2006/relationships" xmlns:p="http://schemas.openxmlformats.org/presentationml/2006/main">
+  <p:cSld>
+    <p:spTree>
+      <p:nvGrpSpPr>
+        <p:cNvPr id="1" name=""/>
+        <p:cNvGrpSpPr/>
+        <p:nvPr/>
+      </p:nvGrpSpPr>
+      <p:grpSpPr>
+        <a:xfrm>
+          <a:off x="0" y="0"/>
+          <a:ext cx="0" cy="0"/>
+          <a:chOff x="0" y="0"/>
+          <a:chExt cx="0" cy="0"/>
+        </a:xfrm>
+      </p:grpSpPr>
+      <p:sp>
+        <p:nvSpPr>
+          <p:cNvPr id="2" name="Slide Image Placeholder 1"/>
+          <p:cNvSpPr>
+            <a:spLocks noGrp="1" noRot="1" noChangeAspect="1"/>
+          </p:cNvSpPr>
+          <p:nvPr>
+            <p:ph type="sldImg"/>
+          </p:nvPr>
+        </p:nvSpPr>
+        <p:spPr/>
+      </p:sp>
+      <p:sp>
+        <p:nvSpPr>
+          <p:cNvPr id="3" name="Notes Placeholder 2"/>
+          <p:cNvSpPr>
+            <a:spLocks noGrp="1"/>
+          </p:cNvSpPr>
+          <p:nvPr>
+            <p:ph type="body" idx="1"/>
+          </p:nvPr>
+        </p:nvSpPr>
+        <p:spPr/>
+        <p:txBody>
+          <a:bodyPr/>
+          <a:lstStyle/>
+          <a:p>
+            <a:r>
+              <a:rPr lang="en-US" dirty="0"/>
+              <a:t/>
+            </a:r>
+            <a:endParaRPr lang="en-US" dirty="0"/>
+          </a:p>
+        </p:txBody>
+      </p:sp>
+      <p:sp>
+        <p:nvSpPr>
+          <p:cNvPr id="4" name="Slide Number Placeholder 3"/>
+          <p:cNvSpPr>
+            <a:spLocks noGrp="1"/>
+          </p:cNvSpPr>
+          <p:nvPr>
+            <p:ph type="sldNum" sz="quarter" idx="10"/>
+          </p:nvPr>
+        </p:nvSpPr>
+        <p:spPr/>
+        <p:txBody>
+          <a:bodyPr/>
+          <a:lstStyle/>
+          <a:p>
+            <a:fld id="{F7021451-1387-4CA6-816F-3879F97B5CBC}" type="slidenum">
+              <a:rPr lang="en-US"/>
+              <a:t>22</a:t>
             </a:fld>
             <a:endParaRPr lang="en-US"/>
           </a:p>
@@ -1718,7 +2875,7 @@
                 <a:ea typeface="Arial" pitchFamily="34" charset="-122"/>
                 <a:cs typeface="Arial" pitchFamily="34" charset="-120"/>
               </a:rPr>
-              <a:t>An internet-facing, load-balanced application across two Availability Zones, with a fully isolated data tier — built for high availability, least-privilege security, and cost awareness.</a:t>
+              <a:t>Designed, built, secured, tested, and cost-analyzed — presented through the live AWS console.</a:t>
             </a:r>
             <a:endParaRPr lang="en-US" sz="1600" dirty="0"/>
           </a:p>
@@ -1760,6 +2917,3843 @@
               <a:t>Dennis   ·   us-east-1   ·   2026-07</a:t>
             </a:r>
             <a:endParaRPr lang="en-US" sz="1200" dirty="0"/>
+          </a:p>
+        </p:txBody>
+      </p:sp>
+    </p:spTree>
+  </p:cSld>
+  <p:clrMapOvr>
+    <a:masterClrMapping/>
+  </p:clrMapOvr>
+</p:sld>
+</file>
+
+<file path=ppt/slides/slide10.xml><?xml version="1.0" encoding="utf-8"?>
+<p:sld xmlns:a="http://schemas.openxmlformats.org/drawingml/2006/main" xmlns:r="http://schemas.openxmlformats.org/officeDocument/2006/relationships" xmlns:p="http://schemas.openxmlformats.org/presentationml/2006/main">
+  <p:cSld name="Slide 10">
+    <p:bg>
+      <p:bgPr>
+        <a:solidFill>
+          <a:srgbClr val="FFFFFF"/>
+        </a:solidFill>
+      </p:bgPr>
+    </p:bg>
+    <p:spTree>
+      <p:nvGrpSpPr>
+        <p:cNvPr id="1" name=""/>
+        <p:cNvGrpSpPr/>
+        <p:nvPr/>
+      </p:nvGrpSpPr>
+      <p:grpSpPr>
+        <a:xfrm>
+          <a:off x="0" y="0"/>
+          <a:ext cx="0" cy="0"/>
+          <a:chOff x="0" y="0"/>
+          <a:chExt cx="0" cy="0"/>
+        </a:xfrm>
+      </p:grpSpPr>
+      <p:sp>
+        <p:nvSpPr>
+          <p:cNvPr id="2" name="Shape 0"/>
+          <p:cNvSpPr/>
+          <p:nvPr/>
+        </p:nvSpPr>
+        <p:spPr>
+          <a:xfrm>
+            <a:off x="0" y="0"/>
+            <a:ext cx="256032" cy="6858000"/>
+          </a:xfrm>
+          <a:prstGeom prst="rect">
+            <a:avLst/>
+          </a:prstGeom>
+          <a:solidFill>
+            <a:srgbClr val="3B5BDB"/>
+          </a:solidFill>
+          <a:ln/>
+        </p:spPr>
+      </p:sp>
+      <p:sp>
+        <p:nvSpPr>
+          <p:cNvPr id="3" name="Text 1"/>
+          <p:cNvSpPr/>
+          <p:nvPr/>
+        </p:nvSpPr>
+        <p:spPr>
+          <a:xfrm>
+            <a:off x="640080" y="384048"/>
+            <a:ext cx="10972800" cy="274320"/>
+          </a:xfrm>
+          <a:prstGeom prst="rect">
+            <a:avLst/>
+          </a:prstGeom>
+          <a:noFill/>
+          <a:ln/>
+        </p:spPr>
+        <p:txBody>
+          <a:bodyPr wrap="square" rtlCol="0" anchor="ctr"/>
+          <a:lstStyle/>
+          <a:p>
+            <a:pPr indent="0" marL="0">
+              <a:buNone/>
+            </a:pPr>
+            <a:r>
+              <a:rPr lang="en-US" sz="1200" b="1" spc="200" kern="0" dirty="0">
+                <a:solidFill>
+                  <a:srgbClr val="3B5BDB"/>
+                </a:solidFill>
+                <a:latin typeface="Arial" pitchFamily="34" charset="0"/>
+                <a:ea typeface="Arial" pitchFamily="34" charset="-122"/>
+                <a:cs typeface="Arial" pitchFamily="34" charset="-120"/>
+              </a:rPr>
+              <a:t>HIGH AVAILABILITY</a:t>
+            </a:r>
+            <a:endParaRPr lang="en-US" sz="1200" dirty="0"/>
+          </a:p>
+        </p:txBody>
+      </p:sp>
+      <p:sp>
+        <p:nvSpPr>
+          <p:cNvPr id="4" name="Text 2"/>
+          <p:cNvSpPr/>
+          <p:nvPr/>
+        </p:nvSpPr>
+        <p:spPr>
+          <a:xfrm>
+            <a:off x="640080" y="676656"/>
+            <a:ext cx="10972800" cy="731520"/>
+          </a:xfrm>
+          <a:prstGeom prst="rect">
+            <a:avLst/>
+          </a:prstGeom>
+          <a:noFill/>
+          <a:ln/>
+        </p:spPr>
+        <p:txBody>
+          <a:bodyPr wrap="square" rtlCol="0" anchor="ctr"/>
+          <a:lstStyle/>
+          <a:p>
+            <a:pPr indent="0" marL="0">
+              <a:buNone/>
+            </a:pPr>
+            <a:r>
+              <a:rPr lang="en-US" sz="2700" b="1" dirty="0">
+                <a:solidFill>
+                  <a:srgbClr val="0F172A"/>
+                </a:solidFill>
+                <a:latin typeface="Arial" pitchFamily="34" charset="0"/>
+                <a:ea typeface="Arial" pitchFamily="34" charset="-122"/>
+                <a:cs typeface="Arial" pitchFamily="34" charset="-120"/>
+              </a:rPr>
+              <a:t>Auto Scaling Group</a:t>
+            </a:r>
+            <a:endParaRPr lang="en-US" sz="2700" dirty="0"/>
+          </a:p>
+        </p:txBody>
+      </p:sp>
+      <p:sp>
+        <p:nvSpPr>
+          <p:cNvPr id="5" name="Shape 3"/>
+          <p:cNvSpPr/>
+          <p:nvPr/>
+        </p:nvSpPr>
+        <p:spPr>
+          <a:xfrm>
+            <a:off x="548640" y="1463040"/>
+            <a:ext cx="7315200" cy="4846320"/>
+          </a:xfrm>
+          <a:prstGeom prst="roundRect">
+            <a:avLst>
+              <a:gd name="adj" fmla="val 943"/>
+            </a:avLst>
+          </a:prstGeom>
+          <a:solidFill>
+            <a:srgbClr val="F6F7F9"/>
+          </a:solidFill>
+          <a:ln w="12700">
+            <a:solidFill>
+              <a:srgbClr val="DBE1EA"/>
+            </a:solidFill>
+            <a:prstDash val="solid"/>
+          </a:ln>
+        </p:spPr>
+      </p:sp>
+      <p:pic>
+        <p:nvPicPr>
+          <p:cNvPr id="6" name="Image 0" descr="C:/Users/beite/Desktop/IRONHACK/Cloud Engineering/week3/project-1-3-tier-cloud-architecture/presentation/screenshots/08-asg.png">    </p:cNvPr>
+          <p:cNvPicPr>
+            <a:picLocks noChangeAspect="1"/>
+          </p:cNvPicPr>
+          <p:nvPr/>
+        </p:nvPicPr>
+        <p:blipFill>
+          <a:blip r:embed="rId1"/>
+          <a:srcRect l="0" r="0" t="0" b="0"/>
+          <a:stretch/>
+        </p:blipFill>
+        <p:spPr>
+          <a:xfrm>
+            <a:off x="685800" y="1572768"/>
+            <a:ext cx="7040880" cy="4626864"/>
+          </a:xfrm>
+          <a:prstGeom prst="rect">
+            <a:avLst/>
+          </a:prstGeom>
+        </p:spPr>
+      </p:pic>
+      <p:sp>
+        <p:nvSpPr>
+          <p:cNvPr id="7" name="Text 4"/>
+          <p:cNvSpPr/>
+          <p:nvPr/>
+        </p:nvSpPr>
+        <p:spPr>
+          <a:xfrm>
+            <a:off x="8138160" y="1737360"/>
+            <a:ext cx="3566160" cy="4206240"/>
+          </a:xfrm>
+          <a:prstGeom prst="rect">
+            <a:avLst/>
+          </a:prstGeom>
+          <a:noFill/>
+          <a:ln/>
+        </p:spPr>
+        <p:txBody>
+          <a:bodyPr wrap="square" rtlCol="0" anchor="t"/>
+          <a:lstStyle/>
+          <a:p>
+            <a:pPr marL="177800" indent="-177800">
+              <a:spcAft>
+                <a:spcPts val="800"/>
+              </a:spcAft>
+              <a:buSzPct val="100000"/>
+              <a:buChar char="•"/>
+            </a:pPr>
+            <a:r>
+              <a:rPr lang="en-US" sz="1500" dirty="0">
+                <a:solidFill>
+                  <a:srgbClr val="3B5BDB"/>
+                </a:solidFill>
+                <a:latin typeface="Arial" pitchFamily="34" charset="0"/>
+                <a:ea typeface="Arial" pitchFamily="34" charset="-122"/>
+                <a:cs typeface="Arial" pitchFamily="34" charset="-120"/>
+              </a:rPr>
+              <a:t>min 3 / desired 3 / max 4</a:t>
+            </a:r>
+            <a:endParaRPr lang="en-US" sz="1500" dirty="0"/>
+          </a:p>
+          <a:p>
+            <a:pPr marL="177800" indent="-177800">
+              <a:spcAft>
+                <a:spcPts val="800"/>
+              </a:spcAft>
+              <a:buSzPct val="100000"/>
+              <a:buChar char="•"/>
+            </a:pPr>
+            <a:r>
+              <a:rPr lang="en-US" sz="1500" dirty="0">
+                <a:solidFill>
+                  <a:srgbClr val="0F172A"/>
+                </a:solidFill>
+                <a:latin typeface="Arial" pitchFamily="34" charset="0"/>
+                <a:ea typeface="Arial" pitchFamily="34" charset="-122"/>
+                <a:cs typeface="Arial" pitchFamily="34" charset="-120"/>
+              </a:rPr>
+              <a:t>Replaces failed instances automatically</a:t>
+            </a:r>
+            <a:endParaRPr lang="en-US" sz="1500" dirty="0"/>
+          </a:p>
+          <a:p>
+            <a:pPr marL="177800" indent="-177800">
+              <a:spcAft>
+                <a:spcPts val="800"/>
+              </a:spcAft>
+              <a:buSzPct val="100000"/>
+              <a:buChar char="•"/>
+            </a:pPr>
+            <a:r>
+              <a:rPr lang="en-US" sz="1500" dirty="0">
+                <a:solidFill>
+                  <a:srgbClr val="0F172A"/>
+                </a:solidFill>
+                <a:latin typeface="Arial" pitchFamily="34" charset="0"/>
+                <a:ea typeface="Arial" pitchFamily="34" charset="-122"/>
+                <a:cs typeface="Arial" pitchFamily="34" charset="-120"/>
+              </a:rPr>
+              <a:t>Instances across 2 AZs</a:t>
+            </a:r>
+            <a:endParaRPr lang="en-US" sz="1500" dirty="0"/>
+          </a:p>
+        </p:txBody>
+      </p:sp>
+      <p:sp>
+        <p:nvSpPr>
+          <p:cNvPr id="8" name="Text 5"/>
+          <p:cNvSpPr/>
+          <p:nvPr/>
+        </p:nvSpPr>
+        <p:spPr>
+          <a:xfrm>
+            <a:off x="8138160" y="6035040"/>
+            <a:ext cx="3566160" cy="274320"/>
+          </a:xfrm>
+          <a:prstGeom prst="rect">
+            <a:avLst/>
+          </a:prstGeom>
+          <a:noFill/>
+          <a:ln/>
+        </p:spPr>
+        <p:txBody>
+          <a:bodyPr wrap="square" rtlCol="0" anchor="ctr"/>
+          <a:lstStyle/>
+          <a:p>
+            <a:pPr indent="0" marL="0">
+              <a:buNone/>
+            </a:pPr>
+            <a:r>
+              <a:rPr lang="en-US" sz="900" i="1" dirty="0">
+                <a:solidFill>
+                  <a:srgbClr val="8A94A3"/>
+                </a:solidFill>
+                <a:latin typeface="Arial" pitchFamily="34" charset="0"/>
+                <a:ea typeface="Arial" pitchFamily="34" charset="-122"/>
+                <a:cs typeface="Arial" pitchFamily="34" charset="-120"/>
+              </a:rPr>
+              <a:t>08-asg.png</a:t>
+            </a:r>
+            <a:endParaRPr lang="en-US" sz="900" dirty="0"/>
+          </a:p>
+        </p:txBody>
+      </p:sp>
+    </p:spTree>
+  </p:cSld>
+  <p:clrMapOvr>
+    <a:masterClrMapping/>
+  </p:clrMapOvr>
+</p:sld>
+</file>
+
+<file path=ppt/slides/slide11.xml><?xml version="1.0" encoding="utf-8"?>
+<p:sld xmlns:a="http://schemas.openxmlformats.org/drawingml/2006/main" xmlns:r="http://schemas.openxmlformats.org/officeDocument/2006/relationships" xmlns:p="http://schemas.openxmlformats.org/presentationml/2006/main">
+  <p:cSld name="Slide 11">
+    <p:bg>
+      <p:bgPr>
+        <a:solidFill>
+          <a:srgbClr val="FFFFFF"/>
+        </a:solidFill>
+      </p:bgPr>
+    </p:bg>
+    <p:spTree>
+      <p:nvGrpSpPr>
+        <p:cNvPr id="1" name=""/>
+        <p:cNvGrpSpPr/>
+        <p:nvPr/>
+      </p:nvGrpSpPr>
+      <p:grpSpPr>
+        <a:xfrm>
+          <a:off x="0" y="0"/>
+          <a:ext cx="0" cy="0"/>
+          <a:chOff x="0" y="0"/>
+          <a:chExt cx="0" cy="0"/>
+        </a:xfrm>
+      </p:grpSpPr>
+      <p:sp>
+        <p:nvSpPr>
+          <p:cNvPr id="2" name="Shape 0"/>
+          <p:cNvSpPr/>
+          <p:nvPr/>
+        </p:nvSpPr>
+        <p:spPr>
+          <a:xfrm>
+            <a:off x="0" y="0"/>
+            <a:ext cx="256032" cy="6858000"/>
+          </a:xfrm>
+          <a:prstGeom prst="rect">
+            <a:avLst/>
+          </a:prstGeom>
+          <a:solidFill>
+            <a:srgbClr val="3B5BDB"/>
+          </a:solidFill>
+          <a:ln/>
+        </p:spPr>
+      </p:sp>
+      <p:sp>
+        <p:nvSpPr>
+          <p:cNvPr id="3" name="Text 1"/>
+          <p:cNvSpPr/>
+          <p:nvPr/>
+        </p:nvSpPr>
+        <p:spPr>
+          <a:xfrm>
+            <a:off x="640080" y="384048"/>
+            <a:ext cx="10972800" cy="274320"/>
+          </a:xfrm>
+          <a:prstGeom prst="rect">
+            <a:avLst/>
+          </a:prstGeom>
+          <a:noFill/>
+          <a:ln/>
+        </p:spPr>
+        <p:txBody>
+          <a:bodyPr wrap="square" rtlCol="0" anchor="ctr"/>
+          <a:lstStyle/>
+          <a:p>
+            <a:pPr indent="0" marL="0">
+              <a:buNone/>
+            </a:pPr>
+            <a:r>
+              <a:rPr lang="en-US" sz="1200" b="1" spc="200" kern="0" dirty="0">
+                <a:solidFill>
+                  <a:srgbClr val="3B5BDB"/>
+                </a:solidFill>
+                <a:latin typeface="Arial" pitchFamily="34" charset="0"/>
+                <a:ea typeface="Arial" pitchFamily="34" charset="-122"/>
+                <a:cs typeface="Arial" pitchFamily="34" charset="-120"/>
+              </a:rPr>
+              <a:t>HIGH AVAILABILITY</a:t>
+            </a:r>
+            <a:endParaRPr lang="en-US" sz="1200" dirty="0"/>
+          </a:p>
+        </p:txBody>
+      </p:sp>
+      <p:sp>
+        <p:nvSpPr>
+          <p:cNvPr id="4" name="Text 2"/>
+          <p:cNvSpPr/>
+          <p:nvPr/>
+        </p:nvSpPr>
+        <p:spPr>
+          <a:xfrm>
+            <a:off x="640080" y="676656"/>
+            <a:ext cx="10972800" cy="731520"/>
+          </a:xfrm>
+          <a:prstGeom prst="rect">
+            <a:avLst/>
+          </a:prstGeom>
+          <a:noFill/>
+          <a:ln/>
+        </p:spPr>
+        <p:txBody>
+          <a:bodyPr wrap="square" rtlCol="0" anchor="ctr"/>
+          <a:lstStyle/>
+          <a:p>
+            <a:pPr indent="0" marL="0">
+              <a:buNone/>
+            </a:pPr>
+            <a:r>
+              <a:rPr lang="en-US" sz="2700" b="1" dirty="0">
+                <a:solidFill>
+                  <a:srgbClr val="0F172A"/>
+                </a:solidFill>
+                <a:latin typeface="Arial" pitchFamily="34" charset="0"/>
+                <a:ea typeface="Arial" pitchFamily="34" charset="-122"/>
+                <a:cs typeface="Arial" pitchFamily="34" charset="-120"/>
+              </a:rPr>
+              <a:t>CPU target-tracking policy</a:t>
+            </a:r>
+            <a:endParaRPr lang="en-US" sz="2700" dirty="0"/>
+          </a:p>
+        </p:txBody>
+      </p:sp>
+      <p:sp>
+        <p:nvSpPr>
+          <p:cNvPr id="5" name="Shape 3"/>
+          <p:cNvSpPr/>
+          <p:nvPr/>
+        </p:nvSpPr>
+        <p:spPr>
+          <a:xfrm>
+            <a:off x="548640" y="1463040"/>
+            <a:ext cx="7315200" cy="4846320"/>
+          </a:xfrm>
+          <a:prstGeom prst="roundRect">
+            <a:avLst>
+              <a:gd name="adj" fmla="val 943"/>
+            </a:avLst>
+          </a:prstGeom>
+          <a:solidFill>
+            <a:srgbClr val="F6F7F9"/>
+          </a:solidFill>
+          <a:ln w="12700">
+            <a:solidFill>
+              <a:srgbClr val="DBE1EA"/>
+            </a:solidFill>
+            <a:prstDash val="solid"/>
+          </a:ln>
+        </p:spPr>
+      </p:sp>
+      <p:pic>
+        <p:nvPicPr>
+          <p:cNvPr id="6" name="Image 0" descr="C:/Users/beite/Desktop/IRONHACK/Cloud Engineering/week3/project-1-3-tier-cloud-architecture/presentation/screenshots/09-asg-scaling-policy.png">    </p:cNvPr>
+          <p:cNvPicPr>
+            <a:picLocks noChangeAspect="1"/>
+          </p:cNvPicPr>
+          <p:nvPr/>
+        </p:nvPicPr>
+        <p:blipFill>
+          <a:blip r:embed="rId1"/>
+          <a:srcRect l="0" r="0" t="0" b="0"/>
+          <a:stretch/>
+        </p:blipFill>
+        <p:spPr>
+          <a:xfrm>
+            <a:off x="685800" y="1572768"/>
+            <a:ext cx="7040880" cy="4626864"/>
+          </a:xfrm>
+          <a:prstGeom prst="rect">
+            <a:avLst/>
+          </a:prstGeom>
+        </p:spPr>
+      </p:pic>
+      <p:sp>
+        <p:nvSpPr>
+          <p:cNvPr id="7" name="Text 4"/>
+          <p:cNvSpPr/>
+          <p:nvPr/>
+        </p:nvSpPr>
+        <p:spPr>
+          <a:xfrm>
+            <a:off x="8138160" y="1737360"/>
+            <a:ext cx="3566160" cy="4206240"/>
+          </a:xfrm>
+          <a:prstGeom prst="rect">
+            <a:avLst/>
+          </a:prstGeom>
+          <a:noFill/>
+          <a:ln/>
+        </p:spPr>
+        <p:txBody>
+          <a:bodyPr wrap="square" rtlCol="0" anchor="t"/>
+          <a:lstStyle/>
+          <a:p>
+            <a:pPr marL="177800" indent="-177800">
+              <a:spcAft>
+                <a:spcPts val="800"/>
+              </a:spcAft>
+              <a:buSzPct val="100000"/>
+              <a:buChar char="•"/>
+            </a:pPr>
+            <a:r>
+              <a:rPr lang="en-US" sz="1500" dirty="0">
+                <a:solidFill>
+                  <a:srgbClr val="3B5BDB"/>
+                </a:solidFill>
+                <a:latin typeface="Arial" pitchFamily="34" charset="0"/>
+                <a:ea typeface="Arial" pitchFamily="34" charset="-122"/>
+                <a:cs typeface="Arial" pitchFamily="34" charset="-120"/>
+              </a:rPr>
+              <a:t>Scales on average CPU = 50%</a:t>
+            </a:r>
+            <a:endParaRPr lang="en-US" sz="1500" dirty="0"/>
+          </a:p>
+          <a:p>
+            <a:pPr marL="177800" indent="-177800">
+              <a:spcAft>
+                <a:spcPts val="800"/>
+              </a:spcAft>
+              <a:buSzPct val="100000"/>
+              <a:buChar char="•"/>
+            </a:pPr>
+            <a:r>
+              <a:rPr lang="en-US" sz="1500" dirty="0">
+                <a:solidFill>
+                  <a:srgbClr val="0F172A"/>
+                </a:solidFill>
+                <a:latin typeface="Arial" pitchFamily="34" charset="0"/>
+                <a:ea typeface="Arial" pitchFamily="34" charset="-122"/>
+                <a:cs typeface="Arial" pitchFamily="34" charset="-120"/>
+              </a:rPr>
+              <a:t>Scales out to 4 under load</a:t>
+            </a:r>
+            <a:endParaRPr lang="en-US" sz="1500" dirty="0"/>
+          </a:p>
+          <a:p>
+            <a:pPr marL="177800" indent="-177800">
+              <a:spcAft>
+                <a:spcPts val="800"/>
+              </a:spcAft>
+              <a:buSzPct val="100000"/>
+              <a:buChar char="•"/>
+            </a:pPr>
+            <a:r>
+              <a:rPr lang="en-US" sz="1500" dirty="0">
+                <a:solidFill>
+                  <a:srgbClr val="0F172A"/>
+                </a:solidFill>
+                <a:latin typeface="Arial" pitchFamily="34" charset="0"/>
+                <a:ea typeface="Arial" pitchFamily="34" charset="-122"/>
+                <a:cs typeface="Arial" pitchFamily="34" charset="-120"/>
+              </a:rPr>
+              <a:t>Floor of 3 guarantees the HA baseline</a:t>
+            </a:r>
+            <a:endParaRPr lang="en-US" sz="1500" dirty="0"/>
+          </a:p>
+        </p:txBody>
+      </p:sp>
+      <p:sp>
+        <p:nvSpPr>
+          <p:cNvPr id="8" name="Text 5"/>
+          <p:cNvSpPr/>
+          <p:nvPr/>
+        </p:nvSpPr>
+        <p:spPr>
+          <a:xfrm>
+            <a:off x="8138160" y="6035040"/>
+            <a:ext cx="3566160" cy="274320"/>
+          </a:xfrm>
+          <a:prstGeom prst="rect">
+            <a:avLst/>
+          </a:prstGeom>
+          <a:noFill/>
+          <a:ln/>
+        </p:spPr>
+        <p:txBody>
+          <a:bodyPr wrap="square" rtlCol="0" anchor="ctr"/>
+          <a:lstStyle/>
+          <a:p>
+            <a:pPr indent="0" marL="0">
+              <a:buNone/>
+            </a:pPr>
+            <a:r>
+              <a:rPr lang="en-US" sz="900" i="1" dirty="0">
+                <a:solidFill>
+                  <a:srgbClr val="8A94A3"/>
+                </a:solidFill>
+                <a:latin typeface="Arial" pitchFamily="34" charset="0"/>
+                <a:ea typeface="Arial" pitchFamily="34" charset="-122"/>
+                <a:cs typeface="Arial" pitchFamily="34" charset="-120"/>
+              </a:rPr>
+              <a:t>09-asg-scaling-policy.png</a:t>
+            </a:r>
+            <a:endParaRPr lang="en-US" sz="900" dirty="0"/>
+          </a:p>
+        </p:txBody>
+      </p:sp>
+    </p:spTree>
+  </p:cSld>
+  <p:clrMapOvr>
+    <a:masterClrMapping/>
+  </p:clrMapOvr>
+</p:sld>
+</file>
+
+<file path=ppt/slides/slide12.xml><?xml version="1.0" encoding="utf-8"?>
+<p:sld xmlns:a="http://schemas.openxmlformats.org/drawingml/2006/main" xmlns:r="http://schemas.openxmlformats.org/officeDocument/2006/relationships" xmlns:p="http://schemas.openxmlformats.org/presentationml/2006/main">
+  <p:cSld name="Slide 12">
+    <p:bg>
+      <p:bgPr>
+        <a:solidFill>
+          <a:srgbClr val="FFFFFF"/>
+        </a:solidFill>
+      </p:bgPr>
+    </p:bg>
+    <p:spTree>
+      <p:nvGrpSpPr>
+        <p:cNvPr id="1" name=""/>
+        <p:cNvGrpSpPr/>
+        <p:nvPr/>
+      </p:nvGrpSpPr>
+      <p:grpSpPr>
+        <a:xfrm>
+          <a:off x="0" y="0"/>
+          <a:ext cx="0" cy="0"/>
+          <a:chOff x="0" y="0"/>
+          <a:chExt cx="0" cy="0"/>
+        </a:xfrm>
+      </p:grpSpPr>
+      <p:sp>
+        <p:nvSpPr>
+          <p:cNvPr id="2" name="Shape 0"/>
+          <p:cNvSpPr/>
+          <p:nvPr/>
+        </p:nvSpPr>
+        <p:spPr>
+          <a:xfrm>
+            <a:off x="0" y="0"/>
+            <a:ext cx="256032" cy="6858000"/>
+          </a:xfrm>
+          <a:prstGeom prst="rect">
+            <a:avLst/>
+          </a:prstGeom>
+          <a:solidFill>
+            <a:srgbClr val="3B5BDB"/>
+          </a:solidFill>
+          <a:ln/>
+        </p:spPr>
+      </p:sp>
+      <p:sp>
+        <p:nvSpPr>
+          <p:cNvPr id="3" name="Text 1"/>
+          <p:cNvSpPr/>
+          <p:nvPr/>
+        </p:nvSpPr>
+        <p:spPr>
+          <a:xfrm>
+            <a:off x="640080" y="384048"/>
+            <a:ext cx="10972800" cy="274320"/>
+          </a:xfrm>
+          <a:prstGeom prst="rect">
+            <a:avLst/>
+          </a:prstGeom>
+          <a:noFill/>
+          <a:ln/>
+        </p:spPr>
+        <p:txBody>
+          <a:bodyPr wrap="square" rtlCol="0" anchor="ctr"/>
+          <a:lstStyle/>
+          <a:p>
+            <a:pPr indent="0" marL="0">
+              <a:buNone/>
+            </a:pPr>
+            <a:r>
+              <a:rPr lang="en-US" sz="1200" b="1" spc="200" kern="0" dirty="0">
+                <a:solidFill>
+                  <a:srgbClr val="3B5BDB"/>
+                </a:solidFill>
+                <a:latin typeface="Arial" pitchFamily="34" charset="0"/>
+                <a:ea typeface="Arial" pitchFamily="34" charset="-122"/>
+                <a:cs typeface="Arial" pitchFamily="34" charset="-120"/>
+              </a:rPr>
+              <a:t>SECURITY ADD-ON</a:t>
+            </a:r>
+            <a:endParaRPr lang="en-US" sz="1200" dirty="0"/>
+          </a:p>
+        </p:txBody>
+      </p:sp>
+      <p:sp>
+        <p:nvSpPr>
+          <p:cNvPr id="4" name="Text 2"/>
+          <p:cNvSpPr/>
+          <p:nvPr/>
+        </p:nvSpPr>
+        <p:spPr>
+          <a:xfrm>
+            <a:off x="640080" y="676656"/>
+            <a:ext cx="10972800" cy="731520"/>
+          </a:xfrm>
+          <a:prstGeom prst="rect">
+            <a:avLst/>
+          </a:prstGeom>
+          <a:noFill/>
+          <a:ln/>
+        </p:spPr>
+        <p:txBody>
+          <a:bodyPr wrap="square" rtlCol="0" anchor="ctr"/>
+          <a:lstStyle/>
+          <a:p>
+            <a:pPr indent="0" marL="0">
+              <a:buNone/>
+            </a:pPr>
+            <a:r>
+              <a:rPr lang="en-US" sz="2700" b="1" dirty="0">
+                <a:solidFill>
+                  <a:srgbClr val="0F172A"/>
+                </a:solidFill>
+                <a:latin typeface="Arial" pitchFamily="34" charset="0"/>
+                <a:ea typeface="Arial" pitchFamily="34" charset="-122"/>
+                <a:cs typeface="Arial" pitchFamily="34" charset="-120"/>
+              </a:rPr>
+              <a:t>HTTPS — ACM certificate</a:t>
+            </a:r>
+            <a:endParaRPr lang="en-US" sz="2700" dirty="0"/>
+          </a:p>
+        </p:txBody>
+      </p:sp>
+      <p:sp>
+        <p:nvSpPr>
+          <p:cNvPr id="5" name="Shape 3"/>
+          <p:cNvSpPr/>
+          <p:nvPr/>
+        </p:nvSpPr>
+        <p:spPr>
+          <a:xfrm>
+            <a:off x="548640" y="1463040"/>
+            <a:ext cx="7315200" cy="4846320"/>
+          </a:xfrm>
+          <a:prstGeom prst="roundRect">
+            <a:avLst>
+              <a:gd name="adj" fmla="val 943"/>
+            </a:avLst>
+          </a:prstGeom>
+          <a:solidFill>
+            <a:srgbClr val="F6F7F9"/>
+          </a:solidFill>
+          <a:ln w="12700">
+            <a:solidFill>
+              <a:srgbClr val="DBE1EA"/>
+            </a:solidFill>
+            <a:prstDash val="solid"/>
+          </a:ln>
+        </p:spPr>
+      </p:sp>
+      <p:pic>
+        <p:nvPicPr>
+          <p:cNvPr id="6" name="Image 0" descr="C:/Users/beite/Desktop/IRONHACK/Cloud Engineering/week3/project-1-3-tier-cloud-architecture/presentation/screenshots/10-acm-https-cert.png">    </p:cNvPr>
+          <p:cNvPicPr>
+            <a:picLocks noChangeAspect="1"/>
+          </p:cNvPicPr>
+          <p:nvPr/>
+        </p:nvPicPr>
+        <p:blipFill>
+          <a:blip r:embed="rId1"/>
+          <a:srcRect l="0" r="0" t="0" b="0"/>
+          <a:stretch/>
+        </p:blipFill>
+        <p:spPr>
+          <a:xfrm>
+            <a:off x="685800" y="1572768"/>
+            <a:ext cx="7040880" cy="4626864"/>
+          </a:xfrm>
+          <a:prstGeom prst="rect">
+            <a:avLst/>
+          </a:prstGeom>
+        </p:spPr>
+      </p:pic>
+      <p:sp>
+        <p:nvSpPr>
+          <p:cNvPr id="7" name="Text 4"/>
+          <p:cNvSpPr/>
+          <p:nvPr/>
+        </p:nvSpPr>
+        <p:spPr>
+          <a:xfrm>
+            <a:off x="8138160" y="1737360"/>
+            <a:ext cx="3566160" cy="4206240"/>
+          </a:xfrm>
+          <a:prstGeom prst="rect">
+            <a:avLst/>
+          </a:prstGeom>
+          <a:noFill/>
+          <a:ln/>
+        </p:spPr>
+        <p:txBody>
+          <a:bodyPr wrap="square" rtlCol="0" anchor="t"/>
+          <a:lstStyle/>
+          <a:p>
+            <a:pPr marL="177800" indent="-177800">
+              <a:spcAft>
+                <a:spcPts val="800"/>
+              </a:spcAft>
+              <a:buSzPct val="100000"/>
+              <a:buChar char="•"/>
+            </a:pPr>
+            <a:r>
+              <a:rPr lang="en-US" sz="1500" dirty="0">
+                <a:solidFill>
+                  <a:srgbClr val="B45309"/>
+                </a:solidFill>
+                <a:latin typeface="Arial" pitchFamily="34" charset="0"/>
+                <a:ea typeface="Arial" pitchFamily="34" charset="-122"/>
+                <a:cs typeface="Arial" pitchFamily="34" charset="-120"/>
+              </a:rPr>
+              <a:t>TLS on the ALB (:443)</a:t>
+            </a:r>
+            <a:endParaRPr lang="en-US" sz="1500" dirty="0"/>
+          </a:p>
+          <a:p>
+            <a:pPr marL="177800" indent="-177800">
+              <a:spcAft>
+                <a:spcPts val="800"/>
+              </a:spcAft>
+              <a:buSzPct val="100000"/>
+              <a:buChar char="•"/>
+            </a:pPr>
+            <a:r>
+              <a:rPr lang="en-US" sz="1500" dirty="0">
+                <a:solidFill>
+                  <a:srgbClr val="0F172A"/>
+                </a:solidFill>
+                <a:latin typeface="Arial" pitchFamily="34" charset="0"/>
+                <a:ea typeface="Arial" pitchFamily="34" charset="-122"/>
+                <a:cs typeface="Arial" pitchFamily="34" charset="-120"/>
+              </a:rPr>
+              <a:t>ACM-managed certificate</a:t>
+            </a:r>
+            <a:endParaRPr lang="en-US" sz="1500" dirty="0"/>
+          </a:p>
+          <a:p>
+            <a:pPr marL="177800" indent="-177800">
+              <a:spcAft>
+                <a:spcPts val="800"/>
+              </a:spcAft>
+              <a:buSzPct val="100000"/>
+              <a:buChar char="•"/>
+            </a:pPr>
+            <a:r>
+              <a:rPr lang="en-US" sz="1500" dirty="0">
+                <a:solidFill>
+                  <a:srgbClr val="0F172A"/>
+                </a:solidFill>
+                <a:latin typeface="Arial" pitchFamily="34" charset="0"/>
+                <a:ea typeface="Arial" pitchFamily="34" charset="-122"/>
+                <a:cs typeface="Arial" pitchFamily="34" charset="-120"/>
+              </a:rPr>
+              <a:t>Self-signed for the demo</a:t>
+            </a:r>
+            <a:endParaRPr lang="en-US" sz="1500" dirty="0"/>
+          </a:p>
+        </p:txBody>
+      </p:sp>
+      <p:sp>
+        <p:nvSpPr>
+          <p:cNvPr id="8" name="Text 5"/>
+          <p:cNvSpPr/>
+          <p:nvPr/>
+        </p:nvSpPr>
+        <p:spPr>
+          <a:xfrm>
+            <a:off x="8138160" y="6035040"/>
+            <a:ext cx="3566160" cy="274320"/>
+          </a:xfrm>
+          <a:prstGeom prst="rect">
+            <a:avLst/>
+          </a:prstGeom>
+          <a:noFill/>
+          <a:ln/>
+        </p:spPr>
+        <p:txBody>
+          <a:bodyPr wrap="square" rtlCol="0" anchor="ctr"/>
+          <a:lstStyle/>
+          <a:p>
+            <a:pPr indent="0" marL="0">
+              <a:buNone/>
+            </a:pPr>
+            <a:r>
+              <a:rPr lang="en-US" sz="900" i="1" dirty="0">
+                <a:solidFill>
+                  <a:srgbClr val="8A94A3"/>
+                </a:solidFill>
+                <a:latin typeface="Arial" pitchFamily="34" charset="0"/>
+                <a:ea typeface="Arial" pitchFamily="34" charset="-122"/>
+                <a:cs typeface="Arial" pitchFamily="34" charset="-120"/>
+              </a:rPr>
+              <a:t>10-acm-https-cert.png</a:t>
+            </a:r>
+            <a:endParaRPr lang="en-US" sz="900" dirty="0"/>
+          </a:p>
+        </p:txBody>
+      </p:sp>
+    </p:spTree>
+  </p:cSld>
+  <p:clrMapOvr>
+    <a:masterClrMapping/>
+  </p:clrMapOvr>
+</p:sld>
+</file>
+
+<file path=ppt/slides/slide13.xml><?xml version="1.0" encoding="utf-8"?>
+<p:sld xmlns:a="http://schemas.openxmlformats.org/drawingml/2006/main" xmlns:r="http://schemas.openxmlformats.org/officeDocument/2006/relationships" xmlns:p="http://schemas.openxmlformats.org/presentationml/2006/main">
+  <p:cSld name="Slide 13">
+    <p:bg>
+      <p:bgPr>
+        <a:solidFill>
+          <a:srgbClr val="FFFFFF"/>
+        </a:solidFill>
+      </p:bgPr>
+    </p:bg>
+    <p:spTree>
+      <p:nvGrpSpPr>
+        <p:cNvPr id="1" name=""/>
+        <p:cNvGrpSpPr/>
+        <p:nvPr/>
+      </p:nvGrpSpPr>
+      <p:grpSpPr>
+        <a:xfrm>
+          <a:off x="0" y="0"/>
+          <a:ext cx="0" cy="0"/>
+          <a:chOff x="0" y="0"/>
+          <a:chExt cx="0" cy="0"/>
+        </a:xfrm>
+      </p:grpSpPr>
+      <p:sp>
+        <p:nvSpPr>
+          <p:cNvPr id="2" name="Shape 0"/>
+          <p:cNvSpPr/>
+          <p:nvPr/>
+        </p:nvSpPr>
+        <p:spPr>
+          <a:xfrm>
+            <a:off x="0" y="0"/>
+            <a:ext cx="256032" cy="6858000"/>
+          </a:xfrm>
+          <a:prstGeom prst="rect">
+            <a:avLst/>
+          </a:prstGeom>
+          <a:solidFill>
+            <a:srgbClr val="3B5BDB"/>
+          </a:solidFill>
+          <a:ln/>
+        </p:spPr>
+      </p:sp>
+      <p:sp>
+        <p:nvSpPr>
+          <p:cNvPr id="3" name="Text 1"/>
+          <p:cNvSpPr/>
+          <p:nvPr/>
+        </p:nvSpPr>
+        <p:spPr>
+          <a:xfrm>
+            <a:off x="640080" y="384048"/>
+            <a:ext cx="10972800" cy="274320"/>
+          </a:xfrm>
+          <a:prstGeom prst="rect">
+            <a:avLst/>
+          </a:prstGeom>
+          <a:noFill/>
+          <a:ln/>
+        </p:spPr>
+        <p:txBody>
+          <a:bodyPr wrap="square" rtlCol="0" anchor="ctr"/>
+          <a:lstStyle/>
+          <a:p>
+            <a:pPr indent="0" marL="0">
+              <a:buNone/>
+            </a:pPr>
+            <a:r>
+              <a:rPr lang="en-US" sz="1200" b="1" spc="200" kern="0" dirty="0">
+                <a:solidFill>
+                  <a:srgbClr val="3B5BDB"/>
+                </a:solidFill>
+                <a:latin typeface="Arial" pitchFamily="34" charset="0"/>
+                <a:ea typeface="Arial" pitchFamily="34" charset="-122"/>
+                <a:cs typeface="Arial" pitchFamily="34" charset="-120"/>
+              </a:rPr>
+              <a:t>MONITORING</a:t>
+            </a:r>
+            <a:endParaRPr lang="en-US" sz="1200" dirty="0"/>
+          </a:p>
+        </p:txBody>
+      </p:sp>
+      <p:sp>
+        <p:nvSpPr>
+          <p:cNvPr id="4" name="Text 2"/>
+          <p:cNvSpPr/>
+          <p:nvPr/>
+        </p:nvSpPr>
+        <p:spPr>
+          <a:xfrm>
+            <a:off x="640080" y="676656"/>
+            <a:ext cx="10972800" cy="731520"/>
+          </a:xfrm>
+          <a:prstGeom prst="rect">
+            <a:avLst/>
+          </a:prstGeom>
+          <a:noFill/>
+          <a:ln/>
+        </p:spPr>
+        <p:txBody>
+          <a:bodyPr wrap="square" rtlCol="0" anchor="ctr"/>
+          <a:lstStyle/>
+          <a:p>
+            <a:pPr indent="0" marL="0">
+              <a:buNone/>
+            </a:pPr>
+            <a:r>
+              <a:rPr lang="en-US" sz="2700" b="1" dirty="0">
+                <a:solidFill>
+                  <a:srgbClr val="0F172A"/>
+                </a:solidFill>
+                <a:latin typeface="Arial" pitchFamily="34" charset="0"/>
+                <a:ea typeface="Arial" pitchFamily="34" charset="-122"/>
+                <a:cs typeface="Arial" pitchFamily="34" charset="-120"/>
+              </a:rPr>
+              <a:t>CloudWatch alarms</a:t>
+            </a:r>
+            <a:endParaRPr lang="en-US" sz="2700" dirty="0"/>
+          </a:p>
+        </p:txBody>
+      </p:sp>
+      <p:sp>
+        <p:nvSpPr>
+          <p:cNvPr id="5" name="Shape 3"/>
+          <p:cNvSpPr/>
+          <p:nvPr/>
+        </p:nvSpPr>
+        <p:spPr>
+          <a:xfrm>
+            <a:off x="548640" y="1463040"/>
+            <a:ext cx="7315200" cy="4846320"/>
+          </a:xfrm>
+          <a:prstGeom prst="roundRect">
+            <a:avLst>
+              <a:gd name="adj" fmla="val 943"/>
+            </a:avLst>
+          </a:prstGeom>
+          <a:solidFill>
+            <a:srgbClr val="F6F7F9"/>
+          </a:solidFill>
+          <a:ln w="12700">
+            <a:solidFill>
+              <a:srgbClr val="DBE1EA"/>
+            </a:solidFill>
+            <a:prstDash val="solid"/>
+          </a:ln>
+        </p:spPr>
+      </p:sp>
+      <p:pic>
+        <p:nvPicPr>
+          <p:cNvPr id="6" name="Image 0" descr="C:/Users/beite/Desktop/IRONHACK/Cloud Engineering/week3/project-1-3-tier-cloud-architecture/presentation/screenshots/11-cloudwatch-alarms.png">    </p:cNvPr>
+          <p:cNvPicPr>
+            <a:picLocks noChangeAspect="1"/>
+          </p:cNvPicPr>
+          <p:nvPr/>
+        </p:nvPicPr>
+        <p:blipFill>
+          <a:blip r:embed="rId1"/>
+          <a:srcRect l="0" r="0" t="0" b="0"/>
+          <a:stretch/>
+        </p:blipFill>
+        <p:spPr>
+          <a:xfrm>
+            <a:off x="685800" y="1572768"/>
+            <a:ext cx="7040880" cy="4626864"/>
+          </a:xfrm>
+          <a:prstGeom prst="rect">
+            <a:avLst/>
+          </a:prstGeom>
+        </p:spPr>
+      </p:pic>
+      <p:sp>
+        <p:nvSpPr>
+          <p:cNvPr id="7" name="Text 4"/>
+          <p:cNvSpPr/>
+          <p:nvPr/>
+        </p:nvSpPr>
+        <p:spPr>
+          <a:xfrm>
+            <a:off x="8138160" y="1737360"/>
+            <a:ext cx="3566160" cy="4206240"/>
+          </a:xfrm>
+          <a:prstGeom prst="rect">
+            <a:avLst/>
+          </a:prstGeom>
+          <a:noFill/>
+          <a:ln/>
+        </p:spPr>
+        <p:txBody>
+          <a:bodyPr wrap="square" rtlCol="0" anchor="t"/>
+          <a:lstStyle/>
+          <a:p>
+            <a:pPr marL="177800" indent="-177800">
+              <a:spcAft>
+                <a:spcPts val="800"/>
+              </a:spcAft>
+              <a:buSzPct val="100000"/>
+              <a:buChar char="•"/>
+            </a:pPr>
+            <a:r>
+              <a:rPr lang="en-US" sz="1500" dirty="0">
+                <a:solidFill>
+                  <a:srgbClr val="3B5BDB"/>
+                </a:solidFill>
+                <a:latin typeface="Arial" pitchFamily="34" charset="0"/>
+                <a:ea typeface="Arial" pitchFamily="34" charset="-122"/>
+                <a:cs typeface="Arial" pitchFamily="34" charset="-120"/>
+              </a:rPr>
+              <a:t>Unhealthy hosts + target 5XX</a:t>
+            </a:r>
+            <a:endParaRPr lang="en-US" sz="1500" dirty="0"/>
+          </a:p>
+          <a:p>
+            <a:pPr marL="177800" indent="-177800">
+              <a:spcAft>
+                <a:spcPts val="800"/>
+              </a:spcAft>
+              <a:buSzPct val="100000"/>
+              <a:buChar char="•"/>
+            </a:pPr>
+            <a:r>
+              <a:rPr lang="en-US" sz="1500" dirty="0">
+                <a:solidFill>
+                  <a:srgbClr val="0F172A"/>
+                </a:solidFill>
+                <a:latin typeface="Arial" pitchFamily="34" charset="0"/>
+                <a:ea typeface="Arial" pitchFamily="34" charset="-122"/>
+                <a:cs typeface="Arial" pitchFamily="34" charset="-120"/>
+              </a:rPr>
+              <a:t>Alerting on the ALB health</a:t>
+            </a:r>
+            <a:endParaRPr lang="en-US" sz="1500" dirty="0"/>
+          </a:p>
+          <a:p>
+            <a:pPr marL="177800" indent="-177800">
+              <a:spcAft>
+                <a:spcPts val="800"/>
+              </a:spcAft>
+              <a:buSzPct val="100000"/>
+              <a:buChar char="•"/>
+            </a:pPr>
+            <a:r>
+              <a:rPr lang="en-US" sz="1500" dirty="0">
+                <a:solidFill>
+                  <a:srgbClr val="0F172A"/>
+                </a:solidFill>
+                <a:latin typeface="Arial" pitchFamily="34" charset="0"/>
+                <a:ea typeface="Arial" pitchFamily="34" charset="-122"/>
+                <a:cs typeface="Arial" pitchFamily="34" charset="-120"/>
+              </a:rPr>
+              <a:t>Plus billing guardrail</a:t>
+            </a:r>
+            <a:endParaRPr lang="en-US" sz="1500" dirty="0"/>
+          </a:p>
+        </p:txBody>
+      </p:sp>
+      <p:sp>
+        <p:nvSpPr>
+          <p:cNvPr id="8" name="Text 5"/>
+          <p:cNvSpPr/>
+          <p:nvPr/>
+        </p:nvSpPr>
+        <p:spPr>
+          <a:xfrm>
+            <a:off x="8138160" y="6035040"/>
+            <a:ext cx="3566160" cy="274320"/>
+          </a:xfrm>
+          <a:prstGeom prst="rect">
+            <a:avLst/>
+          </a:prstGeom>
+          <a:noFill/>
+          <a:ln/>
+        </p:spPr>
+        <p:txBody>
+          <a:bodyPr wrap="square" rtlCol="0" anchor="ctr"/>
+          <a:lstStyle/>
+          <a:p>
+            <a:pPr indent="0" marL="0">
+              <a:buNone/>
+            </a:pPr>
+            <a:r>
+              <a:rPr lang="en-US" sz="900" i="1" dirty="0">
+                <a:solidFill>
+                  <a:srgbClr val="8A94A3"/>
+                </a:solidFill>
+                <a:latin typeface="Arial" pitchFamily="34" charset="0"/>
+                <a:ea typeface="Arial" pitchFamily="34" charset="-122"/>
+                <a:cs typeface="Arial" pitchFamily="34" charset="-120"/>
+              </a:rPr>
+              <a:t>11-cloudwatch-alarms.png</a:t>
+            </a:r>
+            <a:endParaRPr lang="en-US" sz="900" dirty="0"/>
+          </a:p>
+        </p:txBody>
+      </p:sp>
+    </p:spTree>
+  </p:cSld>
+  <p:clrMapOvr>
+    <a:masterClrMapping/>
+  </p:clrMapOvr>
+</p:sld>
+</file>
+
+<file path=ppt/slides/slide14.xml><?xml version="1.0" encoding="utf-8"?>
+<p:sld xmlns:a="http://schemas.openxmlformats.org/drawingml/2006/main" xmlns:r="http://schemas.openxmlformats.org/officeDocument/2006/relationships" xmlns:p="http://schemas.openxmlformats.org/presentationml/2006/main">
+  <p:cSld name="Slide 14">
+    <p:bg>
+      <p:bgPr>
+        <a:solidFill>
+          <a:srgbClr val="FFFFFF"/>
+        </a:solidFill>
+      </p:bgPr>
+    </p:bg>
+    <p:spTree>
+      <p:nvGrpSpPr>
+        <p:cNvPr id="1" name=""/>
+        <p:cNvGrpSpPr/>
+        <p:nvPr/>
+      </p:nvGrpSpPr>
+      <p:grpSpPr>
+        <a:xfrm>
+          <a:off x="0" y="0"/>
+          <a:ext cx="0" cy="0"/>
+          <a:chOff x="0" y="0"/>
+          <a:chExt cx="0" cy="0"/>
+        </a:xfrm>
+      </p:grpSpPr>
+      <p:sp>
+        <p:nvSpPr>
+          <p:cNvPr id="2" name="Shape 0"/>
+          <p:cNvSpPr/>
+          <p:nvPr/>
+        </p:nvSpPr>
+        <p:spPr>
+          <a:xfrm>
+            <a:off x="0" y="0"/>
+            <a:ext cx="256032" cy="6858000"/>
+          </a:xfrm>
+          <a:prstGeom prst="rect">
+            <a:avLst/>
+          </a:prstGeom>
+          <a:solidFill>
+            <a:srgbClr val="3B5BDB"/>
+          </a:solidFill>
+          <a:ln/>
+        </p:spPr>
+      </p:sp>
+      <p:sp>
+        <p:nvSpPr>
+          <p:cNvPr id="3" name="Text 1"/>
+          <p:cNvSpPr/>
+          <p:nvPr/>
+        </p:nvSpPr>
+        <p:spPr>
+          <a:xfrm>
+            <a:off x="640080" y="384048"/>
+            <a:ext cx="10972800" cy="274320"/>
+          </a:xfrm>
+          <a:prstGeom prst="rect">
+            <a:avLst/>
+          </a:prstGeom>
+          <a:noFill/>
+          <a:ln/>
+        </p:spPr>
+        <p:txBody>
+          <a:bodyPr wrap="square" rtlCol="0" anchor="ctr"/>
+          <a:lstStyle/>
+          <a:p>
+            <a:pPr indent="0" marL="0">
+              <a:buNone/>
+            </a:pPr>
+            <a:r>
+              <a:rPr lang="en-US" sz="1200" b="1" spc="200" kern="0" dirty="0">
+                <a:solidFill>
+                  <a:srgbClr val="3B5BDB"/>
+                </a:solidFill>
+                <a:latin typeface="Arial" pitchFamily="34" charset="0"/>
+                <a:ea typeface="Arial" pitchFamily="34" charset="-122"/>
+                <a:cs typeface="Arial" pitchFamily="34" charset="-120"/>
+              </a:rPr>
+              <a:t>MONITORING</a:t>
+            </a:r>
+            <a:endParaRPr lang="en-US" sz="1200" dirty="0"/>
+          </a:p>
+        </p:txBody>
+      </p:sp>
+      <p:sp>
+        <p:nvSpPr>
+          <p:cNvPr id="4" name="Text 2"/>
+          <p:cNvSpPr/>
+          <p:nvPr/>
+        </p:nvSpPr>
+        <p:spPr>
+          <a:xfrm>
+            <a:off x="640080" y="676656"/>
+            <a:ext cx="10972800" cy="731520"/>
+          </a:xfrm>
+          <a:prstGeom prst="rect">
+            <a:avLst/>
+          </a:prstGeom>
+          <a:noFill/>
+          <a:ln/>
+        </p:spPr>
+        <p:txBody>
+          <a:bodyPr wrap="square" rtlCol="0" anchor="ctr"/>
+          <a:lstStyle/>
+          <a:p>
+            <a:pPr indent="0" marL="0">
+              <a:buNone/>
+            </a:pPr>
+            <a:r>
+              <a:rPr lang="en-US" sz="2700" b="1" dirty="0">
+                <a:solidFill>
+                  <a:srgbClr val="0F172A"/>
+                </a:solidFill>
+                <a:latin typeface="Arial" pitchFamily="34" charset="0"/>
+                <a:ea typeface="Arial" pitchFamily="34" charset="-122"/>
+                <a:cs typeface="Arial" pitchFamily="34" charset="-120"/>
+              </a:rPr>
+              <a:t>VPC Flow Logs</a:t>
+            </a:r>
+            <a:endParaRPr lang="en-US" sz="2700" dirty="0"/>
+          </a:p>
+        </p:txBody>
+      </p:sp>
+      <p:sp>
+        <p:nvSpPr>
+          <p:cNvPr id="5" name="Shape 3"/>
+          <p:cNvSpPr/>
+          <p:nvPr/>
+        </p:nvSpPr>
+        <p:spPr>
+          <a:xfrm>
+            <a:off x="548640" y="1463040"/>
+            <a:ext cx="7315200" cy="4846320"/>
+          </a:xfrm>
+          <a:prstGeom prst="roundRect">
+            <a:avLst>
+              <a:gd name="adj" fmla="val 943"/>
+            </a:avLst>
+          </a:prstGeom>
+          <a:solidFill>
+            <a:srgbClr val="F6F7F9"/>
+          </a:solidFill>
+          <a:ln w="12700">
+            <a:solidFill>
+              <a:srgbClr val="DBE1EA"/>
+            </a:solidFill>
+            <a:prstDash val="solid"/>
+          </a:ln>
+        </p:spPr>
+      </p:sp>
+      <p:pic>
+        <p:nvPicPr>
+          <p:cNvPr id="6" name="Image 0" descr="C:/Users/beite/Desktop/IRONHACK/Cloud Engineering/week3/project-1-3-tier-cloud-architecture/presentation/screenshots/12-flow-logs.png">    </p:cNvPr>
+          <p:cNvPicPr>
+            <a:picLocks noChangeAspect="1"/>
+          </p:cNvPicPr>
+          <p:nvPr/>
+        </p:nvPicPr>
+        <p:blipFill>
+          <a:blip r:embed="rId1"/>
+          <a:srcRect l="0" r="0" t="0" b="0"/>
+          <a:stretch/>
+        </p:blipFill>
+        <p:spPr>
+          <a:xfrm>
+            <a:off x="685800" y="1572768"/>
+            <a:ext cx="7040880" cy="4626864"/>
+          </a:xfrm>
+          <a:prstGeom prst="rect">
+            <a:avLst/>
+          </a:prstGeom>
+        </p:spPr>
+      </p:pic>
+      <p:sp>
+        <p:nvSpPr>
+          <p:cNvPr id="7" name="Text 4"/>
+          <p:cNvSpPr/>
+          <p:nvPr/>
+        </p:nvSpPr>
+        <p:spPr>
+          <a:xfrm>
+            <a:off x="8138160" y="1737360"/>
+            <a:ext cx="3566160" cy="4206240"/>
+          </a:xfrm>
+          <a:prstGeom prst="rect">
+            <a:avLst/>
+          </a:prstGeom>
+          <a:noFill/>
+          <a:ln/>
+        </p:spPr>
+        <p:txBody>
+          <a:bodyPr wrap="square" rtlCol="0" anchor="t"/>
+          <a:lstStyle/>
+          <a:p>
+            <a:pPr marL="177800" indent="-177800">
+              <a:spcAft>
+                <a:spcPts val="800"/>
+              </a:spcAft>
+              <a:buSzPct val="100000"/>
+              <a:buChar char="•"/>
+            </a:pPr>
+            <a:r>
+              <a:rPr lang="en-US" sz="1500" dirty="0">
+                <a:solidFill>
+                  <a:srgbClr val="3B5BDB"/>
+                </a:solidFill>
+                <a:latin typeface="Arial" pitchFamily="34" charset="0"/>
+                <a:ea typeface="Arial" pitchFamily="34" charset="-122"/>
+                <a:cs typeface="Arial" pitchFamily="34" charset="-120"/>
+              </a:rPr>
+              <a:t>All VPC traffic → CloudWatch</a:t>
+            </a:r>
+            <a:endParaRPr lang="en-US" sz="1500" dirty="0"/>
+          </a:p>
+          <a:p>
+            <a:pPr marL="177800" indent="-177800">
+              <a:spcAft>
+                <a:spcPts val="800"/>
+              </a:spcAft>
+              <a:buSzPct val="100000"/>
+              <a:buChar char="•"/>
+            </a:pPr>
+            <a:r>
+              <a:rPr lang="en-US" sz="1500" dirty="0">
+                <a:solidFill>
+                  <a:srgbClr val="0F172A"/>
+                </a:solidFill>
+                <a:latin typeface="Arial" pitchFamily="34" charset="0"/>
+                <a:ea typeface="Arial" pitchFamily="34" charset="-122"/>
+                <a:cs typeface="Arial" pitchFamily="34" charset="-120"/>
+              </a:rPr>
+              <a:t>Network forensics &amp; troubleshooting</a:t>
+            </a:r>
+            <a:endParaRPr lang="en-US" sz="1500" dirty="0"/>
+          </a:p>
+          <a:p>
+            <a:pPr marL="177800" indent="-177800">
+              <a:spcAft>
+                <a:spcPts val="800"/>
+              </a:spcAft>
+              <a:buSzPct val="100000"/>
+              <a:buChar char="•"/>
+            </a:pPr>
+            <a:r>
+              <a:rPr lang="en-US" sz="1500" dirty="0">
+                <a:solidFill>
+                  <a:srgbClr val="0F172A"/>
+                </a:solidFill>
+                <a:latin typeface="Arial" pitchFamily="34" charset="0"/>
+                <a:ea typeface="Arial" pitchFamily="34" charset="-122"/>
+                <a:cs typeface="Arial" pitchFamily="34" charset="-120"/>
+              </a:rPr>
+              <a:t>Enabled at the VPC level</a:t>
+            </a:r>
+            <a:endParaRPr lang="en-US" sz="1500" dirty="0"/>
+          </a:p>
+        </p:txBody>
+      </p:sp>
+      <p:sp>
+        <p:nvSpPr>
+          <p:cNvPr id="8" name="Text 5"/>
+          <p:cNvSpPr/>
+          <p:nvPr/>
+        </p:nvSpPr>
+        <p:spPr>
+          <a:xfrm>
+            <a:off x="8138160" y="6035040"/>
+            <a:ext cx="3566160" cy="274320"/>
+          </a:xfrm>
+          <a:prstGeom prst="rect">
+            <a:avLst/>
+          </a:prstGeom>
+          <a:noFill/>
+          <a:ln/>
+        </p:spPr>
+        <p:txBody>
+          <a:bodyPr wrap="square" rtlCol="0" anchor="ctr"/>
+          <a:lstStyle/>
+          <a:p>
+            <a:pPr indent="0" marL="0">
+              <a:buNone/>
+            </a:pPr>
+            <a:r>
+              <a:rPr lang="en-US" sz="900" i="1" dirty="0">
+                <a:solidFill>
+                  <a:srgbClr val="8A94A3"/>
+                </a:solidFill>
+                <a:latin typeface="Arial" pitchFamily="34" charset="0"/>
+                <a:ea typeface="Arial" pitchFamily="34" charset="-122"/>
+                <a:cs typeface="Arial" pitchFamily="34" charset="-120"/>
+              </a:rPr>
+              <a:t>12-flow-logs.png</a:t>
+            </a:r>
+            <a:endParaRPr lang="en-US" sz="900" dirty="0"/>
+          </a:p>
+        </p:txBody>
+      </p:sp>
+    </p:spTree>
+  </p:cSld>
+  <p:clrMapOvr>
+    <a:masterClrMapping/>
+  </p:clrMapOvr>
+</p:sld>
+</file>
+
+<file path=ppt/slides/slide15.xml><?xml version="1.0" encoding="utf-8"?>
+<p:sld xmlns:a="http://schemas.openxmlformats.org/drawingml/2006/main" xmlns:r="http://schemas.openxmlformats.org/officeDocument/2006/relationships" xmlns:p="http://schemas.openxmlformats.org/presentationml/2006/main">
+  <p:cSld name="Slide 15">
+    <p:bg>
+      <p:bgPr>
+        <a:solidFill>
+          <a:srgbClr val="FFFFFF"/>
+        </a:solidFill>
+      </p:bgPr>
+    </p:bg>
+    <p:spTree>
+      <p:nvGrpSpPr>
+        <p:cNvPr id="1" name=""/>
+        <p:cNvGrpSpPr/>
+        <p:nvPr/>
+      </p:nvGrpSpPr>
+      <p:grpSpPr>
+        <a:xfrm>
+          <a:off x="0" y="0"/>
+          <a:ext cx="0" cy="0"/>
+          <a:chOff x="0" y="0"/>
+          <a:chExt cx="0" cy="0"/>
+        </a:xfrm>
+      </p:grpSpPr>
+      <p:sp>
+        <p:nvSpPr>
+          <p:cNvPr id="2" name="Shape 0"/>
+          <p:cNvSpPr/>
+          <p:nvPr/>
+        </p:nvSpPr>
+        <p:spPr>
+          <a:xfrm>
+            <a:off x="0" y="0"/>
+            <a:ext cx="256032" cy="6858000"/>
+          </a:xfrm>
+          <a:prstGeom prst="rect">
+            <a:avLst/>
+          </a:prstGeom>
+          <a:solidFill>
+            <a:srgbClr val="3B5BDB"/>
+          </a:solidFill>
+          <a:ln/>
+        </p:spPr>
+      </p:sp>
+      <p:sp>
+        <p:nvSpPr>
+          <p:cNvPr id="3" name="Text 1"/>
+          <p:cNvSpPr/>
+          <p:nvPr/>
+        </p:nvSpPr>
+        <p:spPr>
+          <a:xfrm>
+            <a:off x="640080" y="384048"/>
+            <a:ext cx="10972800" cy="274320"/>
+          </a:xfrm>
+          <a:prstGeom prst="rect">
+            <a:avLst/>
+          </a:prstGeom>
+          <a:noFill/>
+          <a:ln/>
+        </p:spPr>
+        <p:txBody>
+          <a:bodyPr wrap="square" rtlCol="0" anchor="ctr"/>
+          <a:lstStyle/>
+          <a:p>
+            <a:pPr indent="0" marL="0">
+              <a:buNone/>
+            </a:pPr>
+            <a:r>
+              <a:rPr lang="en-US" sz="1200" b="1" spc="200" kern="0" dirty="0">
+                <a:solidFill>
+                  <a:srgbClr val="3B5BDB"/>
+                </a:solidFill>
+                <a:latin typeface="Arial" pitchFamily="34" charset="0"/>
+                <a:ea typeface="Arial" pitchFamily="34" charset="-122"/>
+                <a:cs typeface="Arial" pitchFamily="34" charset="-120"/>
+              </a:rPr>
+              <a:t>DATA TIER</a:t>
+            </a:r>
+            <a:endParaRPr lang="en-US" sz="1200" dirty="0"/>
+          </a:p>
+        </p:txBody>
+      </p:sp>
+      <p:sp>
+        <p:nvSpPr>
+          <p:cNvPr id="4" name="Text 2"/>
+          <p:cNvSpPr/>
+          <p:nvPr/>
+        </p:nvSpPr>
+        <p:spPr>
+          <a:xfrm>
+            <a:off x="640080" y="676656"/>
+            <a:ext cx="10972800" cy="731520"/>
+          </a:xfrm>
+          <a:prstGeom prst="rect">
+            <a:avLst/>
+          </a:prstGeom>
+          <a:noFill/>
+          <a:ln/>
+        </p:spPr>
+        <p:txBody>
+          <a:bodyPr wrap="square" rtlCol="0" anchor="ctr"/>
+          <a:lstStyle/>
+          <a:p>
+            <a:pPr indent="0" marL="0">
+              <a:buNone/>
+            </a:pPr>
+            <a:r>
+              <a:rPr lang="en-US" sz="2700" b="1" dirty="0">
+                <a:solidFill>
+                  <a:srgbClr val="0F172A"/>
+                </a:solidFill>
+                <a:latin typeface="Arial" pitchFamily="34" charset="0"/>
+                <a:ea typeface="Arial" pitchFamily="34" charset="-122"/>
+                <a:cs typeface="Arial" pitchFamily="34" charset="-120"/>
+              </a:rPr>
+              <a:t>Multi-AZ data — primary + standby</a:t>
+            </a:r>
+            <a:endParaRPr lang="en-US" sz="2700" dirty="0"/>
+          </a:p>
+        </p:txBody>
+      </p:sp>
+      <p:sp>
+        <p:nvSpPr>
+          <p:cNvPr id="5" name="Shape 3"/>
+          <p:cNvSpPr/>
+          <p:nvPr/>
+        </p:nvSpPr>
+        <p:spPr>
+          <a:xfrm>
+            <a:off x="548640" y="1463040"/>
+            <a:ext cx="7315200" cy="4846320"/>
+          </a:xfrm>
+          <a:prstGeom prst="roundRect">
+            <a:avLst>
+              <a:gd name="adj" fmla="val 943"/>
+            </a:avLst>
+          </a:prstGeom>
+          <a:solidFill>
+            <a:srgbClr val="F6F7F9"/>
+          </a:solidFill>
+          <a:ln w="12700">
+            <a:solidFill>
+              <a:srgbClr val="DBE1EA"/>
+            </a:solidFill>
+            <a:prstDash val="solid"/>
+          </a:ln>
+        </p:spPr>
+      </p:sp>
+      <p:pic>
+        <p:nvPicPr>
+          <p:cNvPr id="6" name="Image 0" descr="C:/Users/beite/Desktop/IRONHACK/Cloud Engineering/week3/project-1-3-tier-cloud-architecture/presentation/screenshots/15-data-instances.png">    </p:cNvPr>
+          <p:cNvPicPr>
+            <a:picLocks noChangeAspect="1"/>
+          </p:cNvPicPr>
+          <p:nvPr/>
+        </p:nvPicPr>
+        <p:blipFill>
+          <a:blip r:embed="rId1"/>
+          <a:srcRect l="0" r="0" t="0" b="0"/>
+          <a:stretch/>
+        </p:blipFill>
+        <p:spPr>
+          <a:xfrm>
+            <a:off x="685800" y="1572768"/>
+            <a:ext cx="7040880" cy="4626864"/>
+          </a:xfrm>
+          <a:prstGeom prst="rect">
+            <a:avLst/>
+          </a:prstGeom>
+        </p:spPr>
+      </p:pic>
+      <p:sp>
+        <p:nvSpPr>
+          <p:cNvPr id="7" name="Text 4"/>
+          <p:cNvSpPr/>
+          <p:nvPr/>
+        </p:nvSpPr>
+        <p:spPr>
+          <a:xfrm>
+            <a:off x="8138160" y="1737360"/>
+            <a:ext cx="3566160" cy="4206240"/>
+          </a:xfrm>
+          <a:prstGeom prst="rect">
+            <a:avLst/>
+          </a:prstGeom>
+          <a:noFill/>
+          <a:ln/>
+        </p:spPr>
+        <p:txBody>
+          <a:bodyPr wrap="square" rtlCol="0" anchor="t"/>
+          <a:lstStyle/>
+          <a:p>
+            <a:pPr marL="177800" indent="-177800">
+              <a:spcAft>
+                <a:spcPts val="800"/>
+              </a:spcAft>
+              <a:buSzPct val="100000"/>
+              <a:buChar char="•"/>
+            </a:pPr>
+            <a:r>
+              <a:rPr lang="en-US" sz="1500" dirty="0">
+                <a:solidFill>
+                  <a:srgbClr val="6D28D9"/>
+                </a:solidFill>
+                <a:latin typeface="Arial" pitchFamily="34" charset="0"/>
+                <a:ea typeface="Arial" pitchFamily="34" charset="-122"/>
+                <a:cs typeface="Arial" pitchFamily="34" charset="-120"/>
+              </a:rPr>
+              <a:t>primary in 1a, standby in 1b</a:t>
+            </a:r>
+            <a:endParaRPr lang="en-US" sz="1500" dirty="0"/>
+          </a:p>
+          <a:p>
+            <a:pPr marL="177800" indent="-177800">
+              <a:spcAft>
+                <a:spcPts val="800"/>
+              </a:spcAft>
+              <a:buSzPct val="100000"/>
+              <a:buChar char="•"/>
+            </a:pPr>
+            <a:r>
+              <a:rPr lang="en-US" sz="1500" dirty="0">
+                <a:solidFill>
+                  <a:srgbClr val="0F172A"/>
+                </a:solidFill>
+                <a:latin typeface="Arial" pitchFamily="34" charset="0"/>
+                <a:ea typeface="Arial" pitchFamily="34" charset="-122"/>
+                <a:cs typeface="Arial" pitchFamily="34" charset="-120"/>
+              </a:rPr>
+              <a:t>App fails over primary → standby</a:t>
+            </a:r>
+            <a:endParaRPr lang="en-US" sz="1500" dirty="0"/>
+          </a:p>
+          <a:p>
+            <a:pPr marL="177800" indent="-177800">
+              <a:spcAft>
+                <a:spcPts val="800"/>
+              </a:spcAft>
+              <a:buSzPct val="100000"/>
+              <a:buChar char="•"/>
+            </a:pPr>
+            <a:r>
+              <a:rPr lang="en-US" sz="1500" dirty="0">
+                <a:solidFill>
+                  <a:srgbClr val="0F172A"/>
+                </a:solidFill>
+                <a:latin typeface="Arial" pitchFamily="34" charset="0"/>
+                <a:ea typeface="Arial" pitchFamily="34" charset="-122"/>
+                <a:cs typeface="Arial" pitchFamily="34" charset="-120"/>
+              </a:rPr>
+              <a:t>Isolated subnets, app-tier access only</a:t>
+            </a:r>
+            <a:endParaRPr lang="en-US" sz="1500" dirty="0"/>
+          </a:p>
+        </p:txBody>
+      </p:sp>
+      <p:sp>
+        <p:nvSpPr>
+          <p:cNvPr id="8" name="Text 5"/>
+          <p:cNvSpPr/>
+          <p:nvPr/>
+        </p:nvSpPr>
+        <p:spPr>
+          <a:xfrm>
+            <a:off x="8138160" y="6035040"/>
+            <a:ext cx="3566160" cy="274320"/>
+          </a:xfrm>
+          <a:prstGeom prst="rect">
+            <a:avLst/>
+          </a:prstGeom>
+          <a:noFill/>
+          <a:ln/>
+        </p:spPr>
+        <p:txBody>
+          <a:bodyPr wrap="square" rtlCol="0" anchor="ctr"/>
+          <a:lstStyle/>
+          <a:p>
+            <a:pPr indent="0" marL="0">
+              <a:buNone/>
+            </a:pPr>
+            <a:r>
+              <a:rPr lang="en-US" sz="900" i="1" dirty="0">
+                <a:solidFill>
+                  <a:srgbClr val="8A94A3"/>
+                </a:solidFill>
+                <a:latin typeface="Arial" pitchFamily="34" charset="0"/>
+                <a:ea typeface="Arial" pitchFamily="34" charset="-122"/>
+                <a:cs typeface="Arial" pitchFamily="34" charset="-120"/>
+              </a:rPr>
+              <a:t>15-data-instances.png</a:t>
+            </a:r>
+            <a:endParaRPr lang="en-US" sz="900" dirty="0"/>
+          </a:p>
+        </p:txBody>
+      </p:sp>
+    </p:spTree>
+  </p:cSld>
+  <p:clrMapOvr>
+    <a:masterClrMapping/>
+  </p:clrMapOvr>
+</p:sld>
+</file>
+
+<file path=ppt/slides/slide16.xml><?xml version="1.0" encoding="utf-8"?>
+<p:sld xmlns:a="http://schemas.openxmlformats.org/drawingml/2006/main" xmlns:r="http://schemas.openxmlformats.org/officeDocument/2006/relationships" xmlns:p="http://schemas.openxmlformats.org/presentationml/2006/main">
+  <p:cSld name="Slide 16">
+    <p:bg>
+      <p:bgPr>
+        <a:solidFill>
+          <a:srgbClr val="FFFFFF"/>
+        </a:solidFill>
+      </p:bgPr>
+    </p:bg>
+    <p:spTree>
+      <p:nvGrpSpPr>
+        <p:cNvPr id="1" name=""/>
+        <p:cNvGrpSpPr/>
+        <p:nvPr/>
+      </p:nvGrpSpPr>
+      <p:grpSpPr>
+        <a:xfrm>
+          <a:off x="0" y="0"/>
+          <a:ext cx="0" cy="0"/>
+          <a:chOff x="0" y="0"/>
+          <a:chExt cx="0" cy="0"/>
+        </a:xfrm>
+      </p:grpSpPr>
+      <p:sp>
+        <p:nvSpPr>
+          <p:cNvPr id="2" name="Shape 0"/>
+          <p:cNvSpPr/>
+          <p:nvPr/>
+        </p:nvSpPr>
+        <p:spPr>
+          <a:xfrm>
+            <a:off x="0" y="0"/>
+            <a:ext cx="256032" cy="6858000"/>
+          </a:xfrm>
+          <a:prstGeom prst="rect">
+            <a:avLst/>
+          </a:prstGeom>
+          <a:solidFill>
+            <a:srgbClr val="3B5BDB"/>
+          </a:solidFill>
+          <a:ln/>
+        </p:spPr>
+      </p:sp>
+      <p:sp>
+        <p:nvSpPr>
+          <p:cNvPr id="3" name="Text 1"/>
+          <p:cNvSpPr/>
+          <p:nvPr/>
+        </p:nvSpPr>
+        <p:spPr>
+          <a:xfrm>
+            <a:off x="640080" y="384048"/>
+            <a:ext cx="10972800" cy="274320"/>
+          </a:xfrm>
+          <a:prstGeom prst="rect">
+            <a:avLst/>
+          </a:prstGeom>
+          <a:noFill/>
+          <a:ln/>
+        </p:spPr>
+        <p:txBody>
+          <a:bodyPr wrap="square" rtlCol="0" anchor="ctr"/>
+          <a:lstStyle/>
+          <a:p>
+            <a:pPr indent="0" marL="0">
+              <a:buNone/>
+            </a:pPr>
+            <a:r>
+              <a:rPr lang="en-US" sz="1200" b="1" spc="200" kern="0" dirty="0">
+                <a:solidFill>
+                  <a:srgbClr val="3B5BDB"/>
+                </a:solidFill>
+                <a:latin typeface="Arial" pitchFamily="34" charset="0"/>
+                <a:ea typeface="Arial" pitchFamily="34" charset="-122"/>
+                <a:cs typeface="Arial" pitchFamily="34" charset="-120"/>
+              </a:rPr>
+              <a:t>THE APP</a:t>
+            </a:r>
+            <a:endParaRPr lang="en-US" sz="1200" dirty="0"/>
+          </a:p>
+        </p:txBody>
+      </p:sp>
+      <p:sp>
+        <p:nvSpPr>
+          <p:cNvPr id="4" name="Text 2"/>
+          <p:cNvSpPr/>
+          <p:nvPr/>
+        </p:nvSpPr>
+        <p:spPr>
+          <a:xfrm>
+            <a:off x="640080" y="676656"/>
+            <a:ext cx="10972800" cy="731520"/>
+          </a:xfrm>
+          <a:prstGeom prst="rect">
+            <a:avLst/>
+          </a:prstGeom>
+          <a:noFill/>
+          <a:ln/>
+        </p:spPr>
+        <p:txBody>
+          <a:bodyPr wrap="square" rtlCol="0" anchor="ctr"/>
+          <a:lstStyle/>
+          <a:p>
+            <a:pPr indent="0" marL="0">
+              <a:buNone/>
+            </a:pPr>
+            <a:r>
+              <a:rPr lang="en-US" sz="2700" b="1" dirty="0">
+                <a:solidFill>
+                  <a:srgbClr val="0F172A"/>
+                </a:solidFill>
+                <a:latin typeface="Arial" pitchFamily="34" charset="0"/>
+                <a:ea typeface="Arial" pitchFamily="34" charset="-122"/>
+                <a:cs typeface="Arial" pitchFamily="34" charset="-120"/>
+              </a:rPr>
+              <a:t>Running app over HTTP</a:t>
+            </a:r>
+            <a:endParaRPr lang="en-US" sz="2700" dirty="0"/>
+          </a:p>
+        </p:txBody>
+      </p:sp>
+      <p:sp>
+        <p:nvSpPr>
+          <p:cNvPr id="5" name="Shape 3"/>
+          <p:cNvSpPr/>
+          <p:nvPr/>
+        </p:nvSpPr>
+        <p:spPr>
+          <a:xfrm>
+            <a:off x="548640" y="1463040"/>
+            <a:ext cx="7315200" cy="4846320"/>
+          </a:xfrm>
+          <a:prstGeom prst="roundRect">
+            <a:avLst>
+              <a:gd name="adj" fmla="val 943"/>
+            </a:avLst>
+          </a:prstGeom>
+          <a:solidFill>
+            <a:srgbClr val="F6F7F9"/>
+          </a:solidFill>
+          <a:ln w="12700">
+            <a:solidFill>
+              <a:srgbClr val="DBE1EA"/>
+            </a:solidFill>
+            <a:prstDash val="solid"/>
+          </a:ln>
+        </p:spPr>
+      </p:sp>
+      <p:pic>
+        <p:nvPicPr>
+          <p:cNvPr id="6" name="Image 0" descr="C:/Users/beite/Desktop/IRONHACK/Cloud Engineering/week3/project-1-3-tier-cloud-architecture/presentation/screenshots/12-app-http.png">    </p:cNvPr>
+          <p:cNvPicPr>
+            <a:picLocks noChangeAspect="1"/>
+          </p:cNvPicPr>
+          <p:nvPr/>
+        </p:nvPicPr>
+        <p:blipFill>
+          <a:blip r:embed="rId1"/>
+          <a:srcRect l="0" r="0" t="0" b="0"/>
+          <a:stretch/>
+        </p:blipFill>
+        <p:spPr>
+          <a:xfrm>
+            <a:off x="685800" y="1572768"/>
+            <a:ext cx="7040880" cy="4626864"/>
+          </a:xfrm>
+          <a:prstGeom prst="rect">
+            <a:avLst/>
+          </a:prstGeom>
+        </p:spPr>
+      </p:pic>
+      <p:sp>
+        <p:nvSpPr>
+          <p:cNvPr id="7" name="Text 4"/>
+          <p:cNvSpPr/>
+          <p:nvPr/>
+        </p:nvSpPr>
+        <p:spPr>
+          <a:xfrm>
+            <a:off x="8138160" y="1737360"/>
+            <a:ext cx="3566160" cy="4206240"/>
+          </a:xfrm>
+          <a:prstGeom prst="rect">
+            <a:avLst/>
+          </a:prstGeom>
+          <a:noFill/>
+          <a:ln/>
+        </p:spPr>
+        <p:txBody>
+          <a:bodyPr wrap="square" rtlCol="0" anchor="t"/>
+          <a:lstStyle/>
+          <a:p>
+            <a:pPr marL="177800" indent="-177800">
+              <a:spcAft>
+                <a:spcPts val="800"/>
+              </a:spcAft>
+              <a:buSzPct val="100000"/>
+              <a:buChar char="•"/>
+            </a:pPr>
+            <a:r>
+              <a:rPr lang="en-US" sz="1500" dirty="0">
+                <a:solidFill>
+                  <a:srgbClr val="0E7C72"/>
+                </a:solidFill>
+                <a:latin typeface="Arial" pitchFamily="34" charset="0"/>
+                <a:ea typeface="Arial" pitchFamily="34" charset="-122"/>
+                <a:cs typeface="Arial" pitchFamily="34" charset="-120"/>
+              </a:rPr>
+              <a:t>Instance-id + AZ shown</a:t>
+            </a:r>
+            <a:endParaRPr lang="en-US" sz="1500" dirty="0"/>
+          </a:p>
+          <a:p>
+            <a:pPr marL="177800" indent="-177800">
+              <a:spcAft>
+                <a:spcPts val="800"/>
+              </a:spcAft>
+              <a:buSzPct val="100000"/>
+              <a:buChar char="•"/>
+            </a:pPr>
+            <a:r>
+              <a:rPr lang="en-US" sz="1500" dirty="0">
+                <a:solidFill>
+                  <a:srgbClr val="0F172A"/>
+                </a:solidFill>
+                <a:latin typeface="Arial" pitchFamily="34" charset="0"/>
+                <a:ea typeface="Arial" pitchFamily="34" charset="-122"/>
+                <a:cs typeface="Arial" pitchFamily="34" charset="-120"/>
+              </a:rPr>
+              <a:t>Data tier: Connected (Multi-AZ)</a:t>
+            </a:r>
+            <a:endParaRPr lang="en-US" sz="1500" dirty="0"/>
+          </a:p>
+          <a:p>
+            <a:pPr marL="177800" indent="-177800">
+              <a:spcAft>
+                <a:spcPts val="800"/>
+              </a:spcAft>
+              <a:buSzPct val="100000"/>
+              <a:buChar char="•"/>
+            </a:pPr>
+            <a:r>
+              <a:rPr lang="en-US" sz="1500" dirty="0">
+                <a:solidFill>
+                  <a:srgbClr val="0F172A"/>
+                </a:solidFill>
+                <a:latin typeface="Arial" pitchFamily="34" charset="0"/>
+                <a:ea typeface="Arial" pitchFamily="34" charset="-122"/>
+                <a:cs typeface="Arial" pitchFamily="34" charset="-120"/>
+              </a:rPr>
+              <a:t>Refresh = different instance (balanced)</a:t>
+            </a:r>
+            <a:endParaRPr lang="en-US" sz="1500" dirty="0"/>
+          </a:p>
+        </p:txBody>
+      </p:sp>
+      <p:sp>
+        <p:nvSpPr>
+          <p:cNvPr id="8" name="Text 5"/>
+          <p:cNvSpPr/>
+          <p:nvPr/>
+        </p:nvSpPr>
+        <p:spPr>
+          <a:xfrm>
+            <a:off x="8138160" y="6035040"/>
+            <a:ext cx="3566160" cy="274320"/>
+          </a:xfrm>
+          <a:prstGeom prst="rect">
+            <a:avLst/>
+          </a:prstGeom>
+          <a:noFill/>
+          <a:ln/>
+        </p:spPr>
+        <p:txBody>
+          <a:bodyPr wrap="square" rtlCol="0" anchor="ctr"/>
+          <a:lstStyle/>
+          <a:p>
+            <a:pPr indent="0" marL="0">
+              <a:buNone/>
+            </a:pPr>
+            <a:r>
+              <a:rPr lang="en-US" sz="900" i="1" dirty="0">
+                <a:solidFill>
+                  <a:srgbClr val="8A94A3"/>
+                </a:solidFill>
+                <a:latin typeface="Arial" pitchFamily="34" charset="0"/>
+                <a:ea typeface="Arial" pitchFamily="34" charset="-122"/>
+                <a:cs typeface="Arial" pitchFamily="34" charset="-120"/>
+              </a:rPr>
+              <a:t>12-app-http.png</a:t>
+            </a:r>
+            <a:endParaRPr lang="en-US" sz="900" dirty="0"/>
+          </a:p>
+        </p:txBody>
+      </p:sp>
+    </p:spTree>
+  </p:cSld>
+  <p:clrMapOvr>
+    <a:masterClrMapping/>
+  </p:clrMapOvr>
+</p:sld>
+</file>
+
+<file path=ppt/slides/slide17.xml><?xml version="1.0" encoding="utf-8"?>
+<p:sld xmlns:a="http://schemas.openxmlformats.org/drawingml/2006/main" xmlns:r="http://schemas.openxmlformats.org/officeDocument/2006/relationships" xmlns:p="http://schemas.openxmlformats.org/presentationml/2006/main">
+  <p:cSld name="Slide 17">
+    <p:bg>
+      <p:bgPr>
+        <a:solidFill>
+          <a:srgbClr val="FFFFFF"/>
+        </a:solidFill>
+      </p:bgPr>
+    </p:bg>
+    <p:spTree>
+      <p:nvGrpSpPr>
+        <p:cNvPr id="1" name=""/>
+        <p:cNvGrpSpPr/>
+        <p:nvPr/>
+      </p:nvGrpSpPr>
+      <p:grpSpPr>
+        <a:xfrm>
+          <a:off x="0" y="0"/>
+          <a:ext cx="0" cy="0"/>
+          <a:chOff x="0" y="0"/>
+          <a:chExt cx="0" cy="0"/>
+        </a:xfrm>
+      </p:grpSpPr>
+      <p:sp>
+        <p:nvSpPr>
+          <p:cNvPr id="2" name="Shape 0"/>
+          <p:cNvSpPr/>
+          <p:nvPr/>
+        </p:nvSpPr>
+        <p:spPr>
+          <a:xfrm>
+            <a:off x="0" y="0"/>
+            <a:ext cx="256032" cy="6858000"/>
+          </a:xfrm>
+          <a:prstGeom prst="rect">
+            <a:avLst/>
+          </a:prstGeom>
+          <a:solidFill>
+            <a:srgbClr val="3B5BDB"/>
+          </a:solidFill>
+          <a:ln/>
+        </p:spPr>
+      </p:sp>
+      <p:sp>
+        <p:nvSpPr>
+          <p:cNvPr id="3" name="Text 1"/>
+          <p:cNvSpPr/>
+          <p:nvPr/>
+        </p:nvSpPr>
+        <p:spPr>
+          <a:xfrm>
+            <a:off x="640080" y="384048"/>
+            <a:ext cx="10972800" cy="274320"/>
+          </a:xfrm>
+          <a:prstGeom prst="rect">
+            <a:avLst/>
+          </a:prstGeom>
+          <a:noFill/>
+          <a:ln/>
+        </p:spPr>
+        <p:txBody>
+          <a:bodyPr wrap="square" rtlCol="0" anchor="ctr"/>
+          <a:lstStyle/>
+          <a:p>
+            <a:pPr indent="0" marL="0">
+              <a:buNone/>
+            </a:pPr>
+            <a:r>
+              <a:rPr lang="en-US" sz="1200" b="1" spc="200" kern="0" dirty="0">
+                <a:solidFill>
+                  <a:srgbClr val="3B5BDB"/>
+                </a:solidFill>
+                <a:latin typeface="Arial" pitchFamily="34" charset="0"/>
+                <a:ea typeface="Arial" pitchFamily="34" charset="-122"/>
+                <a:cs typeface="Arial" pitchFamily="34" charset="-120"/>
+              </a:rPr>
+              <a:t>THE APP</a:t>
+            </a:r>
+            <a:endParaRPr lang="en-US" sz="1200" dirty="0"/>
+          </a:p>
+        </p:txBody>
+      </p:sp>
+      <p:sp>
+        <p:nvSpPr>
+          <p:cNvPr id="4" name="Text 2"/>
+          <p:cNvSpPr/>
+          <p:nvPr/>
+        </p:nvSpPr>
+        <p:spPr>
+          <a:xfrm>
+            <a:off x="640080" y="676656"/>
+            <a:ext cx="10972800" cy="731520"/>
+          </a:xfrm>
+          <a:prstGeom prst="rect">
+            <a:avLst/>
+          </a:prstGeom>
+          <a:noFill/>
+          <a:ln/>
+        </p:spPr>
+        <p:txBody>
+          <a:bodyPr wrap="square" rtlCol="0" anchor="ctr"/>
+          <a:lstStyle/>
+          <a:p>
+            <a:pPr indent="0" marL="0">
+              <a:buNone/>
+            </a:pPr>
+            <a:r>
+              <a:rPr lang="en-US" sz="2700" b="1" dirty="0">
+                <a:solidFill>
+                  <a:srgbClr val="0F172A"/>
+                </a:solidFill>
+                <a:latin typeface="Arial" pitchFamily="34" charset="0"/>
+                <a:ea typeface="Arial" pitchFamily="34" charset="-122"/>
+                <a:cs typeface="Arial" pitchFamily="34" charset="-120"/>
+              </a:rPr>
+              <a:t>Running app over HTTPS</a:t>
+            </a:r>
+            <a:endParaRPr lang="en-US" sz="2700" dirty="0"/>
+          </a:p>
+        </p:txBody>
+      </p:sp>
+      <p:sp>
+        <p:nvSpPr>
+          <p:cNvPr id="5" name="Shape 3"/>
+          <p:cNvSpPr/>
+          <p:nvPr/>
+        </p:nvSpPr>
+        <p:spPr>
+          <a:xfrm>
+            <a:off x="548640" y="1463040"/>
+            <a:ext cx="7315200" cy="4846320"/>
+          </a:xfrm>
+          <a:prstGeom prst="roundRect">
+            <a:avLst>
+              <a:gd name="adj" fmla="val 943"/>
+            </a:avLst>
+          </a:prstGeom>
+          <a:solidFill>
+            <a:srgbClr val="F6F7F9"/>
+          </a:solidFill>
+          <a:ln w="12700">
+            <a:solidFill>
+              <a:srgbClr val="DBE1EA"/>
+            </a:solidFill>
+            <a:prstDash val="solid"/>
+          </a:ln>
+        </p:spPr>
+      </p:sp>
+      <p:pic>
+        <p:nvPicPr>
+          <p:cNvPr id="6" name="Image 0" descr="C:/Users/beite/Desktop/IRONHACK/Cloud Engineering/week3/project-1-3-tier-cloud-architecture/presentation/screenshots/14-app-https.png">    </p:cNvPr>
+          <p:cNvPicPr>
+            <a:picLocks noChangeAspect="1"/>
+          </p:cNvPicPr>
+          <p:nvPr/>
+        </p:nvPicPr>
+        <p:blipFill>
+          <a:blip r:embed="rId1"/>
+          <a:srcRect l="0" r="0" t="0" b="0"/>
+          <a:stretch/>
+        </p:blipFill>
+        <p:spPr>
+          <a:xfrm>
+            <a:off x="685800" y="1572768"/>
+            <a:ext cx="7040880" cy="4626864"/>
+          </a:xfrm>
+          <a:prstGeom prst="rect">
+            <a:avLst/>
+          </a:prstGeom>
+        </p:spPr>
+      </p:pic>
+      <p:sp>
+        <p:nvSpPr>
+          <p:cNvPr id="7" name="Text 4"/>
+          <p:cNvSpPr/>
+          <p:nvPr/>
+        </p:nvSpPr>
+        <p:spPr>
+          <a:xfrm>
+            <a:off x="8138160" y="1737360"/>
+            <a:ext cx="3566160" cy="4206240"/>
+          </a:xfrm>
+          <a:prstGeom prst="rect">
+            <a:avLst/>
+          </a:prstGeom>
+          <a:noFill/>
+          <a:ln/>
+        </p:spPr>
+        <p:txBody>
+          <a:bodyPr wrap="square" rtlCol="0" anchor="t"/>
+          <a:lstStyle/>
+          <a:p>
+            <a:pPr marL="177800" indent="-177800">
+              <a:spcAft>
+                <a:spcPts val="800"/>
+              </a:spcAft>
+              <a:buSzPct val="100000"/>
+              <a:buChar char="•"/>
+            </a:pPr>
+            <a:r>
+              <a:rPr lang="en-US" sz="1500" dirty="0">
+                <a:solidFill>
+                  <a:srgbClr val="B45309"/>
+                </a:solidFill>
+                <a:latin typeface="Arial" pitchFamily="34" charset="0"/>
+                <a:ea typeface="Arial" pitchFamily="34" charset="-122"/>
+                <a:cs typeface="Arial" pitchFamily="34" charset="-120"/>
+              </a:rPr>
+              <a:t>Same app over TLS :443</a:t>
+            </a:r>
+            <a:endParaRPr lang="en-US" sz="1500" dirty="0"/>
+          </a:p>
+          <a:p>
+            <a:pPr marL="177800" indent="-177800">
+              <a:spcAft>
+                <a:spcPts val="800"/>
+              </a:spcAft>
+              <a:buSzPct val="100000"/>
+              <a:buChar char="•"/>
+            </a:pPr>
+            <a:r>
+              <a:rPr lang="en-US" sz="1500" dirty="0">
+                <a:solidFill>
+                  <a:srgbClr val="0F172A"/>
+                </a:solidFill>
+                <a:latin typeface="Arial" pitchFamily="34" charset="0"/>
+                <a:ea typeface="Arial" pitchFamily="34" charset="-122"/>
+                <a:cs typeface="Arial" pitchFamily="34" charset="-120"/>
+              </a:rPr>
+              <a:t>Cert warning expected (self-signed)</a:t>
+            </a:r>
+            <a:endParaRPr lang="en-US" sz="1500" dirty="0"/>
+          </a:p>
+        </p:txBody>
+      </p:sp>
+      <p:sp>
+        <p:nvSpPr>
+          <p:cNvPr id="8" name="Text 5"/>
+          <p:cNvSpPr/>
+          <p:nvPr/>
+        </p:nvSpPr>
+        <p:spPr>
+          <a:xfrm>
+            <a:off x="8138160" y="6035040"/>
+            <a:ext cx="3566160" cy="274320"/>
+          </a:xfrm>
+          <a:prstGeom prst="rect">
+            <a:avLst/>
+          </a:prstGeom>
+          <a:noFill/>
+          <a:ln/>
+        </p:spPr>
+        <p:txBody>
+          <a:bodyPr wrap="square" rtlCol="0" anchor="ctr"/>
+          <a:lstStyle/>
+          <a:p>
+            <a:pPr indent="0" marL="0">
+              <a:buNone/>
+            </a:pPr>
+            <a:r>
+              <a:rPr lang="en-US" sz="900" i="1" dirty="0">
+                <a:solidFill>
+                  <a:srgbClr val="8A94A3"/>
+                </a:solidFill>
+                <a:latin typeface="Arial" pitchFamily="34" charset="0"/>
+                <a:ea typeface="Arial" pitchFamily="34" charset="-122"/>
+                <a:cs typeface="Arial" pitchFamily="34" charset="-120"/>
+              </a:rPr>
+              <a:t>14-app-https.png</a:t>
+            </a:r>
+            <a:endParaRPr lang="en-US" sz="900" dirty="0"/>
+          </a:p>
+        </p:txBody>
+      </p:sp>
+    </p:spTree>
+  </p:cSld>
+  <p:clrMapOvr>
+    <a:masterClrMapping/>
+  </p:clrMapOvr>
+</p:sld>
+</file>
+
+<file path=ppt/slides/slide18.xml><?xml version="1.0" encoding="utf-8"?>
+<p:sld xmlns:a="http://schemas.openxmlformats.org/drawingml/2006/main" xmlns:r="http://schemas.openxmlformats.org/officeDocument/2006/relationships" xmlns:p="http://schemas.openxmlformats.org/presentationml/2006/main">
+  <p:cSld name="Slide 18">
+    <p:bg>
+      <p:bgPr>
+        <a:solidFill>
+          <a:srgbClr val="FFFFFF"/>
+        </a:solidFill>
+      </p:bgPr>
+    </p:bg>
+    <p:spTree>
+      <p:nvGrpSpPr>
+        <p:cNvPr id="1" name=""/>
+        <p:cNvGrpSpPr/>
+        <p:nvPr/>
+      </p:nvGrpSpPr>
+      <p:grpSpPr>
+        <a:xfrm>
+          <a:off x="0" y="0"/>
+          <a:ext cx="0" cy="0"/>
+          <a:chOff x="0" y="0"/>
+          <a:chExt cx="0" cy="0"/>
+        </a:xfrm>
+      </p:grpSpPr>
+      <p:sp>
+        <p:nvSpPr>
+          <p:cNvPr id="2" name="Shape 0"/>
+          <p:cNvSpPr/>
+          <p:nvPr/>
+        </p:nvSpPr>
+        <p:spPr>
+          <a:xfrm>
+            <a:off x="0" y="0"/>
+            <a:ext cx="256032" cy="6858000"/>
+          </a:xfrm>
+          <a:prstGeom prst="rect">
+            <a:avLst/>
+          </a:prstGeom>
+          <a:solidFill>
+            <a:srgbClr val="3B5BDB"/>
+          </a:solidFill>
+          <a:ln/>
+        </p:spPr>
+      </p:sp>
+      <p:sp>
+        <p:nvSpPr>
+          <p:cNvPr id="3" name="Text 1"/>
+          <p:cNvSpPr/>
+          <p:nvPr/>
+        </p:nvSpPr>
+        <p:spPr>
+          <a:xfrm>
+            <a:off x="640080" y="384048"/>
+            <a:ext cx="10972800" cy="274320"/>
+          </a:xfrm>
+          <a:prstGeom prst="rect">
+            <a:avLst/>
+          </a:prstGeom>
+          <a:noFill/>
+          <a:ln/>
+        </p:spPr>
+        <p:txBody>
+          <a:bodyPr wrap="square" rtlCol="0" anchor="ctr"/>
+          <a:lstStyle/>
+          <a:p>
+            <a:pPr indent="0" marL="0">
+              <a:buNone/>
+            </a:pPr>
+            <a:r>
+              <a:rPr lang="en-US" sz="1200" b="1" spc="200" kern="0" dirty="0">
+                <a:solidFill>
+                  <a:srgbClr val="3B5BDB"/>
+                </a:solidFill>
+                <a:latin typeface="Arial" pitchFamily="34" charset="0"/>
+                <a:ea typeface="Arial" pitchFamily="34" charset="-122"/>
+                <a:cs typeface="Arial" pitchFamily="34" charset="-120"/>
+              </a:rPr>
+              <a:t>TEST RESULTS</a:t>
+            </a:r>
+            <a:endParaRPr lang="en-US" sz="1200" dirty="0"/>
+          </a:p>
+        </p:txBody>
+      </p:sp>
+      <p:sp>
+        <p:nvSpPr>
+          <p:cNvPr id="4" name="Text 2"/>
+          <p:cNvSpPr/>
+          <p:nvPr/>
+        </p:nvSpPr>
+        <p:spPr>
+          <a:xfrm>
+            <a:off x="640080" y="676656"/>
+            <a:ext cx="10972800" cy="731520"/>
+          </a:xfrm>
+          <a:prstGeom prst="rect">
+            <a:avLst/>
+          </a:prstGeom>
+          <a:noFill/>
+          <a:ln/>
+        </p:spPr>
+        <p:txBody>
+          <a:bodyPr wrap="square" rtlCol="0" anchor="ctr"/>
+          <a:lstStyle/>
+          <a:p>
+            <a:pPr indent="0" marL="0">
+              <a:buNone/>
+            </a:pPr>
+            <a:r>
+              <a:rPr lang="en-US" sz="2700" b="1" dirty="0">
+                <a:solidFill>
+                  <a:srgbClr val="0F172A"/>
+                </a:solidFill>
+                <a:latin typeface="Arial" pitchFamily="34" charset="0"/>
+                <a:ea typeface="Arial" pitchFamily="34" charset="-122"/>
+                <a:cs typeface="Arial" pitchFamily="34" charset="-120"/>
+              </a:rPr>
+              <a:t>Verified: balanced, self-healing, Multi-AZ</a:t>
+            </a:r>
+            <a:endParaRPr lang="en-US" sz="2700" dirty="0"/>
+          </a:p>
+        </p:txBody>
+      </p:sp>
+      <p:sp>
+        <p:nvSpPr>
+          <p:cNvPr id="5" name="Shape 3"/>
+          <p:cNvSpPr/>
+          <p:nvPr/>
+        </p:nvSpPr>
+        <p:spPr>
+          <a:xfrm>
+            <a:off x="640080" y="1828800"/>
+            <a:ext cx="2606040" cy="1371600"/>
+          </a:xfrm>
+          <a:prstGeom prst="roundRect">
+            <a:avLst>
+              <a:gd name="adj" fmla="val 4000"/>
+            </a:avLst>
+          </a:prstGeom>
+          <a:solidFill>
+            <a:srgbClr val="F6F7F9"/>
+          </a:solidFill>
+          <a:ln w="12700">
+            <a:solidFill>
+              <a:srgbClr val="DBE1EA"/>
+            </a:solidFill>
+            <a:prstDash val="solid"/>
+          </a:ln>
+        </p:spPr>
+      </p:sp>
+      <p:sp>
+        <p:nvSpPr>
+          <p:cNvPr id="6" name="Text 4"/>
+          <p:cNvSpPr/>
+          <p:nvPr/>
+        </p:nvSpPr>
+        <p:spPr>
+          <a:xfrm>
+            <a:off x="640080" y="2011680"/>
+            <a:ext cx="2606040" cy="731520"/>
+          </a:xfrm>
+          <a:prstGeom prst="rect">
+            <a:avLst/>
+          </a:prstGeom>
+          <a:noFill/>
+          <a:ln/>
+        </p:spPr>
+        <p:txBody>
+          <a:bodyPr wrap="square" rtlCol="0" anchor="ctr"/>
+          <a:lstStyle/>
+          <a:p>
+            <a:pPr algn="ctr" indent="0" marL="0">
+              <a:buNone/>
+            </a:pPr>
+            <a:r>
+              <a:rPr lang="en-US" sz="2800" b="1" dirty="0">
+                <a:solidFill>
+                  <a:srgbClr val="0F172A"/>
+                </a:solidFill>
+                <a:latin typeface="Arial" pitchFamily="34" charset="0"/>
+                <a:ea typeface="Arial" pitchFamily="34" charset="-122"/>
+                <a:cs typeface="Arial" pitchFamily="34" charset="-120"/>
+              </a:rPr>
+              <a:t>3/3</a:t>
+            </a:r>
+            <a:endParaRPr lang="en-US" sz="2800" dirty="0"/>
+          </a:p>
+        </p:txBody>
+      </p:sp>
+      <p:sp>
+        <p:nvSpPr>
+          <p:cNvPr id="7" name="Text 5"/>
+          <p:cNvSpPr/>
+          <p:nvPr/>
+        </p:nvSpPr>
+        <p:spPr>
+          <a:xfrm>
+            <a:off x="777240" y="2697480"/>
+            <a:ext cx="2331720" cy="457200"/>
+          </a:xfrm>
+          <a:prstGeom prst="rect">
+            <a:avLst/>
+          </a:prstGeom>
+          <a:noFill/>
+          <a:ln/>
+        </p:spPr>
+        <p:txBody>
+          <a:bodyPr wrap="square" rtlCol="0" anchor="ctr"/>
+          <a:lstStyle/>
+          <a:p>
+            <a:pPr algn="ctr" indent="0" marL="0">
+              <a:buNone/>
+            </a:pPr>
+            <a:r>
+              <a:rPr lang="en-US" sz="1150" dirty="0">
+                <a:solidFill>
+                  <a:srgbClr val="5B6675"/>
+                </a:solidFill>
+                <a:latin typeface="Arial" pitchFamily="34" charset="0"/>
+                <a:ea typeface="Arial" pitchFamily="34" charset="-122"/>
+                <a:cs typeface="Arial" pitchFamily="34" charset="-120"/>
+              </a:rPr>
+              <a:t>targets healthy</a:t>
+            </a:r>
+            <a:endParaRPr lang="en-US" sz="1150" dirty="0"/>
+          </a:p>
+        </p:txBody>
+      </p:sp>
+      <p:sp>
+        <p:nvSpPr>
+          <p:cNvPr id="8" name="Shape 6"/>
+          <p:cNvSpPr/>
+          <p:nvPr/>
+        </p:nvSpPr>
+        <p:spPr>
+          <a:xfrm>
+            <a:off x="3429000" y="1828800"/>
+            <a:ext cx="2606040" cy="1371600"/>
+          </a:xfrm>
+          <a:prstGeom prst="roundRect">
+            <a:avLst>
+              <a:gd name="adj" fmla="val 4000"/>
+            </a:avLst>
+          </a:prstGeom>
+          <a:solidFill>
+            <a:srgbClr val="F6F7F9"/>
+          </a:solidFill>
+          <a:ln w="12700">
+            <a:solidFill>
+              <a:srgbClr val="DBE1EA"/>
+            </a:solidFill>
+            <a:prstDash val="solid"/>
+          </a:ln>
+        </p:spPr>
+      </p:sp>
+      <p:sp>
+        <p:nvSpPr>
+          <p:cNvPr id="9" name="Text 7"/>
+          <p:cNvSpPr/>
+          <p:nvPr/>
+        </p:nvSpPr>
+        <p:spPr>
+          <a:xfrm>
+            <a:off x="3429000" y="2011680"/>
+            <a:ext cx="2606040" cy="731520"/>
+          </a:xfrm>
+          <a:prstGeom prst="rect">
+            <a:avLst/>
+          </a:prstGeom>
+          <a:noFill/>
+          <a:ln/>
+        </p:spPr>
+        <p:txBody>
+          <a:bodyPr wrap="square" rtlCol="0" anchor="ctr"/>
+          <a:lstStyle/>
+          <a:p>
+            <a:pPr algn="ctr" indent="0" marL="0">
+              <a:buNone/>
+            </a:pPr>
+            <a:r>
+              <a:rPr lang="en-US" sz="2800" b="1" dirty="0">
+                <a:solidFill>
+                  <a:srgbClr val="0F172A"/>
+                </a:solidFill>
+                <a:latin typeface="Arial" pitchFamily="34" charset="0"/>
+                <a:ea typeface="Arial" pitchFamily="34" charset="-122"/>
+                <a:cs typeface="Arial" pitchFamily="34" charset="-120"/>
+              </a:rPr>
+              <a:t>6/6/6</a:t>
+            </a:r>
+            <a:endParaRPr lang="en-US" sz="2800" dirty="0"/>
+          </a:p>
+        </p:txBody>
+      </p:sp>
+      <p:sp>
+        <p:nvSpPr>
+          <p:cNvPr id="10" name="Text 8"/>
+          <p:cNvSpPr/>
+          <p:nvPr/>
+        </p:nvSpPr>
+        <p:spPr>
+          <a:xfrm>
+            <a:off x="3566160" y="2697480"/>
+            <a:ext cx="2331720" cy="457200"/>
+          </a:xfrm>
+          <a:prstGeom prst="rect">
+            <a:avLst/>
+          </a:prstGeom>
+          <a:noFill/>
+          <a:ln/>
+        </p:spPr>
+        <p:txBody>
+          <a:bodyPr wrap="square" rtlCol="0" anchor="ctr"/>
+          <a:lstStyle/>
+          <a:p>
+            <a:pPr algn="ctr" indent="0" marL="0">
+              <a:buNone/>
+            </a:pPr>
+            <a:r>
+              <a:rPr lang="en-US" sz="1150" dirty="0">
+                <a:solidFill>
+                  <a:srgbClr val="5B6675"/>
+                </a:solidFill>
+                <a:latin typeface="Arial" pitchFamily="34" charset="0"/>
+                <a:ea typeface="Arial" pitchFamily="34" charset="-122"/>
+                <a:cs typeface="Arial" pitchFamily="34" charset="-120"/>
+              </a:rPr>
+              <a:t>even load spread</a:t>
+            </a:r>
+            <a:endParaRPr lang="en-US" sz="1150" dirty="0"/>
+          </a:p>
+        </p:txBody>
+      </p:sp>
+      <p:sp>
+        <p:nvSpPr>
+          <p:cNvPr id="11" name="Shape 9"/>
+          <p:cNvSpPr/>
+          <p:nvPr/>
+        </p:nvSpPr>
+        <p:spPr>
+          <a:xfrm>
+            <a:off x="6217920" y="1828800"/>
+            <a:ext cx="2606040" cy="1371600"/>
+          </a:xfrm>
+          <a:prstGeom prst="roundRect">
+            <a:avLst>
+              <a:gd name="adj" fmla="val 4000"/>
+            </a:avLst>
+          </a:prstGeom>
+          <a:solidFill>
+            <a:srgbClr val="F6F7F9"/>
+          </a:solidFill>
+          <a:ln w="12700">
+            <a:solidFill>
+              <a:srgbClr val="DBE1EA"/>
+            </a:solidFill>
+            <a:prstDash val="solid"/>
+          </a:ln>
+        </p:spPr>
+      </p:sp>
+      <p:sp>
+        <p:nvSpPr>
+          <p:cNvPr id="12" name="Text 10"/>
+          <p:cNvSpPr/>
+          <p:nvPr/>
+        </p:nvSpPr>
+        <p:spPr>
+          <a:xfrm>
+            <a:off x="6217920" y="2011680"/>
+            <a:ext cx="2606040" cy="731520"/>
+          </a:xfrm>
+          <a:prstGeom prst="rect">
+            <a:avLst/>
+          </a:prstGeom>
+          <a:noFill/>
+          <a:ln/>
+        </p:spPr>
+        <p:txBody>
+          <a:bodyPr wrap="square" rtlCol="0" anchor="ctr"/>
+          <a:lstStyle/>
+          <a:p>
+            <a:pPr algn="ctr" indent="0" marL="0">
+              <a:buNone/>
+            </a:pPr>
+            <a:r>
+              <a:rPr lang="en-US" sz="2800" b="1" dirty="0">
+                <a:solidFill>
+                  <a:srgbClr val="0F172A"/>
+                </a:solidFill>
+                <a:latin typeface="Arial" pitchFamily="34" charset="0"/>
+                <a:ea typeface="Arial" pitchFamily="34" charset="-122"/>
+                <a:cs typeface="Arial" pitchFamily="34" charset="-120"/>
+              </a:rPr>
+              <a:t>~30s</a:t>
+            </a:r>
+            <a:endParaRPr lang="en-US" sz="2800" dirty="0"/>
+          </a:p>
+        </p:txBody>
+      </p:sp>
+      <p:sp>
+        <p:nvSpPr>
+          <p:cNvPr id="13" name="Text 11"/>
+          <p:cNvSpPr/>
+          <p:nvPr/>
+        </p:nvSpPr>
+        <p:spPr>
+          <a:xfrm>
+            <a:off x="6355080" y="2697480"/>
+            <a:ext cx="2331720" cy="457200"/>
+          </a:xfrm>
+          <a:prstGeom prst="rect">
+            <a:avLst/>
+          </a:prstGeom>
+          <a:noFill/>
+          <a:ln/>
+        </p:spPr>
+        <p:txBody>
+          <a:bodyPr wrap="square" rtlCol="0" anchor="ctr"/>
+          <a:lstStyle/>
+          <a:p>
+            <a:pPr algn="ctr" indent="0" marL="0">
+              <a:buNone/>
+            </a:pPr>
+            <a:r>
+              <a:rPr lang="en-US" sz="1150" dirty="0">
+                <a:solidFill>
+                  <a:srgbClr val="5B6675"/>
+                </a:solidFill>
+                <a:latin typeface="Arial" pitchFamily="34" charset="0"/>
+                <a:ea typeface="Arial" pitchFamily="34" charset="-122"/>
+                <a:cs typeface="Arial" pitchFamily="34" charset="-120"/>
+              </a:rPr>
+              <a:t>auto-recovery</a:t>
+            </a:r>
+            <a:endParaRPr lang="en-US" sz="1150" dirty="0"/>
+          </a:p>
+        </p:txBody>
+      </p:sp>
+      <p:sp>
+        <p:nvSpPr>
+          <p:cNvPr id="14" name="Shape 12"/>
+          <p:cNvSpPr/>
+          <p:nvPr/>
+        </p:nvSpPr>
+        <p:spPr>
+          <a:xfrm>
+            <a:off x="9006840" y="1828800"/>
+            <a:ext cx="2606040" cy="1371600"/>
+          </a:xfrm>
+          <a:prstGeom prst="roundRect">
+            <a:avLst>
+              <a:gd name="adj" fmla="val 4000"/>
+            </a:avLst>
+          </a:prstGeom>
+          <a:solidFill>
+            <a:srgbClr val="F6F7F9"/>
+          </a:solidFill>
+          <a:ln w="12700">
+            <a:solidFill>
+              <a:srgbClr val="DBE1EA"/>
+            </a:solidFill>
+            <a:prstDash val="solid"/>
+          </a:ln>
+        </p:spPr>
+      </p:sp>
+      <p:sp>
+        <p:nvSpPr>
+          <p:cNvPr id="15" name="Text 13"/>
+          <p:cNvSpPr/>
+          <p:nvPr/>
+        </p:nvSpPr>
+        <p:spPr>
+          <a:xfrm>
+            <a:off x="9006840" y="2011680"/>
+            <a:ext cx="2606040" cy="731520"/>
+          </a:xfrm>
+          <a:prstGeom prst="rect">
+            <a:avLst/>
+          </a:prstGeom>
+          <a:noFill/>
+          <a:ln/>
+        </p:spPr>
+        <p:txBody>
+          <a:bodyPr wrap="square" rtlCol="0" anchor="ctr"/>
+          <a:lstStyle/>
+          <a:p>
+            <a:pPr algn="ctr" indent="0" marL="0">
+              <a:buNone/>
+            </a:pPr>
+            <a:r>
+              <a:rPr lang="en-US" sz="2800" b="1" dirty="0">
+                <a:solidFill>
+                  <a:srgbClr val="0F172A"/>
+                </a:solidFill>
+                <a:latin typeface="Arial" pitchFamily="34" charset="0"/>
+                <a:ea typeface="Arial" pitchFamily="34" charset="-122"/>
+                <a:cs typeface="Arial" pitchFamily="34" charset="-120"/>
+              </a:rPr>
+              <a:t>failover</a:t>
+            </a:r>
+            <a:endParaRPr lang="en-US" sz="2800" dirty="0"/>
+          </a:p>
+        </p:txBody>
+      </p:sp>
+      <p:sp>
+        <p:nvSpPr>
+          <p:cNvPr id="16" name="Text 14"/>
+          <p:cNvSpPr/>
+          <p:nvPr/>
+        </p:nvSpPr>
+        <p:spPr>
+          <a:xfrm>
+            <a:off x="9144000" y="2697480"/>
+            <a:ext cx="2331720" cy="457200"/>
+          </a:xfrm>
+          <a:prstGeom prst="rect">
+            <a:avLst/>
+          </a:prstGeom>
+          <a:noFill/>
+          <a:ln/>
+        </p:spPr>
+        <p:txBody>
+          <a:bodyPr wrap="square" rtlCol="0" anchor="ctr"/>
+          <a:lstStyle/>
+          <a:p>
+            <a:pPr algn="ctr" indent="0" marL="0">
+              <a:buNone/>
+            </a:pPr>
+            <a:r>
+              <a:rPr lang="en-US" sz="1150" dirty="0">
+                <a:solidFill>
+                  <a:srgbClr val="5B6675"/>
+                </a:solidFill>
+                <a:latin typeface="Arial" pitchFamily="34" charset="0"/>
+                <a:ea typeface="Arial" pitchFamily="34" charset="-122"/>
+                <a:cs typeface="Arial" pitchFamily="34" charset="-120"/>
+              </a:rPr>
+              <a:t>primary→standby</a:t>
+            </a:r>
+            <a:endParaRPr lang="en-US" sz="1150" dirty="0"/>
+          </a:p>
+        </p:txBody>
+      </p:sp>
+      <p:sp>
+        <p:nvSpPr>
+          <p:cNvPr id="17" name="Text 15"/>
+          <p:cNvSpPr/>
+          <p:nvPr/>
+        </p:nvSpPr>
+        <p:spPr>
+          <a:xfrm>
+            <a:off x="822960" y="3566160"/>
+            <a:ext cx="10607040" cy="2194560"/>
+          </a:xfrm>
+          <a:prstGeom prst="rect">
+            <a:avLst/>
+          </a:prstGeom>
+          <a:noFill/>
+          <a:ln/>
+        </p:spPr>
+        <p:txBody>
+          <a:bodyPr wrap="square" rtlCol="0" anchor="ctr"/>
+          <a:lstStyle/>
+          <a:p>
+            <a:pPr marL="177800" indent="-177800">
+              <a:spcAft>
+                <a:spcPts val="800"/>
+              </a:spcAft>
+              <a:buSzPct val="100000"/>
+              <a:buChar char="•"/>
+            </a:pPr>
+            <a:r>
+              <a:rPr lang="en-US" sz="1500" dirty="0">
+                <a:solidFill>
+                  <a:srgbClr val="0F172A"/>
+                </a:solidFill>
+                <a:latin typeface="Arial" pitchFamily="34" charset="0"/>
+                <a:ea typeface="Arial" pitchFamily="34" charset="-122"/>
+                <a:cs typeface="Arial" pitchFamily="34" charset="-120"/>
+              </a:rPr>
+              <a:t>Load: 18 requests spread evenly across all 3 instances and both AZs</a:t>
+            </a:r>
+            <a:endParaRPr lang="en-US" sz="1500" dirty="0"/>
+          </a:p>
+          <a:p>
+            <a:pPr marL="177800" indent="-177800">
+              <a:spcAft>
+                <a:spcPts val="800"/>
+              </a:spcAft>
+              <a:buSzPct val="100000"/>
+              <a:buChar char="•"/>
+            </a:pPr>
+            <a:r>
+              <a:rPr lang="en-US" sz="1500" dirty="0">
+                <a:solidFill>
+                  <a:srgbClr val="0F172A"/>
+                </a:solidFill>
+                <a:latin typeface="Arial" pitchFamily="34" charset="0"/>
+                <a:ea typeface="Arial" pitchFamily="34" charset="-122"/>
+                <a:cs typeface="Arial" pitchFamily="34" charset="-120"/>
+              </a:rPr>
+              <a:t>App-tier failover: stop an instance → ALB routes around it, ASG relaunches it</a:t>
+            </a:r>
+            <a:endParaRPr lang="en-US" sz="1500" dirty="0"/>
+          </a:p>
+          <a:p>
+            <a:pPr marL="177800" indent="-177800">
+              <a:spcAft>
+                <a:spcPts val="800"/>
+              </a:spcAft>
+              <a:buSzPct val="100000"/>
+              <a:buChar char="•"/>
+            </a:pPr>
+            <a:r>
+              <a:rPr lang="en-US" sz="1500" dirty="0">
+                <a:solidFill>
+                  <a:srgbClr val="0F172A"/>
+                </a:solidFill>
+                <a:latin typeface="Arial" pitchFamily="34" charset="0"/>
+                <a:ea typeface="Arial" pitchFamily="34" charset="-122"/>
+                <a:cs typeface="Arial" pitchFamily="34" charset="-120"/>
+              </a:rPr>
+              <a:t>Data-tier failover: stop the primary → app flips to the standby, stays up</a:t>
+            </a:r>
+            <a:endParaRPr lang="en-US" sz="1500" dirty="0"/>
+          </a:p>
+        </p:txBody>
+      </p:sp>
+      <p:sp>
+        <p:nvSpPr>
+          <p:cNvPr id="18" name="Text 16"/>
+          <p:cNvSpPr/>
+          <p:nvPr/>
+        </p:nvSpPr>
+        <p:spPr>
+          <a:xfrm>
+            <a:off x="640080" y="6446520"/>
+            <a:ext cx="7315200" cy="274320"/>
+          </a:xfrm>
+          <a:prstGeom prst="rect">
+            <a:avLst/>
+          </a:prstGeom>
+          <a:noFill/>
+          <a:ln/>
+        </p:spPr>
+        <p:txBody>
+          <a:bodyPr wrap="square" rtlCol="0" anchor="ctr"/>
+          <a:lstStyle/>
+          <a:p>
+            <a:pPr indent="0" marL="0">
+              <a:buNone/>
+            </a:pPr>
+            <a:r>
+              <a:rPr lang="en-US" sz="1000" dirty="0">
+                <a:solidFill>
+                  <a:srgbClr val="8A94A3"/>
+                </a:solidFill>
+                <a:latin typeface="Arial" pitchFamily="34" charset="0"/>
+                <a:ea typeface="Arial" pitchFamily="34" charset="-122"/>
+                <a:cs typeface="Arial" pitchFamily="34" charset="-120"/>
+              </a:rPr>
+              <a:t>Full output in tests/</a:t>
+            </a:r>
+            <a:endParaRPr lang="en-US" sz="1000" dirty="0"/>
+          </a:p>
+        </p:txBody>
+      </p:sp>
+      <p:sp>
+        <p:nvSpPr>
+          <p:cNvPr id="19" name="Text 17"/>
+          <p:cNvSpPr/>
+          <p:nvPr/>
+        </p:nvSpPr>
+        <p:spPr>
+          <a:xfrm>
+            <a:off x="7772400" y="6446520"/>
+            <a:ext cx="3749040" cy="274320"/>
+          </a:xfrm>
+          <a:prstGeom prst="rect">
+            <a:avLst/>
+          </a:prstGeom>
+          <a:noFill/>
+          <a:ln/>
+        </p:spPr>
+        <p:txBody>
+          <a:bodyPr wrap="square" rtlCol="0" anchor="ctr"/>
+          <a:lstStyle/>
+          <a:p>
+            <a:pPr algn="r" indent="0" marL="0">
+              <a:buNone/>
+            </a:pPr>
+            <a:r>
+              <a:rPr lang="en-US" sz="1000" dirty="0">
+                <a:solidFill>
+                  <a:srgbClr val="8A94A3"/>
+                </a:solidFill>
+                <a:latin typeface="Arial" pitchFamily="34" charset="0"/>
+                <a:ea typeface="Arial" pitchFamily="34" charset="-122"/>
+                <a:cs typeface="Arial" pitchFamily="34" charset="-120"/>
+              </a:rPr>
+              <a:t>test-results.md · failover-test.md</a:t>
+            </a:r>
+            <a:endParaRPr lang="en-US" sz="1000" dirty="0"/>
+          </a:p>
+        </p:txBody>
+      </p:sp>
+    </p:spTree>
+  </p:cSld>
+  <p:clrMapOvr>
+    <a:masterClrMapping/>
+  </p:clrMapOvr>
+</p:sld>
+</file>
+
+<file path=ppt/slides/slide19.xml><?xml version="1.0" encoding="utf-8"?>
+<p:sld xmlns:a="http://schemas.openxmlformats.org/drawingml/2006/main" xmlns:r="http://schemas.openxmlformats.org/officeDocument/2006/relationships" xmlns:p="http://schemas.openxmlformats.org/presentationml/2006/main">
+  <p:cSld name="Slide 19">
+    <p:bg>
+      <p:bgPr>
+        <a:solidFill>
+          <a:srgbClr val="FFFFFF"/>
+        </a:solidFill>
+      </p:bgPr>
+    </p:bg>
+    <p:spTree>
+      <p:nvGrpSpPr>
+        <p:cNvPr id="1" name=""/>
+        <p:cNvGrpSpPr/>
+        <p:nvPr/>
+      </p:nvGrpSpPr>
+      <p:grpSpPr>
+        <a:xfrm>
+          <a:off x="0" y="0"/>
+          <a:ext cx="0" cy="0"/>
+          <a:chOff x="0" y="0"/>
+          <a:chExt cx="0" cy="0"/>
+        </a:xfrm>
+      </p:grpSpPr>
+      <p:sp>
+        <p:nvSpPr>
+          <p:cNvPr id="2" name="Shape 0"/>
+          <p:cNvSpPr/>
+          <p:nvPr/>
+        </p:nvSpPr>
+        <p:spPr>
+          <a:xfrm>
+            <a:off x="0" y="0"/>
+            <a:ext cx="256032" cy="6858000"/>
+          </a:xfrm>
+          <a:prstGeom prst="rect">
+            <a:avLst/>
+          </a:prstGeom>
+          <a:solidFill>
+            <a:srgbClr val="3B5BDB"/>
+          </a:solidFill>
+          <a:ln/>
+        </p:spPr>
+      </p:sp>
+      <p:sp>
+        <p:nvSpPr>
+          <p:cNvPr id="3" name="Text 1"/>
+          <p:cNvSpPr/>
+          <p:nvPr/>
+        </p:nvSpPr>
+        <p:spPr>
+          <a:xfrm>
+            <a:off x="640080" y="384048"/>
+            <a:ext cx="10972800" cy="274320"/>
+          </a:xfrm>
+          <a:prstGeom prst="rect">
+            <a:avLst/>
+          </a:prstGeom>
+          <a:noFill/>
+          <a:ln/>
+        </p:spPr>
+        <p:txBody>
+          <a:bodyPr wrap="square" rtlCol="0" anchor="ctr"/>
+          <a:lstStyle/>
+          <a:p>
+            <a:pPr indent="0" marL="0">
+              <a:buNone/>
+            </a:pPr>
+            <a:r>
+              <a:rPr lang="en-US" sz="1200" b="1" spc="200" kern="0" dirty="0">
+                <a:solidFill>
+                  <a:srgbClr val="3B5BDB"/>
+                </a:solidFill>
+                <a:latin typeface="Arial" pitchFamily="34" charset="0"/>
+                <a:ea typeface="Arial" pitchFamily="34" charset="-122"/>
+                <a:cs typeface="Arial" pitchFamily="34" charset="-120"/>
+              </a:rPr>
+              <a:t>COST ANALYSIS</a:t>
+            </a:r>
+            <a:endParaRPr lang="en-US" sz="1200" dirty="0"/>
+          </a:p>
+        </p:txBody>
+      </p:sp>
+      <p:sp>
+        <p:nvSpPr>
+          <p:cNvPr id="4" name="Text 2"/>
+          <p:cNvSpPr/>
+          <p:nvPr/>
+        </p:nvSpPr>
+        <p:spPr>
+          <a:xfrm>
+            <a:off x="640080" y="676656"/>
+            <a:ext cx="10972800" cy="731520"/>
+          </a:xfrm>
+          <a:prstGeom prst="rect">
+            <a:avLst/>
+          </a:prstGeom>
+          <a:noFill/>
+          <a:ln/>
+        </p:spPr>
+        <p:txBody>
+          <a:bodyPr wrap="square" rtlCol="0" anchor="ctr"/>
+          <a:lstStyle/>
+          <a:p>
+            <a:pPr indent="0" marL="0">
+              <a:buNone/>
+            </a:pPr>
+            <a:r>
+              <a:rPr lang="en-US" sz="2700" b="1" dirty="0">
+                <a:solidFill>
+                  <a:srgbClr val="0F172A"/>
+                </a:solidFill>
+                <a:latin typeface="Arial" pitchFamily="34" charset="0"/>
+                <a:ea typeface="Arial" pitchFamily="34" charset="-122"/>
+                <a:cs typeface="Arial" pitchFamily="34" charset="-120"/>
+              </a:rPr>
+              <a:t>~$101/month running — $0 when torn down</a:t>
+            </a:r>
+            <a:endParaRPr lang="en-US" sz="2700" dirty="0"/>
+          </a:p>
+        </p:txBody>
+      </p:sp>
+      <p:sp>
+        <p:nvSpPr>
+          <p:cNvPr id="5" name="Shape 3"/>
+          <p:cNvSpPr/>
+          <p:nvPr/>
+        </p:nvSpPr>
+        <p:spPr>
+          <a:xfrm>
+            <a:off x="640080" y="1828800"/>
+            <a:ext cx="2606040" cy="1371600"/>
+          </a:xfrm>
+          <a:prstGeom prst="roundRect">
+            <a:avLst>
+              <a:gd name="adj" fmla="val 4000"/>
+            </a:avLst>
+          </a:prstGeom>
+          <a:solidFill>
+            <a:srgbClr val="F6F7F9"/>
+          </a:solidFill>
+          <a:ln w="12700">
+            <a:solidFill>
+              <a:srgbClr val="DBE1EA"/>
+            </a:solidFill>
+            <a:prstDash val="solid"/>
+          </a:ln>
+        </p:spPr>
+      </p:sp>
+      <p:sp>
+        <p:nvSpPr>
+          <p:cNvPr id="6" name="Text 4"/>
+          <p:cNvSpPr/>
+          <p:nvPr/>
+        </p:nvSpPr>
+        <p:spPr>
+          <a:xfrm>
+            <a:off x="640080" y="2011680"/>
+            <a:ext cx="2606040" cy="731520"/>
+          </a:xfrm>
+          <a:prstGeom prst="rect">
+            <a:avLst/>
+          </a:prstGeom>
+          <a:noFill/>
+          <a:ln/>
+        </p:spPr>
+        <p:txBody>
+          <a:bodyPr wrap="square" rtlCol="0" anchor="ctr"/>
+          <a:lstStyle/>
+          <a:p>
+            <a:pPr algn="ctr" indent="0" marL="0">
+              <a:buNone/>
+            </a:pPr>
+            <a:r>
+              <a:rPr lang="en-US" sz="2800" b="1" dirty="0">
+                <a:solidFill>
+                  <a:srgbClr val="0F172A"/>
+                </a:solidFill>
+                <a:latin typeface="Arial" pitchFamily="34" charset="0"/>
+                <a:ea typeface="Arial" pitchFamily="34" charset="-122"/>
+                <a:cs typeface="Arial" pitchFamily="34" charset="-120"/>
+              </a:rPr>
+              <a:t>~$35</a:t>
+            </a:r>
+            <a:endParaRPr lang="en-US" sz="2800" dirty="0"/>
+          </a:p>
+        </p:txBody>
+      </p:sp>
+      <p:sp>
+        <p:nvSpPr>
+          <p:cNvPr id="7" name="Text 5"/>
+          <p:cNvSpPr/>
+          <p:nvPr/>
+        </p:nvSpPr>
+        <p:spPr>
+          <a:xfrm>
+            <a:off x="777240" y="2697480"/>
+            <a:ext cx="2331720" cy="457200"/>
+          </a:xfrm>
+          <a:prstGeom prst="rect">
+            <a:avLst/>
+          </a:prstGeom>
+          <a:noFill/>
+          <a:ln/>
+        </p:spPr>
+        <p:txBody>
+          <a:bodyPr wrap="square" rtlCol="0" anchor="ctr"/>
+          <a:lstStyle/>
+          <a:p>
+            <a:pPr algn="ctr" indent="0" marL="0">
+              <a:buNone/>
+            </a:pPr>
+            <a:r>
+              <a:rPr lang="en-US" sz="1150" dirty="0">
+                <a:solidFill>
+                  <a:srgbClr val="5B6675"/>
+                </a:solidFill>
+                <a:latin typeface="Arial" pitchFamily="34" charset="0"/>
+                <a:ea typeface="Arial" pitchFamily="34" charset="-122"/>
+                <a:cs typeface="Arial" pitchFamily="34" charset="-120"/>
+              </a:rPr>
+              <a:t>NAT Gateway</a:t>
+            </a:r>
+            <a:endParaRPr lang="en-US" sz="1150" dirty="0"/>
+          </a:p>
+        </p:txBody>
+      </p:sp>
+      <p:sp>
+        <p:nvSpPr>
+          <p:cNvPr id="8" name="Shape 6"/>
+          <p:cNvSpPr/>
+          <p:nvPr/>
+        </p:nvSpPr>
+        <p:spPr>
+          <a:xfrm>
+            <a:off x="3429000" y="1828800"/>
+            <a:ext cx="2606040" cy="1371600"/>
+          </a:xfrm>
+          <a:prstGeom prst="roundRect">
+            <a:avLst>
+              <a:gd name="adj" fmla="val 4000"/>
+            </a:avLst>
+          </a:prstGeom>
+          <a:solidFill>
+            <a:srgbClr val="F6F7F9"/>
+          </a:solidFill>
+          <a:ln w="12700">
+            <a:solidFill>
+              <a:srgbClr val="DBE1EA"/>
+            </a:solidFill>
+            <a:prstDash val="solid"/>
+          </a:ln>
+        </p:spPr>
+      </p:sp>
+      <p:sp>
+        <p:nvSpPr>
+          <p:cNvPr id="9" name="Text 7"/>
+          <p:cNvSpPr/>
+          <p:nvPr/>
+        </p:nvSpPr>
+        <p:spPr>
+          <a:xfrm>
+            <a:off x="3429000" y="2011680"/>
+            <a:ext cx="2606040" cy="731520"/>
+          </a:xfrm>
+          <a:prstGeom prst="rect">
+            <a:avLst/>
+          </a:prstGeom>
+          <a:noFill/>
+          <a:ln/>
+        </p:spPr>
+        <p:txBody>
+          <a:bodyPr wrap="square" rtlCol="0" anchor="ctr"/>
+          <a:lstStyle/>
+          <a:p>
+            <a:pPr algn="ctr" indent="0" marL="0">
+              <a:buNone/>
+            </a:pPr>
+            <a:r>
+              <a:rPr lang="en-US" sz="2800" b="1" dirty="0">
+                <a:solidFill>
+                  <a:srgbClr val="0F172A"/>
+                </a:solidFill>
+                <a:latin typeface="Arial" pitchFamily="34" charset="0"/>
+                <a:ea typeface="Arial" pitchFamily="34" charset="-122"/>
+                <a:cs typeface="Arial" pitchFamily="34" charset="-120"/>
+              </a:rPr>
+              <a:t>~$22</a:t>
+            </a:r>
+            <a:endParaRPr lang="en-US" sz="2800" dirty="0"/>
+          </a:p>
+        </p:txBody>
+      </p:sp>
+      <p:sp>
+        <p:nvSpPr>
+          <p:cNvPr id="10" name="Text 8"/>
+          <p:cNvSpPr/>
+          <p:nvPr/>
+        </p:nvSpPr>
+        <p:spPr>
+          <a:xfrm>
+            <a:off x="3566160" y="2697480"/>
+            <a:ext cx="2331720" cy="457200"/>
+          </a:xfrm>
+          <a:prstGeom prst="rect">
+            <a:avLst/>
+          </a:prstGeom>
+          <a:noFill/>
+          <a:ln/>
+        </p:spPr>
+        <p:txBody>
+          <a:bodyPr wrap="square" rtlCol="0" anchor="ctr"/>
+          <a:lstStyle/>
+          <a:p>
+            <a:pPr algn="ctr" indent="0" marL="0">
+              <a:buNone/>
+            </a:pPr>
+            <a:r>
+              <a:rPr lang="en-US" sz="1150" dirty="0">
+                <a:solidFill>
+                  <a:srgbClr val="5B6675"/>
+                </a:solidFill>
+                <a:latin typeface="Arial" pitchFamily="34" charset="0"/>
+                <a:ea typeface="Arial" pitchFamily="34" charset="-122"/>
+                <a:cs typeface="Arial" pitchFamily="34" charset="-120"/>
+              </a:rPr>
+              <a:t>Load Balancer</a:t>
+            </a:r>
+            <a:endParaRPr lang="en-US" sz="1150" dirty="0"/>
+          </a:p>
+        </p:txBody>
+      </p:sp>
+      <p:sp>
+        <p:nvSpPr>
+          <p:cNvPr id="11" name="Shape 9"/>
+          <p:cNvSpPr/>
+          <p:nvPr/>
+        </p:nvSpPr>
+        <p:spPr>
+          <a:xfrm>
+            <a:off x="6217920" y="1828800"/>
+            <a:ext cx="2606040" cy="1371600"/>
+          </a:xfrm>
+          <a:prstGeom prst="roundRect">
+            <a:avLst>
+              <a:gd name="adj" fmla="val 4000"/>
+            </a:avLst>
+          </a:prstGeom>
+          <a:solidFill>
+            <a:srgbClr val="F6F7F9"/>
+          </a:solidFill>
+          <a:ln w="12700">
+            <a:solidFill>
+              <a:srgbClr val="DBE1EA"/>
+            </a:solidFill>
+            <a:prstDash val="solid"/>
+          </a:ln>
+        </p:spPr>
+      </p:sp>
+      <p:sp>
+        <p:nvSpPr>
+          <p:cNvPr id="12" name="Text 10"/>
+          <p:cNvSpPr/>
+          <p:nvPr/>
+        </p:nvSpPr>
+        <p:spPr>
+          <a:xfrm>
+            <a:off x="6217920" y="2011680"/>
+            <a:ext cx="2606040" cy="731520"/>
+          </a:xfrm>
+          <a:prstGeom prst="rect">
+            <a:avLst/>
+          </a:prstGeom>
+          <a:noFill/>
+          <a:ln/>
+        </p:spPr>
+        <p:txBody>
+          <a:bodyPr wrap="square" rtlCol="0" anchor="ctr"/>
+          <a:lstStyle/>
+          <a:p>
+            <a:pPr algn="ctr" indent="0" marL="0">
+              <a:buNone/>
+            </a:pPr>
+            <a:r>
+              <a:rPr lang="en-US" sz="2800" b="1" dirty="0">
+                <a:solidFill>
+                  <a:srgbClr val="0F172A"/>
+                </a:solidFill>
+                <a:latin typeface="Arial" pitchFamily="34" charset="0"/>
+                <a:ea typeface="Arial" pitchFamily="34" charset="-122"/>
+                <a:cs typeface="Arial" pitchFamily="34" charset="-120"/>
+              </a:rPr>
+              <a:t>~$30</a:t>
+            </a:r>
+            <a:endParaRPr lang="en-US" sz="2800" dirty="0"/>
+          </a:p>
+        </p:txBody>
+      </p:sp>
+      <p:sp>
+        <p:nvSpPr>
+          <p:cNvPr id="13" name="Text 11"/>
+          <p:cNvSpPr/>
+          <p:nvPr/>
+        </p:nvSpPr>
+        <p:spPr>
+          <a:xfrm>
+            <a:off x="6355080" y="2697480"/>
+            <a:ext cx="2331720" cy="457200"/>
+          </a:xfrm>
+          <a:prstGeom prst="rect">
+            <a:avLst/>
+          </a:prstGeom>
+          <a:noFill/>
+          <a:ln/>
+        </p:spPr>
+        <p:txBody>
+          <a:bodyPr wrap="square" rtlCol="0" anchor="ctr"/>
+          <a:lstStyle/>
+          <a:p>
+            <a:pPr algn="ctr" indent="0" marL="0">
+              <a:buNone/>
+            </a:pPr>
+            <a:r>
+              <a:rPr lang="en-US" sz="1150" dirty="0">
+                <a:solidFill>
+                  <a:srgbClr val="5B6675"/>
+                </a:solidFill>
+                <a:latin typeface="Arial" pitchFamily="34" charset="0"/>
+                <a:ea typeface="Arial" pitchFamily="34" charset="-122"/>
+                <a:cs typeface="Arial" pitchFamily="34" charset="-120"/>
+              </a:rPr>
+              <a:t>EC2 (ASG+data)</a:t>
+            </a:r>
+            <a:endParaRPr lang="en-US" sz="1150" dirty="0"/>
+          </a:p>
+        </p:txBody>
+      </p:sp>
+      <p:sp>
+        <p:nvSpPr>
+          <p:cNvPr id="14" name="Shape 12"/>
+          <p:cNvSpPr/>
+          <p:nvPr/>
+        </p:nvSpPr>
+        <p:spPr>
+          <a:xfrm>
+            <a:off x="9006840" y="1828800"/>
+            <a:ext cx="2606040" cy="1371600"/>
+          </a:xfrm>
+          <a:prstGeom prst="roundRect">
+            <a:avLst>
+              <a:gd name="adj" fmla="val 4000"/>
+            </a:avLst>
+          </a:prstGeom>
+          <a:solidFill>
+            <a:srgbClr val="F6F7F9"/>
+          </a:solidFill>
+          <a:ln w="12700">
+            <a:solidFill>
+              <a:srgbClr val="DBE1EA"/>
+            </a:solidFill>
+            <a:prstDash val="solid"/>
+          </a:ln>
+        </p:spPr>
+      </p:sp>
+      <p:sp>
+        <p:nvSpPr>
+          <p:cNvPr id="15" name="Text 13"/>
+          <p:cNvSpPr/>
+          <p:nvPr/>
+        </p:nvSpPr>
+        <p:spPr>
+          <a:xfrm>
+            <a:off x="9006840" y="2011680"/>
+            <a:ext cx="2606040" cy="731520"/>
+          </a:xfrm>
+          <a:prstGeom prst="rect">
+            <a:avLst/>
+          </a:prstGeom>
+          <a:noFill/>
+          <a:ln/>
+        </p:spPr>
+        <p:txBody>
+          <a:bodyPr wrap="square" rtlCol="0" anchor="ctr"/>
+          <a:lstStyle/>
+          <a:p>
+            <a:pPr algn="ctr" indent="0" marL="0">
+              <a:buNone/>
+            </a:pPr>
+            <a:r>
+              <a:rPr lang="en-US" sz="2800" b="1" dirty="0">
+                <a:solidFill>
+                  <a:srgbClr val="0F172A"/>
+                </a:solidFill>
+                <a:latin typeface="Arial" pitchFamily="34" charset="0"/>
+                <a:ea typeface="Arial" pitchFamily="34" charset="-122"/>
+                <a:cs typeface="Arial" pitchFamily="34" charset="-120"/>
+              </a:rPr>
+              <a:t>$0</a:t>
+            </a:r>
+            <a:endParaRPr lang="en-US" sz="2800" dirty="0"/>
+          </a:p>
+        </p:txBody>
+      </p:sp>
+      <p:sp>
+        <p:nvSpPr>
+          <p:cNvPr id="16" name="Text 14"/>
+          <p:cNvSpPr/>
+          <p:nvPr/>
+        </p:nvSpPr>
+        <p:spPr>
+          <a:xfrm>
+            <a:off x="9144000" y="2697480"/>
+            <a:ext cx="2331720" cy="457200"/>
+          </a:xfrm>
+          <a:prstGeom prst="rect">
+            <a:avLst/>
+          </a:prstGeom>
+          <a:noFill/>
+          <a:ln/>
+        </p:spPr>
+        <p:txBody>
+          <a:bodyPr wrap="square" rtlCol="0" anchor="ctr"/>
+          <a:lstStyle/>
+          <a:p>
+            <a:pPr algn="ctr" indent="0" marL="0">
+              <a:buNone/>
+            </a:pPr>
+            <a:r>
+              <a:rPr lang="en-US" sz="1150" dirty="0">
+                <a:solidFill>
+                  <a:srgbClr val="5B6675"/>
+                </a:solidFill>
+                <a:latin typeface="Arial" pitchFamily="34" charset="0"/>
+                <a:ea typeface="Arial" pitchFamily="34" charset="-122"/>
+                <a:cs typeface="Arial" pitchFamily="34" charset="-120"/>
+              </a:rPr>
+              <a:t>after teardown</a:t>
+            </a:r>
+            <a:endParaRPr lang="en-US" sz="1150" dirty="0"/>
+          </a:p>
+        </p:txBody>
+      </p:sp>
+      <p:sp>
+        <p:nvSpPr>
+          <p:cNvPr id="17" name="Text 15"/>
+          <p:cNvSpPr/>
+          <p:nvPr/>
+        </p:nvSpPr>
+        <p:spPr>
+          <a:xfrm>
+            <a:off x="822960" y="3566160"/>
+            <a:ext cx="10607040" cy="2194560"/>
+          </a:xfrm>
+          <a:prstGeom prst="rect">
+            <a:avLst/>
+          </a:prstGeom>
+          <a:noFill/>
+          <a:ln/>
+        </p:spPr>
+        <p:txBody>
+          <a:bodyPr wrap="square" rtlCol="0" anchor="ctr"/>
+          <a:lstStyle/>
+          <a:p>
+            <a:pPr marL="177800" indent="-177800">
+              <a:spcAft>
+                <a:spcPts val="800"/>
+              </a:spcAft>
+              <a:buSzPct val="100000"/>
+              <a:buChar char="•"/>
+            </a:pPr>
+            <a:r>
+              <a:rPr lang="en-US" sz="1500" dirty="0">
+                <a:solidFill>
+                  <a:srgbClr val="0F172A"/>
+                </a:solidFill>
+                <a:latin typeface="Arial" pitchFamily="34" charset="0"/>
+                <a:ea typeface="Arial" pitchFamily="34" charset="-122"/>
+                <a:cs typeface="Arial" pitchFamily="34" charset="-120"/>
+              </a:rPr>
+              <a:t>NAT + ALB are ~57% of the bill and run regardless of traffic</a:t>
+            </a:r>
+            <a:endParaRPr lang="en-US" sz="1500" dirty="0"/>
+          </a:p>
+          <a:p>
+            <a:pPr marL="177800" indent="-177800">
+              <a:spcAft>
+                <a:spcPts val="800"/>
+              </a:spcAft>
+              <a:buSzPct val="100000"/>
+              <a:buChar char="•"/>
+            </a:pPr>
+            <a:r>
+              <a:rPr lang="en-US" sz="1500" dirty="0">
+                <a:solidFill>
+                  <a:srgbClr val="0F172A"/>
+                </a:solidFill>
+                <a:latin typeface="Arial" pitchFamily="34" charset="0"/>
+                <a:ea typeface="Arial" pitchFamily="34" charset="-122"/>
+                <a:cs typeface="Arial" pitchFamily="34" charset="-120"/>
+              </a:rPr>
+              <a:t>Biggest lever = don't leave it running idle (stop/start script, or full teardown)</a:t>
+            </a:r>
+            <a:endParaRPr lang="en-US" sz="1500" dirty="0"/>
+          </a:p>
+          <a:p>
+            <a:pPr marL="177800" indent="-177800">
+              <a:spcAft>
+                <a:spcPts val="800"/>
+              </a:spcAft>
+              <a:buSzPct val="100000"/>
+              <a:buChar char="•"/>
+            </a:pPr>
+            <a:r>
+              <a:rPr lang="en-US" sz="1500" dirty="0">
+                <a:solidFill>
+                  <a:srgbClr val="0F172A"/>
+                </a:solidFill>
+                <a:latin typeface="Arial" pitchFamily="34" charset="0"/>
+                <a:ea typeface="Arial" pitchFamily="34" charset="-122"/>
+                <a:cs typeface="Arial" pitchFamily="34" charset="-120"/>
+              </a:rPr>
+              <a:t>Torn down after capturing evidence — presenting from screenshots, $0 ongoing</a:t>
+            </a:r>
+            <a:endParaRPr lang="en-US" sz="1500" dirty="0"/>
+          </a:p>
+        </p:txBody>
+      </p:sp>
+      <p:sp>
+        <p:nvSpPr>
+          <p:cNvPr id="18" name="Text 16"/>
+          <p:cNvSpPr/>
+          <p:nvPr/>
+        </p:nvSpPr>
+        <p:spPr>
+          <a:xfrm>
+            <a:off x="640080" y="6446520"/>
+            <a:ext cx="7315200" cy="274320"/>
+          </a:xfrm>
+          <a:prstGeom prst="rect">
+            <a:avLst/>
+          </a:prstGeom>
+          <a:noFill/>
+          <a:ln/>
+        </p:spPr>
+        <p:txBody>
+          <a:bodyPr wrap="square" rtlCol="0" anchor="ctr"/>
+          <a:lstStyle/>
+          <a:p>
+            <a:pPr indent="0" marL="0">
+              <a:buNone/>
+            </a:pPr>
+            <a:r>
+              <a:rPr lang="en-US" sz="1000" dirty="0">
+                <a:solidFill>
+                  <a:srgbClr val="8A94A3"/>
+                </a:solidFill>
+                <a:latin typeface="Arial" pitchFamily="34" charset="0"/>
+                <a:ea typeface="Arial" pitchFamily="34" charset="-122"/>
+                <a:cs typeface="Arial" pitchFamily="34" charset="-120"/>
+              </a:rPr>
+              <a:t>on-demand, us-east-1</a:t>
+            </a:r>
+            <a:endParaRPr lang="en-US" sz="1000" dirty="0"/>
+          </a:p>
+        </p:txBody>
+      </p:sp>
+      <p:sp>
+        <p:nvSpPr>
+          <p:cNvPr id="19" name="Text 17"/>
+          <p:cNvSpPr/>
+          <p:nvPr/>
+        </p:nvSpPr>
+        <p:spPr>
+          <a:xfrm>
+            <a:off x="7772400" y="6446520"/>
+            <a:ext cx="3749040" cy="274320"/>
+          </a:xfrm>
+          <a:prstGeom prst="rect">
+            <a:avLst/>
+          </a:prstGeom>
+          <a:noFill/>
+          <a:ln/>
+        </p:spPr>
+        <p:txBody>
+          <a:bodyPr wrap="square" rtlCol="0" anchor="ctr"/>
+          <a:lstStyle/>
+          <a:p>
+            <a:pPr algn="r" indent="0" marL="0">
+              <a:buNone/>
+            </a:pPr>
+            <a:r>
+              <a:rPr lang="en-US" sz="1000" dirty="0">
+                <a:solidFill>
+                  <a:srgbClr val="8A94A3"/>
+                </a:solidFill>
+                <a:latin typeface="Arial" pitchFamily="34" charset="0"/>
+                <a:ea typeface="Arial" pitchFamily="34" charset="-122"/>
+                <a:cs typeface="Arial" pitchFamily="34" charset="-120"/>
+              </a:rPr>
+              <a:t>COSTS.md</a:t>
+            </a:r>
+            <a:endParaRPr lang="en-US" sz="1000" dirty="0"/>
           </a:p>
         </p:txBody>
       </p:sp>
@@ -1823,7 +6817,7 @@
         </p:nvSpPr>
         <p:spPr>
           <a:xfrm>
-            <a:off x="640080" y="457200"/>
+            <a:off x="640080" y="384048"/>
             <a:ext cx="10972800" cy="274320"/>
           </a:xfrm>
           <a:prstGeom prst="rect">
@@ -1862,8 +6856,8 @@
         </p:nvSpPr>
         <p:spPr>
           <a:xfrm>
-            <a:off x="640080" y="731520"/>
-            <a:ext cx="10972800" cy="822960"/>
+            <a:off x="640080" y="676656"/>
+            <a:ext cx="10972800" cy="731520"/>
           </a:xfrm>
           <a:prstGeom prst="rect">
             <a:avLst/>
@@ -1879,7 +6873,7 @@
               <a:buNone/>
             </a:pPr>
             <a:r>
-              <a:rPr lang="en-US" sz="3000" b="1" dirty="0">
+              <a:rPr lang="en-US" sz="2700" b="1" dirty="0">
                 <a:solidFill>
                   <a:srgbClr val="0F172A"/>
                 </a:solidFill>
@@ -1889,113 +6883,95 @@
               </a:rPr>
               <a:t>Architecture at a glance</a:t>
             </a:r>
-            <a:endParaRPr lang="en-US" sz="3000" dirty="0"/>
-          </a:p>
-        </p:txBody>
-      </p:sp>
-      <p:sp>
-        <p:nvSpPr>
-          <p:cNvPr id="5" name="Shape 3"/>
-          <p:cNvSpPr/>
-          <p:nvPr/>
-        </p:nvSpPr>
-        <p:spPr>
-          <a:xfrm>
-            <a:off x="4937760" y="1417320"/>
-            <a:ext cx="2286000" cy="457200"/>
-          </a:xfrm>
-          <a:prstGeom prst="roundRect">
-            <a:avLst>
-              <a:gd name="adj" fmla="val 50000"/>
-            </a:avLst>
+            <a:endParaRPr lang="en-US" sz="2700" dirty="0"/>
+          </a:p>
+        </p:txBody>
+      </p:sp>
+      <p:pic>
+        <p:nvPicPr>
+          <p:cNvPr id="5" name="Image 0" descr="C:/Users/beite/Desktop/IRONHACK/Cloud Engineering/week3/project-1-3-tier-cloud-architecture/architecture/architecture-diagram.png">    </p:cNvPr>
+          <p:cNvPicPr>
+            <a:picLocks noChangeAspect="1"/>
+          </p:cNvPicPr>
+          <p:nvPr/>
+        </p:nvPicPr>
+        <p:blipFill>
+          <a:blip r:embed="rId1"/>
+          <a:srcRect l="0" r="0" t="0" b="0"/>
+          <a:stretch/>
+        </p:blipFill>
+        <p:spPr>
+          <a:xfrm>
+            <a:off x="640080" y="1371600"/>
+            <a:ext cx="10881360" cy="4937760"/>
+          </a:xfrm>
+          <a:prstGeom prst="rect">
+            <a:avLst/>
+          </a:prstGeom>
+        </p:spPr>
+      </p:pic>
+    </p:spTree>
+  </p:cSld>
+  <p:clrMapOvr>
+    <a:masterClrMapping/>
+  </p:clrMapOvr>
+</p:sld>
+</file>
+
+<file path=ppt/slides/slide20.xml><?xml version="1.0" encoding="utf-8"?>
+<p:sld xmlns:a="http://schemas.openxmlformats.org/drawingml/2006/main" xmlns:r="http://schemas.openxmlformats.org/officeDocument/2006/relationships" xmlns:p="http://schemas.openxmlformats.org/presentationml/2006/main">
+  <p:cSld name="Slide 20">
+    <p:bg>
+      <p:bgPr>
+        <a:solidFill>
+          <a:srgbClr val="FFFFFF"/>
+        </a:solidFill>
+      </p:bgPr>
+    </p:bg>
+    <p:spTree>
+      <p:nvGrpSpPr>
+        <p:cNvPr id="1" name=""/>
+        <p:cNvGrpSpPr/>
+        <p:nvPr/>
+      </p:nvGrpSpPr>
+      <p:grpSpPr>
+        <a:xfrm>
+          <a:off x="0" y="0"/>
+          <a:ext cx="0" cy="0"/>
+          <a:chOff x="0" y="0"/>
+          <a:chExt cx="0" cy="0"/>
+        </a:xfrm>
+      </p:grpSpPr>
+      <p:sp>
+        <p:nvSpPr>
+          <p:cNvPr id="2" name="Shape 0"/>
+          <p:cNvSpPr/>
+          <p:nvPr/>
+        </p:nvSpPr>
+        <p:spPr>
+          <a:xfrm>
+            <a:off x="0" y="0"/>
+            <a:ext cx="256032" cy="6858000"/>
+          </a:xfrm>
+          <a:prstGeom prst="rect">
+            <a:avLst/>
           </a:prstGeom>
           <a:solidFill>
-            <a:srgbClr val="F6F7F9"/>
+            <a:srgbClr val="3B5BDB"/>
           </a:solidFill>
-          <a:ln w="12700">
-            <a:solidFill>
-              <a:srgbClr val="DBE1EA"/>
-            </a:solidFill>
-            <a:prstDash val="solid"/>
-          </a:ln>
-        </p:spPr>
-      </p:sp>
-      <p:sp>
-        <p:nvSpPr>
-          <p:cNvPr id="6" name="Text 4"/>
-          <p:cNvSpPr/>
-          <p:nvPr/>
-        </p:nvSpPr>
-        <p:spPr>
-          <a:xfrm>
-            <a:off x="4937760" y="1417320"/>
-            <a:ext cx="2286000" cy="457200"/>
-          </a:xfrm>
-          <a:prstGeom prst="rect">
-            <a:avLst/>
-          </a:prstGeom>
-          <a:noFill/>
-          <a:ln/>
-        </p:spPr>
-        <p:txBody>
-          <a:bodyPr wrap="square" rtlCol="0" anchor="ctr"/>
-          <a:lstStyle/>
-          <a:p>
-            <a:pPr algn="ctr" indent="0" marL="0">
-              <a:buNone/>
-            </a:pPr>
-            <a:r>
-              <a:rPr lang="en-US" sz="1100" dirty="0">
-                <a:solidFill>
-                  <a:srgbClr val="5B6675"/>
-                </a:solidFill>
-                <a:latin typeface="Arial" pitchFamily="34" charset="0"/>
-                <a:ea typeface="Arial" pitchFamily="34" charset="-122"/>
-                <a:cs typeface="Arial" pitchFamily="34" charset="-120"/>
-              </a:rPr>
-              <a:t>Internet  (0.0.0.0/0)</a:t>
-            </a:r>
-            <a:endParaRPr lang="en-US" sz="1100" dirty="0"/>
-          </a:p>
-        </p:txBody>
-      </p:sp>
-      <p:sp>
-        <p:nvSpPr>
-          <p:cNvPr id="7" name="Shape 5"/>
-          <p:cNvSpPr/>
-          <p:nvPr/>
-        </p:nvSpPr>
-        <p:spPr>
-          <a:xfrm>
-            <a:off x="640080" y="2468880"/>
-            <a:ext cx="10881360" cy="3657600"/>
-          </a:xfrm>
-          <a:prstGeom prst="roundRect">
-            <a:avLst>
-              <a:gd name="adj" fmla="val 1000"/>
-            </a:avLst>
-          </a:prstGeom>
-          <a:solidFill>
-            <a:srgbClr val="FFFFFF"/>
-          </a:solidFill>
-          <a:ln w="19050">
-            <a:solidFill>
-              <a:srgbClr val="3B5BDB"/>
-            </a:solidFill>
-            <a:prstDash val="solid"/>
-          </a:ln>
-        </p:spPr>
-      </p:sp>
-      <p:sp>
-        <p:nvSpPr>
-          <p:cNvPr id="8" name="Text 6"/>
-          <p:cNvSpPr/>
-          <p:nvPr/>
-        </p:nvSpPr>
-        <p:spPr>
-          <a:xfrm>
-            <a:off x="822960" y="2542032"/>
-            <a:ext cx="4572000" cy="274320"/>
+          <a:ln/>
+        </p:spPr>
+      </p:sp>
+      <p:sp>
+        <p:nvSpPr>
+          <p:cNvPr id="3" name="Text 1"/>
+          <p:cNvSpPr/>
+          <p:nvPr/>
+        </p:nvSpPr>
+        <p:spPr>
+          <a:xfrm>
+            <a:off x="640080" y="384048"/>
+            <a:ext cx="10972800" cy="274320"/>
           </a:xfrm>
           <a:prstGeom prst="rect">
             <a:avLst/>
@@ -2011,7 +6987,7 @@
               <a:buNone/>
             </a:pPr>
             <a:r>
-              <a:rPr lang="en-US" sz="1100" b="1" dirty="0">
+              <a:rPr lang="en-US" sz="1200" b="1" spc="200" kern="0" dirty="0">
                 <a:solidFill>
                   <a:srgbClr val="3B5BDB"/>
                 </a:solidFill>
@@ -2019,165 +6995,7 @@
                 <a:ea typeface="Arial" pitchFamily="34" charset="-122"/>
                 <a:cs typeface="Arial" pitchFamily="34" charset="-120"/>
               </a:rPr>
-              <a:t>VPC · 10.0.0.0/16</a:t>
-            </a:r>
-            <a:endParaRPr lang="en-US" sz="1100" dirty="0"/>
-          </a:p>
-        </p:txBody>
-      </p:sp>
-      <p:sp>
-        <p:nvSpPr>
-          <p:cNvPr id="9" name="Text 7"/>
-          <p:cNvSpPr/>
-          <p:nvPr/>
-        </p:nvSpPr>
-        <p:spPr>
-          <a:xfrm>
-            <a:off x="914400" y="2880360"/>
-            <a:ext cx="4846320" cy="274320"/>
-          </a:xfrm>
-          <a:prstGeom prst="rect">
-            <a:avLst/>
-          </a:prstGeom>
-          <a:noFill/>
-          <a:ln/>
-        </p:spPr>
-        <p:txBody>
-          <a:bodyPr wrap="square" rtlCol="0" anchor="ctr"/>
-          <a:lstStyle/>
-          <a:p>
-            <a:pPr algn="ctr" indent="0" marL="0">
-              <a:buNone/>
-            </a:pPr>
-            <a:r>
-              <a:rPr lang="en-US" sz="1000" dirty="0">
-                <a:solidFill>
-                  <a:srgbClr val="5B6675"/>
-                </a:solidFill>
-                <a:latin typeface="Arial" pitchFamily="34" charset="0"/>
-                <a:ea typeface="Arial" pitchFamily="34" charset="-122"/>
-                <a:cs typeface="Arial" pitchFamily="34" charset="-120"/>
-              </a:rPr>
-              <a:t>Availability Zone · us-east-1a</a:t>
-            </a:r>
-            <a:endParaRPr lang="en-US" sz="1000" dirty="0"/>
-          </a:p>
-        </p:txBody>
-      </p:sp>
-      <p:sp>
-        <p:nvSpPr>
-          <p:cNvPr id="10" name="Text 8"/>
-          <p:cNvSpPr/>
-          <p:nvPr/>
-        </p:nvSpPr>
-        <p:spPr>
-          <a:xfrm>
-            <a:off x="6400800" y="2880360"/>
-            <a:ext cx="4846320" cy="274320"/>
-          </a:xfrm>
-          <a:prstGeom prst="rect">
-            <a:avLst/>
-          </a:prstGeom>
-          <a:noFill/>
-          <a:ln/>
-        </p:spPr>
-        <p:txBody>
-          <a:bodyPr wrap="square" rtlCol="0" anchor="ctr"/>
-          <a:lstStyle/>
-          <a:p>
-            <a:pPr algn="ctr" indent="0" marL="0">
-              <a:buNone/>
-            </a:pPr>
-            <a:r>
-              <a:rPr lang="en-US" sz="1000" dirty="0">
-                <a:solidFill>
-                  <a:srgbClr val="5B6675"/>
-                </a:solidFill>
-                <a:latin typeface="Arial" pitchFamily="34" charset="0"/>
-                <a:ea typeface="Arial" pitchFamily="34" charset="-122"/>
-                <a:cs typeface="Arial" pitchFamily="34" charset="-120"/>
-              </a:rPr>
-              <a:t>Availability Zone · us-east-1b</a:t>
-            </a:r>
-            <a:endParaRPr lang="en-US" sz="1000" dirty="0"/>
-          </a:p>
-        </p:txBody>
-      </p:sp>
-      <p:sp>
-        <p:nvSpPr>
-          <p:cNvPr id="11" name="Shape 9"/>
-          <p:cNvSpPr/>
-          <p:nvPr/>
-        </p:nvSpPr>
-        <p:spPr>
-          <a:xfrm>
-            <a:off x="914400" y="3200400"/>
-            <a:ext cx="7680960" cy="621792"/>
-          </a:xfrm>
-          <a:prstGeom prst="roundRect">
-            <a:avLst>
-              <a:gd name="adj" fmla="val 8824"/>
-            </a:avLst>
-          </a:prstGeom>
-          <a:solidFill>
-            <a:srgbClr val="F0F7FB"/>
-          </a:solidFill>
-          <a:ln w="19050">
-            <a:solidFill>
-              <a:srgbClr val="0369A1"/>
-            </a:solidFill>
-            <a:prstDash val="solid"/>
-          </a:ln>
-        </p:spPr>
-      </p:sp>
-      <p:sp>
-        <p:nvSpPr>
-          <p:cNvPr id="12" name="Text 10"/>
-          <p:cNvSpPr/>
-          <p:nvPr/>
-        </p:nvSpPr>
-        <p:spPr>
-          <a:xfrm>
-            <a:off x="914400" y="3200400"/>
-            <a:ext cx="7680960" cy="621792"/>
-          </a:xfrm>
-          <a:prstGeom prst="rect">
-            <a:avLst/>
-          </a:prstGeom>
-          <a:noFill/>
-          <a:ln/>
-        </p:spPr>
-        <p:txBody>
-          <a:bodyPr wrap="square" rtlCol="0" anchor="ctr"/>
-          <a:lstStyle/>
-          <a:p>
-            <a:pPr algn="ctr" indent="0" marL="0">
-              <a:buNone/>
-            </a:pPr>
-            <a:r>
-              <a:rPr lang="en-US" sz="1200" b="1" dirty="0">
-                <a:solidFill>
-                  <a:srgbClr val="0369A1"/>
-                </a:solidFill>
-                <a:latin typeface="Arial" pitchFamily="34" charset="0"/>
-                <a:ea typeface="Arial" pitchFamily="34" charset="-122"/>
-                <a:cs typeface="Arial" pitchFamily="34" charset="-120"/>
-              </a:rPr>
-              <a:t>Application Load Balancer</a:t>
-            </a:r>
-            <a:pPr algn="ctr" indent="0" marL="0">
-              <a:buNone/>
-            </a:pPr>
-            <a:r>
-              <a:rPr lang="en-US" sz="950" dirty="0">
-                <a:solidFill>
-                  <a:srgbClr val="5B6675"/>
-                </a:solidFill>
-                <a:latin typeface="Arial" pitchFamily="34" charset="0"/>
-                <a:ea typeface="Arial" pitchFamily="34" charset="-122"/>
-                <a:cs typeface="Arial" pitchFamily="34" charset="-120"/>
-              </a:rPr>
-              <a:t>   internet-facing · listener :80 (HTTP) · /health</a:t>
+              <a:t>CHALLENGES &amp; SOLUTIONS</a:t>
             </a:r>
             <a:endParaRPr lang="en-US" sz="1200" dirty="0"/>
           </a:p>
@@ -2185,468 +7003,14 @@
       </p:sp>
       <p:sp>
         <p:nvSpPr>
-          <p:cNvPr id="13" name="Shape 11"/>
-          <p:cNvSpPr/>
-          <p:nvPr/>
-        </p:nvSpPr>
-        <p:spPr>
-          <a:xfrm>
-            <a:off x="8778240" y="3200400"/>
-            <a:ext cx="2468880" cy="621792"/>
-          </a:xfrm>
-          <a:prstGeom prst="roundRect">
-            <a:avLst>
-              <a:gd name="adj" fmla="val 8824"/>
-            </a:avLst>
-          </a:prstGeom>
-          <a:solidFill>
-            <a:srgbClr val="F0F7FB"/>
-          </a:solidFill>
-          <a:ln w="19050">
-            <a:solidFill>
-              <a:srgbClr val="0369A1"/>
-            </a:solidFill>
-            <a:prstDash val="solid"/>
-          </a:ln>
-        </p:spPr>
-      </p:sp>
-      <p:sp>
-        <p:nvSpPr>
-          <p:cNvPr id="14" name="Text 12"/>
-          <p:cNvSpPr/>
-          <p:nvPr/>
-        </p:nvSpPr>
-        <p:spPr>
-          <a:xfrm>
-            <a:off x="8778240" y="3200400"/>
-            <a:ext cx="2468880" cy="621792"/>
-          </a:xfrm>
-          <a:prstGeom prst="rect">
-            <a:avLst/>
-          </a:prstGeom>
-          <a:noFill/>
-          <a:ln/>
-        </p:spPr>
-        <p:txBody>
-          <a:bodyPr wrap="square" rtlCol="0" anchor="ctr"/>
-          <a:lstStyle/>
-          <a:p>
-            <a:pPr algn="ctr" indent="0" marL="0">
-              <a:buNone/>
-            </a:pPr>
-            <a:r>
-              <a:rPr lang="en-US" sz="1250" b="1" dirty="0">
-                <a:solidFill>
-                  <a:srgbClr val="0369A1"/>
-                </a:solidFill>
-                <a:latin typeface="Arial" pitchFamily="34" charset="0"/>
-                <a:ea typeface="Arial" pitchFamily="34" charset="-122"/>
-                <a:cs typeface="Arial" pitchFamily="34" charset="-120"/>
-              </a:rPr>
-              <a:t>NAT Gateway</a:t>
-            </a:r>
-            <a:pPr algn="ctr" indent="0" marL="0">
-              <a:buNone/>
-            </a:pPr>
-            <a:endParaRPr lang="en-US" sz="1250" dirty="0"/>
-          </a:p>
-          <a:p>
-            <a:pPr algn="ctr" indent="0" marL="0">
-              <a:buNone/>
-            </a:pPr>
-            <a:r>
-              <a:rPr lang="en-US" sz="900" dirty="0">
-                <a:solidFill>
-                  <a:srgbClr val="5B6675"/>
-                </a:solidFill>
-                <a:latin typeface="Arial" pitchFamily="34" charset="0"/>
-                <a:ea typeface="Arial" pitchFamily="34" charset="-122"/>
-                <a:cs typeface="Arial" pitchFamily="34" charset="-120"/>
-              </a:rPr>
-              <a:t>outbound only · EIP 3.219.62.36</a:t>
-            </a:r>
-            <a:endParaRPr lang="en-US" sz="1250" dirty="0"/>
-          </a:p>
-        </p:txBody>
-      </p:sp>
-      <p:sp>
-        <p:nvSpPr>
-          <p:cNvPr id="15" name="Shape 13"/>
-          <p:cNvSpPr/>
-          <p:nvPr/>
-        </p:nvSpPr>
-        <p:spPr>
-          <a:xfrm>
-            <a:off x="914400" y="4160520"/>
-            <a:ext cx="4846320" cy="658368"/>
-          </a:xfrm>
-          <a:prstGeom prst="roundRect">
-            <a:avLst>
-              <a:gd name="adj" fmla="val 8333"/>
-            </a:avLst>
-          </a:prstGeom>
-          <a:solidFill>
-            <a:srgbClr val="F2FBF9"/>
-          </a:solidFill>
-          <a:ln w="19050">
-            <a:solidFill>
-              <a:srgbClr val="0E7C72"/>
-            </a:solidFill>
-            <a:prstDash val="solid"/>
-          </a:ln>
-        </p:spPr>
-      </p:sp>
-      <p:sp>
-        <p:nvSpPr>
-          <p:cNvPr id="16" name="Text 14"/>
-          <p:cNvSpPr/>
-          <p:nvPr/>
-        </p:nvSpPr>
-        <p:spPr>
-          <a:xfrm>
-            <a:off x="914400" y="4160520"/>
-            <a:ext cx="4846320" cy="658368"/>
-          </a:xfrm>
-          <a:prstGeom prst="rect">
-            <a:avLst/>
-          </a:prstGeom>
-          <a:noFill/>
-          <a:ln/>
-        </p:spPr>
-        <p:txBody>
-          <a:bodyPr wrap="square" rtlCol="0" anchor="ctr"/>
-          <a:lstStyle/>
-          <a:p>
-            <a:pPr algn="ctr" indent="0" marL="0">
-              <a:buNone/>
-            </a:pPr>
-            <a:r>
-              <a:rPr lang="en-US" sz="1250" b="1" dirty="0">
-                <a:solidFill>
-                  <a:srgbClr val="0E7C72"/>
-                </a:solidFill>
-                <a:latin typeface="Arial" pitchFamily="34" charset="0"/>
-                <a:ea typeface="Arial" pitchFamily="34" charset="-122"/>
-                <a:cs typeface="Arial" pitchFamily="34" charset="-120"/>
-              </a:rPr>
-              <a:t>App EC2 ×2  ·  private-subnet-1a</a:t>
-            </a:r>
-            <a:pPr algn="ctr" indent="0" marL="0">
-              <a:buNone/>
-            </a:pPr>
-            <a:endParaRPr lang="en-US" sz="1250" dirty="0"/>
-          </a:p>
-          <a:p>
-            <a:pPr algn="ctr" indent="0" marL="0">
-              <a:buNone/>
-            </a:pPr>
-            <a:r>
-              <a:rPr lang="en-US" sz="900" dirty="0">
-                <a:solidFill>
-                  <a:srgbClr val="5B6675"/>
-                </a:solidFill>
-                <a:latin typeface="Arial" pitchFamily="34" charset="0"/>
-                <a:ea typeface="Arial" pitchFamily="34" charset="-122"/>
-                <a:cs typeface="Arial" pitchFamily="34" charset="-120"/>
-              </a:rPr>
-              <a:t>no public IP · ALB target group</a:t>
-            </a:r>
-            <a:endParaRPr lang="en-US" sz="1250" dirty="0"/>
-          </a:p>
-        </p:txBody>
-      </p:sp>
-      <p:sp>
-        <p:nvSpPr>
-          <p:cNvPr id="17" name="Shape 15"/>
-          <p:cNvSpPr/>
-          <p:nvPr/>
-        </p:nvSpPr>
-        <p:spPr>
-          <a:xfrm>
-            <a:off x="6400800" y="4160520"/>
-            <a:ext cx="4846320" cy="658368"/>
-          </a:xfrm>
-          <a:prstGeom prst="roundRect">
-            <a:avLst>
-              <a:gd name="adj" fmla="val 8333"/>
-            </a:avLst>
-          </a:prstGeom>
-          <a:solidFill>
-            <a:srgbClr val="F2FBF9"/>
-          </a:solidFill>
-          <a:ln w="19050">
-            <a:solidFill>
-              <a:srgbClr val="0E7C72"/>
-            </a:solidFill>
-            <a:prstDash val="solid"/>
-          </a:ln>
-        </p:spPr>
-      </p:sp>
-      <p:sp>
-        <p:nvSpPr>
-          <p:cNvPr id="18" name="Text 16"/>
-          <p:cNvSpPr/>
-          <p:nvPr/>
-        </p:nvSpPr>
-        <p:spPr>
-          <a:xfrm>
-            <a:off x="6400800" y="4160520"/>
-            <a:ext cx="4846320" cy="658368"/>
-          </a:xfrm>
-          <a:prstGeom prst="rect">
-            <a:avLst/>
-          </a:prstGeom>
-          <a:noFill/>
-          <a:ln/>
-        </p:spPr>
-        <p:txBody>
-          <a:bodyPr wrap="square" rtlCol="0" anchor="ctr"/>
-          <a:lstStyle/>
-          <a:p>
-            <a:pPr algn="ctr" indent="0" marL="0">
-              <a:buNone/>
-            </a:pPr>
-            <a:r>
-              <a:rPr lang="en-US" sz="1250" b="1" dirty="0">
-                <a:solidFill>
-                  <a:srgbClr val="0E7C72"/>
-                </a:solidFill>
-                <a:latin typeface="Arial" pitchFamily="34" charset="0"/>
-                <a:ea typeface="Arial" pitchFamily="34" charset="-122"/>
-                <a:cs typeface="Arial" pitchFamily="34" charset="-120"/>
-              </a:rPr>
-              <a:t>App EC2 ×1  ·  private-subnet-1b</a:t>
-            </a:r>
-            <a:pPr algn="ctr" indent="0" marL="0">
-              <a:buNone/>
-            </a:pPr>
-            <a:endParaRPr lang="en-US" sz="1250" dirty="0"/>
-          </a:p>
-          <a:p>
-            <a:pPr algn="ctr" indent="0" marL="0">
-              <a:buNone/>
-            </a:pPr>
-            <a:r>
-              <a:rPr lang="en-US" sz="900" dirty="0">
-                <a:solidFill>
-                  <a:srgbClr val="5B6675"/>
-                </a:solidFill>
-                <a:latin typeface="Arial" pitchFamily="34" charset="0"/>
-                <a:ea typeface="Arial" pitchFamily="34" charset="-122"/>
-                <a:cs typeface="Arial" pitchFamily="34" charset="-120"/>
-              </a:rPr>
-              <a:t>no public IP · ALB target group</a:t>
-            </a:r>
-            <a:endParaRPr lang="en-US" sz="1250" dirty="0"/>
-          </a:p>
-        </p:txBody>
-      </p:sp>
-      <p:sp>
-        <p:nvSpPr>
-          <p:cNvPr id="19" name="Shape 17"/>
-          <p:cNvSpPr/>
-          <p:nvPr/>
-        </p:nvSpPr>
-        <p:spPr>
-          <a:xfrm>
-            <a:off x="914400" y="5138928"/>
-            <a:ext cx="4846320" cy="658368"/>
-          </a:xfrm>
-          <a:prstGeom prst="roundRect">
-            <a:avLst>
-              <a:gd name="adj" fmla="val 8333"/>
-            </a:avLst>
-          </a:prstGeom>
-          <a:solidFill>
-            <a:srgbClr val="F8F6FF"/>
-          </a:solidFill>
-          <a:ln w="19050">
-            <a:solidFill>
-              <a:srgbClr val="6D28D9"/>
-            </a:solidFill>
-            <a:prstDash val="solid"/>
-          </a:ln>
-        </p:spPr>
-      </p:sp>
-      <p:sp>
-        <p:nvSpPr>
-          <p:cNvPr id="20" name="Text 18"/>
-          <p:cNvSpPr/>
-          <p:nvPr/>
-        </p:nvSpPr>
-        <p:spPr>
-          <a:xfrm>
-            <a:off x="914400" y="5138928"/>
-            <a:ext cx="4846320" cy="658368"/>
-          </a:xfrm>
-          <a:prstGeom prst="rect">
-            <a:avLst/>
-          </a:prstGeom>
-          <a:noFill/>
-          <a:ln/>
-        </p:spPr>
-        <p:txBody>
-          <a:bodyPr wrap="square" rtlCol="0" anchor="ctr"/>
-          <a:lstStyle/>
-          <a:p>
-            <a:pPr algn="ctr" indent="0" marL="0">
-              <a:buNone/>
-            </a:pPr>
-            <a:r>
-              <a:rPr lang="en-US" sz="1250" b="1" dirty="0">
-                <a:solidFill>
-                  <a:srgbClr val="6D28D9"/>
-                </a:solidFill>
-                <a:latin typeface="Arial" pitchFamily="34" charset="0"/>
-                <a:ea typeface="Arial" pitchFamily="34" charset="-122"/>
-                <a:cs typeface="Arial" pitchFamily="34" charset="-120"/>
-              </a:rPr>
-              <a:t>Data DB primary  ·  data-subnet-1a</a:t>
-            </a:r>
-            <a:pPr algn="ctr" indent="0" marL="0">
-              <a:buNone/>
-            </a:pPr>
-            <a:endParaRPr lang="en-US" sz="1250" dirty="0"/>
-          </a:p>
-          <a:p>
-            <a:pPr algn="ctr" indent="0" marL="0">
-              <a:buNone/>
-            </a:pPr>
-            <a:r>
-              <a:rPr lang="en-US" sz="900" dirty="0">
-                <a:solidFill>
-                  <a:srgbClr val="5B6675"/>
-                </a:solidFill>
-                <a:latin typeface="Arial" pitchFamily="34" charset="0"/>
-                <a:ea typeface="Arial" pitchFamily="34" charset="-122"/>
-                <a:cs typeface="Arial" pitchFamily="34" charset="-120"/>
-              </a:rPr>
-              <a:t>10.0.21.110:3306 · simulated · isolated</a:t>
-            </a:r>
-            <a:endParaRPr lang="en-US" sz="1250" dirty="0"/>
-          </a:p>
-        </p:txBody>
-      </p:sp>
-      <p:sp>
-        <p:nvSpPr>
-          <p:cNvPr id="21" name="Shape 19"/>
-          <p:cNvSpPr/>
-          <p:nvPr/>
-        </p:nvSpPr>
-        <p:spPr>
-          <a:xfrm>
-            <a:off x="6400800" y="5138928"/>
-            <a:ext cx="4846320" cy="658368"/>
-          </a:xfrm>
-          <a:prstGeom prst="roundRect">
-            <a:avLst>
-              <a:gd name="adj" fmla="val 8333"/>
-            </a:avLst>
-          </a:prstGeom>
-          <a:solidFill>
-            <a:srgbClr val="F8F6FF"/>
-          </a:solidFill>
-          <a:ln w="19050">
-            <a:solidFill>
-              <a:srgbClr val="6D28D9"/>
-            </a:solidFill>
-            <a:prstDash val="solid"/>
-          </a:ln>
-        </p:spPr>
-      </p:sp>
-      <p:sp>
-        <p:nvSpPr>
-          <p:cNvPr id="22" name="Text 20"/>
-          <p:cNvSpPr/>
-          <p:nvPr/>
-        </p:nvSpPr>
-        <p:spPr>
-          <a:xfrm>
-            <a:off x="6400800" y="5138928"/>
-            <a:ext cx="4846320" cy="658368"/>
-          </a:xfrm>
-          <a:prstGeom prst="rect">
-            <a:avLst/>
-          </a:prstGeom>
-          <a:noFill/>
-          <a:ln/>
-        </p:spPr>
-        <p:txBody>
-          <a:bodyPr wrap="square" rtlCol="0" anchor="ctr"/>
-          <a:lstStyle/>
-          <a:p>
-            <a:pPr algn="ctr" indent="0" marL="0">
-              <a:buNone/>
-            </a:pPr>
-            <a:r>
-              <a:rPr lang="en-US" sz="1250" b="1" dirty="0">
-                <a:solidFill>
-                  <a:srgbClr val="6D28D9"/>
-                </a:solidFill>
-                <a:latin typeface="Arial" pitchFamily="34" charset="0"/>
-                <a:ea typeface="Arial" pitchFamily="34" charset="-122"/>
-                <a:cs typeface="Arial" pitchFamily="34" charset="-120"/>
-              </a:rPr>
-              <a:t>Data DB standby  ·  data-subnet-1b</a:t>
-            </a:r>
-            <a:pPr algn="ctr" indent="0" marL="0">
-              <a:buNone/>
-            </a:pPr>
-            <a:endParaRPr lang="en-US" sz="1250" dirty="0"/>
-          </a:p>
-          <a:p>
-            <a:pPr algn="ctr" indent="0" marL="0">
-              <a:buNone/>
-            </a:pPr>
-            <a:r>
-              <a:rPr lang="en-US" sz="900" dirty="0">
-                <a:solidFill>
-                  <a:srgbClr val="5B6675"/>
-                </a:solidFill>
-                <a:latin typeface="Arial" pitchFamily="34" charset="0"/>
-                <a:ea typeface="Arial" pitchFamily="34" charset="-122"/>
-                <a:cs typeface="Arial" pitchFamily="34" charset="-120"/>
-              </a:rPr>
-              <a:t>10.0.22.147:3306 · app fails over here</a:t>
-            </a:r>
-            <a:endParaRPr lang="en-US" sz="1250" dirty="0"/>
-          </a:p>
-        </p:txBody>
-      </p:sp>
-      <p:sp>
-        <p:nvSpPr>
-          <p:cNvPr id="23" name="Shape 21"/>
-          <p:cNvSpPr/>
-          <p:nvPr/>
-        </p:nvSpPr>
-        <p:spPr>
-          <a:xfrm>
-            <a:off x="4663440" y="1874520"/>
-            <a:ext cx="0" cy="1325880"/>
-          </a:xfrm>
-          <a:prstGeom prst="line">
-            <a:avLst/>
-          </a:prstGeom>
-          <a:noFill/>
-          <a:ln w="19050">
-            <a:solidFill>
-              <a:srgbClr val="8A94A3"/>
-            </a:solidFill>
-            <a:prstDash val="solid"/>
-            <a:tailEnd type="triangle"/>
-          </a:ln>
-        </p:spPr>
-      </p:sp>
-      <p:sp>
-        <p:nvSpPr>
-          <p:cNvPr id="24" name="Text 22"/>
-          <p:cNvSpPr/>
-          <p:nvPr/>
-        </p:nvSpPr>
-        <p:spPr>
-          <a:xfrm>
-            <a:off x="4846320" y="2286000"/>
-            <a:ext cx="6400800" cy="274320"/>
+          <p:cNvPr id="4" name="Text 2"/>
+          <p:cNvSpPr/>
+          <p:nvPr/>
+        </p:nvSpPr>
+        <p:spPr>
+          <a:xfrm>
+            <a:off x="640080" y="676656"/>
+            <a:ext cx="10972800" cy="731520"/>
           </a:xfrm>
           <a:prstGeom prst="rect">
             <a:avLst/>
@@ -2662,54 +7026,136 @@
               <a:buNone/>
             </a:pPr>
             <a:r>
-              <a:rPr lang="en-US" sz="900" dirty="0">
-                <a:solidFill>
-                  <a:srgbClr val="5B6675"/>
-                </a:solidFill>
-                <a:latin typeface="Arial" pitchFamily="34" charset="0"/>
-                <a:ea typeface="Arial" pitchFamily="34" charset="-122"/>
-                <a:cs typeface="Arial" pitchFamily="34" charset="-120"/>
-              </a:rPr>
-              <a:t>via Internet Gateway  ·  :80 / :443 from 0.0.0.0/0</a:t>
-            </a:r>
-            <a:endParaRPr lang="en-US" sz="900" dirty="0"/>
-          </a:p>
-        </p:txBody>
-      </p:sp>
-      <p:sp>
-        <p:nvSpPr>
-          <p:cNvPr id="25" name="Shape 23"/>
-          <p:cNvSpPr/>
-          <p:nvPr/>
-        </p:nvSpPr>
-        <p:spPr>
-          <a:xfrm>
-            <a:off x="3291840" y="3822192"/>
-            <a:ext cx="0" cy="338328"/>
-          </a:xfrm>
-          <a:prstGeom prst="line">
-            <a:avLst/>
-          </a:prstGeom>
-          <a:noFill/>
-          <a:ln w="19050">
-            <a:solidFill>
-              <a:srgbClr val="8A94A3"/>
-            </a:solidFill>
-            <a:prstDash val="solid"/>
-            <a:tailEnd type="triangle"/>
-          </a:ln>
-        </p:spPr>
-      </p:sp>
-      <p:sp>
-        <p:nvSpPr>
-          <p:cNvPr id="26" name="Text 24"/>
-          <p:cNvSpPr/>
-          <p:nvPr/>
-        </p:nvSpPr>
-        <p:spPr>
-          <a:xfrm>
-            <a:off x="3520440" y="3840480"/>
-            <a:ext cx="5486400" cy="274320"/>
+              <a:rPr lang="en-US" sz="2700" b="1" dirty="0">
+                <a:solidFill>
+                  <a:srgbClr val="0F172A"/>
+                </a:solidFill>
+                <a:latin typeface="Arial" pitchFamily="34" charset="0"/>
+                <a:ea typeface="Arial" pitchFamily="34" charset="-122"/>
+                <a:cs typeface="Arial" pitchFamily="34" charset="-120"/>
+              </a:rPr>
+              <a:t>What broke, and how I fixed it</a:t>
+            </a:r>
+            <a:endParaRPr lang="en-US" sz="2700" dirty="0"/>
+          </a:p>
+        </p:txBody>
+      </p:sp>
+      <p:sp>
+        <p:nvSpPr>
+          <p:cNvPr id="5" name="Text 3"/>
+          <p:cNvSpPr/>
+          <p:nvPr/>
+        </p:nvSpPr>
+        <p:spPr>
+          <a:xfrm>
+            <a:off x="822960" y="1737360"/>
+            <a:ext cx="10607040" cy="3657600"/>
+          </a:xfrm>
+          <a:prstGeom prst="rect">
+            <a:avLst/>
+          </a:prstGeom>
+          <a:noFill/>
+          <a:ln/>
+        </p:spPr>
+        <p:txBody>
+          <a:bodyPr wrap="square" rtlCol="0" anchor="ctr"/>
+          <a:lstStyle/>
+          <a:p>
+            <a:pPr marL="177800" indent="-177800">
+              <a:spcAft>
+                <a:spcPts val="800"/>
+              </a:spcAft>
+              <a:buSzPct val="100000"/>
+              <a:buChar char="•"/>
+            </a:pPr>
+            <a:r>
+              <a:rPr lang="en-US" sz="1500" dirty="0">
+                <a:solidFill>
+                  <a:srgbClr val="0F172A"/>
+                </a:solidFill>
+                <a:latin typeface="Arial" pitchFamily="34" charset="0"/>
+                <a:ea typeface="Arial" pitchFamily="34" charset="-122"/>
+                <a:cs typeface="Arial" pitchFamily="34" charset="-120"/>
+              </a:rPr>
+              <a:t>Blackholed NAT route — reused VPC pointed at a deleted NAT → new NAT + EIP, repaired route</a:t>
+            </a:r>
+            <a:endParaRPr lang="en-US" sz="1500" dirty="0"/>
+          </a:p>
+          <a:p>
+            <a:pPr marL="177800" indent="-177800">
+              <a:spcAft>
+                <a:spcPts val="800"/>
+              </a:spcAft>
+              <a:buSzPct val="100000"/>
+              <a:buChar char="•"/>
+            </a:pPr>
+            <a:r>
+              <a:rPr lang="en-US" sz="1500" dirty="0">
+                <a:solidFill>
+                  <a:srgbClr val="0F172A"/>
+                </a:solidFill>
+                <a:latin typeface="Arial" pitchFamily="34" charset="0"/>
+                <a:ea typeface="Arial" pitchFamily="34" charset="-122"/>
+                <a:cs typeface="Arial" pitchFamily="34" charset="-120"/>
+              </a:rPr>
+              <a:t>Data-tier isolation — split the data subnets onto their own route table, no internet route</a:t>
+            </a:r>
+            <a:endParaRPr lang="en-US" sz="1500" dirty="0"/>
+          </a:p>
+          <a:p>
+            <a:pPr marL="177800" indent="-177800">
+              <a:spcAft>
+                <a:spcPts val="800"/>
+              </a:spcAft>
+              <a:buSzPct val="100000"/>
+              <a:buChar char="•"/>
+            </a:pPr>
+            <a:r>
+              <a:rPr lang="en-US" sz="1500" dirty="0">
+                <a:solidFill>
+                  <a:srgbClr val="0F172A"/>
+                </a:solidFill>
+                <a:latin typeface="Arial" pitchFamily="34" charset="0"/>
+                <a:ea typeface="Arial" pitchFamily="34" charset="-122"/>
+                <a:cs typeface="Arial" pitchFamily="34" charset="-120"/>
+              </a:rPr>
+              <a:t>Idle scale-in dropped below 3 — raised the ASG floor to min 3 to hold the HA baseline</a:t>
+            </a:r>
+            <a:endParaRPr lang="en-US" sz="1500" dirty="0"/>
+          </a:p>
+          <a:p>
+            <a:pPr marL="177800" indent="-177800">
+              <a:spcAft>
+                <a:spcPts val="800"/>
+              </a:spcAft>
+              <a:buSzPct val="100000"/>
+              <a:buChar char="•"/>
+            </a:pPr>
+            <a:r>
+              <a:rPr lang="en-US" sz="1500" dirty="0">
+                <a:solidFill>
+                  <a:srgbClr val="0F172A"/>
+                </a:solidFill>
+                <a:latin typeface="Arial" pitchFamily="34" charset="0"/>
+                <a:ea typeface="Arial" pitchFamily="34" charset="-122"/>
+                <a:cs typeface="Arial" pitchFamily="34" charset="-120"/>
+              </a:rPr>
+              <a:t>Testing private hosts — used SSM (no SSH, no bastion); Git Bash path gotcha → MSYS_NO_PATHCONV</a:t>
+            </a:r>
+            <a:endParaRPr lang="en-US" sz="1500" dirty="0"/>
+          </a:p>
+        </p:txBody>
+      </p:sp>
+      <p:sp>
+        <p:nvSpPr>
+          <p:cNvPr id="6" name="Text 4"/>
+          <p:cNvSpPr/>
+          <p:nvPr/>
+        </p:nvSpPr>
+        <p:spPr>
+          <a:xfrm>
+            <a:off x="640080" y="6446520"/>
+            <a:ext cx="7315200" cy="274320"/>
           </a:xfrm>
           <a:prstGeom prst="rect">
             <a:avLst/>
@@ -2724,55 +7170,72 @@
             <a:pPr indent="0" marL="0">
               <a:buNone/>
             </a:pPr>
-            <a:r>
-              <a:rPr lang="en-US" sz="900" b="1" dirty="0">
-                <a:solidFill>
-                  <a:srgbClr val="0E7C72"/>
-                </a:solidFill>
-                <a:latin typeface="Arial" pitchFamily="34" charset="0"/>
-                <a:ea typeface="Arial" pitchFamily="34" charset="-122"/>
-                <a:cs typeface="Arial" pitchFamily="34" charset="-120"/>
-              </a:rPr>
-              <a:t>ALB SG  ─▶  App SG   :80 (HTTP)</a:t>
-            </a:r>
-            <a:endParaRPr lang="en-US" sz="900" dirty="0"/>
-          </a:p>
-        </p:txBody>
-      </p:sp>
-      <p:sp>
-        <p:nvSpPr>
-          <p:cNvPr id="27" name="Shape 25"/>
-          <p:cNvSpPr/>
-          <p:nvPr/>
-        </p:nvSpPr>
-        <p:spPr>
-          <a:xfrm>
-            <a:off x="3291840" y="4818888"/>
-            <a:ext cx="0" cy="320040"/>
-          </a:xfrm>
-          <a:prstGeom prst="line">
-            <a:avLst/>
-          </a:prstGeom>
-          <a:noFill/>
-          <a:ln w="19050">
-            <a:solidFill>
-              <a:srgbClr val="8A94A3"/>
-            </a:solidFill>
-            <a:prstDash val="solid"/>
-            <a:tailEnd type="triangle"/>
-          </a:ln>
-        </p:spPr>
-      </p:sp>
-      <p:sp>
-        <p:nvSpPr>
-          <p:cNvPr id="28" name="Text 26"/>
-          <p:cNvSpPr/>
-          <p:nvPr/>
-        </p:nvSpPr>
-        <p:spPr>
-          <a:xfrm>
-            <a:off x="3520440" y="4837176"/>
-            <a:ext cx="5486400" cy="274320"/>
+            <a:endParaRPr lang="en-US" sz="1000" dirty="0"/>
+          </a:p>
+        </p:txBody>
+      </p:sp>
+    </p:spTree>
+  </p:cSld>
+  <p:clrMapOvr>
+    <a:masterClrMapping/>
+  </p:clrMapOvr>
+</p:sld>
+</file>
+
+<file path=ppt/slides/slide21.xml><?xml version="1.0" encoding="utf-8"?>
+<p:sld xmlns:a="http://schemas.openxmlformats.org/drawingml/2006/main" xmlns:r="http://schemas.openxmlformats.org/officeDocument/2006/relationships" xmlns:p="http://schemas.openxmlformats.org/presentationml/2006/main">
+  <p:cSld name="Slide 21">
+    <p:bg>
+      <p:bgPr>
+        <a:solidFill>
+          <a:srgbClr val="FFFFFF"/>
+        </a:solidFill>
+      </p:bgPr>
+    </p:bg>
+    <p:spTree>
+      <p:nvGrpSpPr>
+        <p:cNvPr id="1" name=""/>
+        <p:cNvGrpSpPr/>
+        <p:nvPr/>
+      </p:nvGrpSpPr>
+      <p:grpSpPr>
+        <a:xfrm>
+          <a:off x="0" y="0"/>
+          <a:ext cx="0" cy="0"/>
+          <a:chOff x="0" y="0"/>
+          <a:chExt cx="0" cy="0"/>
+        </a:xfrm>
+      </p:grpSpPr>
+      <p:sp>
+        <p:nvSpPr>
+          <p:cNvPr id="2" name="Shape 0"/>
+          <p:cNvSpPr/>
+          <p:nvPr/>
+        </p:nvSpPr>
+        <p:spPr>
+          <a:xfrm>
+            <a:off x="0" y="0"/>
+            <a:ext cx="256032" cy="6858000"/>
+          </a:xfrm>
+          <a:prstGeom prst="rect">
+            <a:avLst/>
+          </a:prstGeom>
+          <a:solidFill>
+            <a:srgbClr val="3B5BDB"/>
+          </a:solidFill>
+          <a:ln/>
+        </p:spPr>
+      </p:sp>
+      <p:sp>
+        <p:nvSpPr>
+          <p:cNvPr id="3" name="Text 1"/>
+          <p:cNvSpPr/>
+          <p:nvPr/>
+        </p:nvSpPr>
+        <p:spPr>
+          <a:xfrm>
+            <a:off x="640080" y="384048"/>
+            <a:ext cx="10972800" cy="274320"/>
           </a:xfrm>
           <a:prstGeom prst="rect">
             <a:avLst/>
@@ -2788,54 +7251,30 @@
               <a:buNone/>
             </a:pPr>
             <a:r>
-              <a:rPr lang="en-US" sz="900" b="1" dirty="0">
-                <a:solidFill>
-                  <a:srgbClr val="6D28D9"/>
-                </a:solidFill>
-                <a:latin typeface="Arial" pitchFamily="34" charset="0"/>
-                <a:ea typeface="Arial" pitchFamily="34" charset="-122"/>
-                <a:cs typeface="Arial" pitchFamily="34" charset="-120"/>
-              </a:rPr>
-              <a:t>App SG  ─▶  Data SG   :3306 / :5432</a:t>
-            </a:r>
-            <a:endParaRPr lang="en-US" sz="900" dirty="0"/>
-          </a:p>
-        </p:txBody>
-      </p:sp>
-      <p:sp>
-        <p:nvSpPr>
-          <p:cNvPr id="29" name="Shape 27"/>
-          <p:cNvSpPr/>
-          <p:nvPr/>
-        </p:nvSpPr>
-        <p:spPr>
-          <a:xfrm>
-            <a:off x="5760720" y="4297680"/>
-            <a:ext cx="3017520" cy="-685800"/>
-          </a:xfrm>
-          <a:prstGeom prst="line">
-            <a:avLst/>
-          </a:prstGeom>
-          <a:noFill/>
-          <a:ln w="19050">
-            <a:solidFill>
-              <a:srgbClr val="8A94A3"/>
-            </a:solidFill>
-            <a:prstDash val="dash"/>
-            <a:tailEnd type="triangle"/>
-          </a:ln>
-        </p:spPr>
-      </p:sp>
-      <p:sp>
-        <p:nvSpPr>
-          <p:cNvPr id="30" name="Text 28"/>
-          <p:cNvSpPr/>
-          <p:nvPr/>
-        </p:nvSpPr>
-        <p:spPr>
-          <a:xfrm>
-            <a:off x="6858000" y="3657600"/>
-            <a:ext cx="1463040" cy="274320"/>
+              <a:rPr lang="en-US" sz="1200" b="1" spc="200" kern="0" dirty="0">
+                <a:solidFill>
+                  <a:srgbClr val="3B5BDB"/>
+                </a:solidFill>
+                <a:latin typeface="Arial" pitchFamily="34" charset="0"/>
+                <a:ea typeface="Arial" pitchFamily="34" charset="-122"/>
+                <a:cs typeface="Arial" pitchFamily="34" charset="-120"/>
+              </a:rPr>
+              <a:t>IMPROVEMENTS &amp; NEXT STEPS</a:t>
+            </a:r>
+            <a:endParaRPr lang="en-US" sz="1200" dirty="0"/>
+          </a:p>
+        </p:txBody>
+      </p:sp>
+      <p:sp>
+        <p:nvSpPr>
+          <p:cNvPr id="4" name="Text 2"/>
+          <p:cNvSpPr/>
+          <p:nvPr/>
+        </p:nvSpPr>
+        <p:spPr>
+          <a:xfrm>
+            <a:off x="640080" y="676656"/>
+            <a:ext cx="10972800" cy="731520"/>
           </a:xfrm>
           <a:prstGeom prst="rect">
             <a:avLst/>
@@ -2851,30 +7290,30 @@
               <a:buNone/>
             </a:pPr>
             <a:r>
-              <a:rPr lang="en-US" sz="850" i="1" dirty="0">
-                <a:solidFill>
-                  <a:srgbClr val="8A94A3"/>
-                </a:solidFill>
-                <a:latin typeface="Arial" pitchFamily="34" charset="0"/>
-                <a:ea typeface="Arial" pitchFamily="34" charset="-122"/>
-                <a:cs typeface="Arial" pitchFamily="34" charset="-120"/>
-              </a:rPr>
-              <a:t>outbound</a:t>
-            </a:r>
-            <a:endParaRPr lang="en-US" sz="850" dirty="0"/>
-          </a:p>
-        </p:txBody>
-      </p:sp>
-      <p:sp>
-        <p:nvSpPr>
-          <p:cNvPr id="31" name="Text 29"/>
-          <p:cNvSpPr/>
-          <p:nvPr/>
-        </p:nvSpPr>
-        <p:spPr>
-          <a:xfrm>
-            <a:off x="640080" y="6400800"/>
-            <a:ext cx="7315200" cy="274320"/>
+              <a:rPr lang="en-US" sz="2700" b="1" dirty="0">
+                <a:solidFill>
+                  <a:srgbClr val="0F172A"/>
+                </a:solidFill>
+                <a:latin typeface="Arial" pitchFamily="34" charset="0"/>
+                <a:ea typeface="Arial" pitchFamily="34" charset="-122"/>
+                <a:cs typeface="Arial" pitchFamily="34" charset="-120"/>
+              </a:rPr>
+              <a:t>Path to production</a:t>
+            </a:r>
+            <a:endParaRPr lang="en-US" sz="2700" dirty="0"/>
+          </a:p>
+        </p:txBody>
+      </p:sp>
+      <p:sp>
+        <p:nvSpPr>
+          <p:cNvPr id="5" name="Text 3"/>
+          <p:cNvSpPr/>
+          <p:nvPr/>
+        </p:nvSpPr>
+        <p:spPr>
+          <a:xfrm>
+            <a:off x="822960" y="1737360"/>
+            <a:ext cx="5212080" cy="3108960"/>
           </a:xfrm>
           <a:prstGeom prst="rect">
             <a:avLst/>
@@ -2890,29 +7329,266 @@
               <a:buNone/>
             </a:pPr>
             <a:r>
-              <a:rPr lang="en-US" sz="1000" dirty="0">
-                <a:solidFill>
-                  <a:srgbClr val="8A94A3"/>
-                </a:solidFill>
-                <a:latin typeface="Arial" pitchFamily="34" charset="0"/>
-                <a:ea typeface="Arial" pitchFamily="34" charset="-122"/>
-                <a:cs typeface="Arial" pitchFamily="34" charset="-120"/>
-              </a:rPr>
-              <a:t>internet → IGW → ALB → app EC2 → data · NAT Gateway for private-subnet egress</a:t>
-            </a:r>
+              <a:rPr lang="en-US" sz="1600" b="1" dirty="0">
+                <a:solidFill>
+                  <a:srgbClr val="0F172A"/>
+                </a:solidFill>
+                <a:latin typeface="Arial" pitchFamily="34" charset="0"/>
+                <a:ea typeface="Arial" pitchFamily="34" charset="-122"/>
+                <a:cs typeface="Arial" pitchFamily="34" charset="-120"/>
+              </a:rPr>
+              <a:t>Done as bonus
+</a:t>
+            </a:r>
+            <a:endParaRPr lang="en-US" sz="1600" dirty="0"/>
+          </a:p>
+          <a:p>
+            <a:pPr marL="177800" indent="-177800">
+              <a:spcAft>
+                <a:spcPts val="800"/>
+              </a:spcAft>
+              <a:buSzPct val="100000"/>
+              <a:buChar char="•"/>
+            </a:pPr>
+            <a:r>
+              <a:rPr lang="en-US" sz="1500" dirty="0">
+                <a:solidFill>
+                  <a:srgbClr val="0F172A"/>
+                </a:solidFill>
+                <a:latin typeface="Arial" pitchFamily="34" charset="0"/>
+                <a:ea typeface="Arial" pitchFamily="34" charset="-122"/>
+                <a:cs typeface="Arial" pitchFamily="34" charset="-120"/>
+              </a:rPr>
+              <a:t>Auto Scaling Group + CPU scaling</a:t>
+            </a:r>
+            <a:endParaRPr lang="en-US" sz="1600" dirty="0"/>
+          </a:p>
+          <a:p>
+            <a:pPr marL="177800" indent="-177800">
+              <a:spcAft>
+                <a:spcPts val="800"/>
+              </a:spcAft>
+              <a:buSzPct val="100000"/>
+              <a:buChar char="•"/>
+            </a:pPr>
+            <a:r>
+              <a:rPr lang="en-US" sz="1500" dirty="0">
+                <a:solidFill>
+                  <a:srgbClr val="0F172A"/>
+                </a:solidFill>
+                <a:latin typeface="Arial" pitchFamily="34" charset="0"/>
+                <a:ea typeface="Arial" pitchFamily="34" charset="-122"/>
+                <a:cs typeface="Arial" pitchFamily="34" charset="-120"/>
+              </a:rPr>
+              <a:t>HTTPS / ACM</a:t>
+            </a:r>
+            <a:endParaRPr lang="en-US" sz="1600" dirty="0"/>
+          </a:p>
+          <a:p>
+            <a:pPr marL="177800" indent="-177800">
+              <a:spcAft>
+                <a:spcPts val="800"/>
+              </a:spcAft>
+              <a:buSzPct val="100000"/>
+              <a:buChar char="•"/>
+            </a:pPr>
+            <a:r>
+              <a:rPr lang="en-US" sz="1500" dirty="0">
+                <a:solidFill>
+                  <a:srgbClr val="0F172A"/>
+                </a:solidFill>
+                <a:latin typeface="Arial" pitchFamily="34" charset="0"/>
+                <a:ea typeface="Arial" pitchFamily="34" charset="-122"/>
+                <a:cs typeface="Arial" pitchFamily="34" charset="-120"/>
+              </a:rPr>
+              <a:t>VPC Flow Logs + alarms</a:t>
+            </a:r>
+            <a:endParaRPr lang="en-US" sz="1600" dirty="0"/>
+          </a:p>
+          <a:p>
+            <a:pPr marL="177800" indent="-177800">
+              <a:spcAft>
+                <a:spcPts val="800"/>
+              </a:spcAft>
+              <a:buSzPct val="100000"/>
+              <a:buChar char="•"/>
+            </a:pPr>
+            <a:r>
+              <a:rPr lang="en-US" sz="1500" dirty="0">
+                <a:solidFill>
+                  <a:srgbClr val="0F172A"/>
+                </a:solidFill>
+                <a:latin typeface="Arial" pitchFamily="34" charset="0"/>
+                <a:ea typeface="Arial" pitchFamily="34" charset="-122"/>
+                <a:cs typeface="Arial" pitchFamily="34" charset="-120"/>
+              </a:rPr>
+              <a:t>Multi-AZ data tier</a:t>
+            </a:r>
+            <a:endParaRPr lang="en-US" sz="1600" dirty="0"/>
+          </a:p>
+        </p:txBody>
+      </p:sp>
+      <p:sp>
+        <p:nvSpPr>
+          <p:cNvPr id="6" name="Text 4"/>
+          <p:cNvSpPr/>
+          <p:nvPr/>
+        </p:nvSpPr>
+        <p:spPr>
+          <a:xfrm>
+            <a:off x="6309360" y="1737360"/>
+            <a:ext cx="5029200" cy="3108960"/>
+          </a:xfrm>
+          <a:prstGeom prst="rect">
+            <a:avLst/>
+          </a:prstGeom>
+          <a:noFill/>
+          <a:ln/>
+        </p:spPr>
+        <p:txBody>
+          <a:bodyPr wrap="square" rtlCol="0" anchor="ctr"/>
+          <a:lstStyle/>
+          <a:p>
+            <a:pPr indent="0" marL="0">
+              <a:buNone/>
+            </a:pPr>
+            <a:r>
+              <a:rPr lang="en-US" sz="1600" b="1" dirty="0">
+                <a:solidFill>
+                  <a:srgbClr val="0F172A"/>
+                </a:solidFill>
+                <a:latin typeface="Arial" pitchFamily="34" charset="0"/>
+                <a:ea typeface="Arial" pitchFamily="34" charset="-122"/>
+                <a:cs typeface="Arial" pitchFamily="34" charset="-120"/>
+              </a:rPr>
+              <a:t>Next
+</a:t>
+            </a:r>
+            <a:endParaRPr lang="en-US" sz="1600" dirty="0"/>
+          </a:p>
+          <a:p>
+            <a:pPr marL="177800" indent="-177800">
+              <a:spcAft>
+                <a:spcPts val="800"/>
+              </a:spcAft>
+              <a:buSzPct val="100000"/>
+              <a:buChar char="•"/>
+            </a:pPr>
+            <a:r>
+              <a:rPr lang="en-US" sz="1500" dirty="0">
+                <a:solidFill>
+                  <a:srgbClr val="0F172A"/>
+                </a:solidFill>
+                <a:latin typeface="Arial" pitchFamily="34" charset="0"/>
+                <a:ea typeface="Arial" pitchFamily="34" charset="-122"/>
+                <a:cs typeface="Arial" pitchFamily="34" charset="-120"/>
+              </a:rPr>
+              <a:t>Real RDS Multi-AZ (managed)</a:t>
+            </a:r>
+            <a:endParaRPr lang="en-US" sz="1600" dirty="0"/>
+          </a:p>
+          <a:p>
+            <a:pPr marL="177800" indent="-177800">
+              <a:spcAft>
+                <a:spcPts val="800"/>
+              </a:spcAft>
+              <a:buSzPct val="100000"/>
+              <a:buChar char="•"/>
+            </a:pPr>
+            <a:r>
+              <a:rPr lang="en-US" sz="1500" dirty="0">
+                <a:solidFill>
+                  <a:srgbClr val="0F172A"/>
+                </a:solidFill>
+                <a:latin typeface="Arial" pitchFamily="34" charset="0"/>
+                <a:ea typeface="Arial" pitchFamily="34" charset="-122"/>
+                <a:cs typeface="Arial" pitchFamily="34" charset="-120"/>
+              </a:rPr>
+              <a:t>Per-AZ NAT · ACM public cert</a:t>
+            </a:r>
+            <a:endParaRPr lang="en-US" sz="1600" dirty="0"/>
+          </a:p>
+          <a:p>
+            <a:pPr marL="177800" indent="-177800">
+              <a:spcAft>
+                <a:spcPts val="800"/>
+              </a:spcAft>
+              <a:buSzPct val="100000"/>
+              <a:buChar char="•"/>
+            </a:pPr>
+            <a:r>
+              <a:rPr lang="en-US" sz="1500" dirty="0">
+                <a:solidFill>
+                  <a:srgbClr val="0F172A"/>
+                </a:solidFill>
+                <a:latin typeface="Arial" pitchFamily="34" charset="0"/>
+                <a:ea typeface="Arial" pitchFamily="34" charset="-122"/>
+                <a:cs typeface="Arial" pitchFamily="34" charset="-120"/>
+              </a:rPr>
+              <a:t>Infrastructure as Code (Terraform)</a:t>
+            </a:r>
+            <a:endParaRPr lang="en-US" sz="1600" dirty="0"/>
+          </a:p>
+          <a:p>
+            <a:pPr marL="177800" indent="-177800">
+              <a:spcAft>
+                <a:spcPts val="800"/>
+              </a:spcAft>
+              <a:buSzPct val="100000"/>
+              <a:buChar char="•"/>
+            </a:pPr>
+            <a:r>
+              <a:rPr lang="en-US" sz="1500" dirty="0">
+                <a:solidFill>
+                  <a:srgbClr val="0F172A"/>
+                </a:solidFill>
+                <a:latin typeface="Arial" pitchFamily="34" charset="0"/>
+                <a:ea typeface="Arial" pitchFamily="34" charset="-122"/>
+                <a:cs typeface="Arial" pitchFamily="34" charset="-120"/>
+              </a:rPr>
+              <a:t>CI/CD · WAF · multi-region DR</a:t>
+            </a:r>
+            <a:endParaRPr lang="en-US" sz="1600" dirty="0"/>
+          </a:p>
+        </p:txBody>
+      </p:sp>
+      <p:sp>
+        <p:nvSpPr>
+          <p:cNvPr id="7" name="Text 5"/>
+          <p:cNvSpPr/>
+          <p:nvPr/>
+        </p:nvSpPr>
+        <p:spPr>
+          <a:xfrm>
+            <a:off x="640080" y="6446520"/>
+            <a:ext cx="7315200" cy="274320"/>
+          </a:xfrm>
+          <a:prstGeom prst="rect">
+            <a:avLst/>
+          </a:prstGeom>
+          <a:noFill/>
+          <a:ln/>
+        </p:spPr>
+        <p:txBody>
+          <a:bodyPr wrap="square" rtlCol="0" anchor="ctr"/>
+          <a:lstStyle/>
+          <a:p>
+            <a:pPr indent="0" marL="0">
+              <a:buNone/>
+            </a:pPr>
             <a:endParaRPr lang="en-US" sz="1000" dirty="0"/>
           </a:p>
         </p:txBody>
       </p:sp>
       <p:sp>
         <p:nvSpPr>
-          <p:cNvPr id="32" name="Text 30"/>
-          <p:cNvSpPr/>
-          <p:nvPr/>
-        </p:nvSpPr>
-        <p:spPr>
-          <a:xfrm>
-            <a:off x="7772400" y="6400800"/>
+          <p:cNvPr id="8" name="Text 6"/>
+          <p:cNvSpPr/>
+          <p:nvPr/>
+        </p:nvSpPr>
+        <p:spPr>
+          <a:xfrm>
+            <a:off x="7772400" y="6446520"/>
             <a:ext cx="3749040" cy="274320"/>
           </a:xfrm>
           <a:prstGeom prst="rect">
@@ -2937,9 +7613,217 @@
                 <a:ea typeface="Arial" pitchFamily="34" charset="-122"/>
                 <a:cs typeface="Arial" pitchFamily="34" charset="-120"/>
               </a:rPr>
-              <a:t>us-east-1</a:t>
+              <a:t>IMPROVEMENTS.md</a:t>
             </a:r>
             <a:endParaRPr lang="en-US" sz="1000" dirty="0"/>
+          </a:p>
+        </p:txBody>
+      </p:sp>
+    </p:spTree>
+  </p:cSld>
+  <p:clrMapOvr>
+    <a:masterClrMapping/>
+  </p:clrMapOvr>
+</p:sld>
+</file>
+
+<file path=ppt/slides/slide22.xml><?xml version="1.0" encoding="utf-8"?>
+<p:sld xmlns:a="http://schemas.openxmlformats.org/drawingml/2006/main" xmlns:r="http://schemas.openxmlformats.org/officeDocument/2006/relationships" xmlns:p="http://schemas.openxmlformats.org/presentationml/2006/main">
+  <p:cSld name="Slide 22">
+    <p:bg>
+      <p:bgPr>
+        <a:solidFill>
+          <a:srgbClr val="FFFFFF"/>
+        </a:solidFill>
+      </p:bgPr>
+    </p:bg>
+    <p:spTree>
+      <p:nvGrpSpPr>
+        <p:cNvPr id="1" name=""/>
+        <p:cNvGrpSpPr/>
+        <p:nvPr/>
+      </p:nvGrpSpPr>
+      <p:grpSpPr>
+        <a:xfrm>
+          <a:off x="0" y="0"/>
+          <a:ext cx="0" cy="0"/>
+          <a:chOff x="0" y="0"/>
+          <a:chExt cx="0" cy="0"/>
+        </a:xfrm>
+      </p:grpSpPr>
+      <p:sp>
+        <p:nvSpPr>
+          <p:cNvPr id="2" name="Shape 0"/>
+          <p:cNvSpPr/>
+          <p:nvPr/>
+        </p:nvSpPr>
+        <p:spPr>
+          <a:xfrm>
+            <a:off x="0" y="0"/>
+            <a:ext cx="256032" cy="6858000"/>
+          </a:xfrm>
+          <a:prstGeom prst="rect">
+            <a:avLst/>
+          </a:prstGeom>
+          <a:solidFill>
+            <a:srgbClr val="3B5BDB"/>
+          </a:solidFill>
+          <a:ln/>
+        </p:spPr>
+      </p:sp>
+      <p:sp>
+        <p:nvSpPr>
+          <p:cNvPr id="3" name="Text 1"/>
+          <p:cNvSpPr/>
+          <p:nvPr/>
+        </p:nvSpPr>
+        <p:spPr>
+          <a:xfrm>
+            <a:off x="822960" y="2377440"/>
+            <a:ext cx="10058400" cy="365760"/>
+          </a:xfrm>
+          <a:prstGeom prst="rect">
+            <a:avLst/>
+          </a:prstGeom>
+          <a:noFill/>
+          <a:ln/>
+        </p:spPr>
+        <p:txBody>
+          <a:bodyPr wrap="square" rtlCol="0" anchor="ctr"/>
+          <a:lstStyle/>
+          <a:p>
+            <a:pPr indent="0" marL="0">
+              <a:buNone/>
+            </a:pPr>
+            <a:r>
+              <a:rPr lang="en-US" sz="1400" b="1" spc="200" kern="0" dirty="0">
+                <a:solidFill>
+                  <a:srgbClr val="3B5BDB"/>
+                </a:solidFill>
+                <a:latin typeface="Arial" pitchFamily="34" charset="0"/>
+                <a:ea typeface="Arial" pitchFamily="34" charset="-122"/>
+                <a:cs typeface="Arial" pitchFamily="34" charset="-120"/>
+              </a:rPr>
+              <a:t>THANK YOU</a:t>
+            </a:r>
+            <a:endParaRPr lang="en-US" sz="1400" dirty="0"/>
+          </a:p>
+        </p:txBody>
+      </p:sp>
+      <p:sp>
+        <p:nvSpPr>
+          <p:cNvPr id="4" name="Text 2"/>
+          <p:cNvSpPr/>
+          <p:nvPr/>
+        </p:nvSpPr>
+        <p:spPr>
+          <a:xfrm>
+            <a:off x="822960" y="2788920"/>
+            <a:ext cx="10058400" cy="1005840"/>
+          </a:xfrm>
+          <a:prstGeom prst="rect">
+            <a:avLst/>
+          </a:prstGeom>
+          <a:noFill/>
+          <a:ln/>
+        </p:spPr>
+        <p:txBody>
+          <a:bodyPr wrap="square" rtlCol="0" anchor="ctr"/>
+          <a:lstStyle/>
+          <a:p>
+            <a:pPr indent="0" marL="0">
+              <a:buNone/>
+            </a:pPr>
+            <a:r>
+              <a:rPr lang="en-US" sz="4800" b="1" dirty="0">
+                <a:solidFill>
+                  <a:srgbClr val="0F172A"/>
+                </a:solidFill>
+                <a:latin typeface="Arial" pitchFamily="34" charset="0"/>
+                <a:ea typeface="Arial" pitchFamily="34" charset="-122"/>
+                <a:cs typeface="Arial" pitchFamily="34" charset="-120"/>
+              </a:rPr>
+              <a:t>Questions?</a:t>
+            </a:r>
+            <a:endParaRPr lang="en-US" sz="4800" dirty="0"/>
+          </a:p>
+        </p:txBody>
+      </p:sp>
+      <p:sp>
+        <p:nvSpPr>
+          <p:cNvPr id="5" name="Text 3"/>
+          <p:cNvSpPr/>
+          <p:nvPr/>
+        </p:nvSpPr>
+        <p:spPr>
+          <a:xfrm>
+            <a:off x="822960" y="3931920"/>
+            <a:ext cx="9875520" cy="914400"/>
+          </a:xfrm>
+          <a:prstGeom prst="rect">
+            <a:avLst/>
+          </a:prstGeom>
+          <a:noFill/>
+          <a:ln/>
+        </p:spPr>
+        <p:txBody>
+          <a:bodyPr wrap="square" rtlCol="0" anchor="ctr"/>
+          <a:lstStyle/>
+          <a:p>
+            <a:pPr indent="0" marL="0">
+              <a:buNone/>
+            </a:pPr>
+            <a:r>
+              <a:rPr lang="en-US" sz="1600" dirty="0">
+                <a:solidFill>
+                  <a:srgbClr val="5B6675"/>
+                </a:solidFill>
+                <a:latin typeface="Arial" pitchFamily="34" charset="0"/>
+                <a:ea typeface="Arial" pitchFamily="34" charset="-122"/>
+                <a:cs typeface="Arial" pitchFamily="34" charset="-120"/>
+              </a:rPr>
+              <a:t>A production-shaped 3-tier architecture: multi-AZ HA, least-privilege security, auto-scaling, HTTPS, monitoring, and a Multi-AZ data tier — all evidenced in the AWS console.</a:t>
+            </a:r>
+            <a:endParaRPr lang="en-US" sz="1600" dirty="0"/>
+          </a:p>
+        </p:txBody>
+      </p:sp>
+      <p:sp>
+        <p:nvSpPr>
+          <p:cNvPr id="6" name="Text 4"/>
+          <p:cNvSpPr/>
+          <p:nvPr/>
+        </p:nvSpPr>
+        <p:spPr>
+          <a:xfrm>
+            <a:off x="822960" y="6035040"/>
+            <a:ext cx="10515600" cy="365760"/>
+          </a:xfrm>
+          <a:prstGeom prst="rect">
+            <a:avLst/>
+          </a:prstGeom>
+          <a:noFill/>
+          <a:ln/>
+        </p:spPr>
+        <p:txBody>
+          <a:bodyPr wrap="square" rtlCol="0" anchor="ctr"/>
+          <a:lstStyle/>
+          <a:p>
+            <a:pPr indent="0" marL="0">
+              <a:buNone/>
+            </a:pPr>
+            <a:r>
+              <a:rPr lang="en-US" sz="1200" dirty="0">
+                <a:solidFill>
+                  <a:srgbClr val="8A94A3"/>
+                </a:solidFill>
+                <a:latin typeface="Arial" pitchFamily="34" charset="0"/>
+                <a:ea typeface="Arial" pitchFamily="34" charset="-122"/>
+                <a:cs typeface="Arial" pitchFamily="34" charset="-120"/>
+              </a:rPr>
+              <a:t>Dennis · CE Project 1 · github.com/Draian123/ce-project-1-three-tier-architecture</a:t>
+            </a:r>
+            <a:endParaRPr lang="en-US" sz="1200" dirty="0"/>
           </a:p>
         </p:txBody>
       </p:sp>
@@ -3003,7 +7887,7 @@
         </p:nvSpPr>
         <p:spPr>
           <a:xfrm>
-            <a:off x="640080" y="457200"/>
+            <a:off x="640080" y="384048"/>
             <a:ext cx="10972800" cy="274320"/>
           </a:xfrm>
           <a:prstGeom prst="rect">
@@ -3028,7 +7912,7 @@
                 <a:ea typeface="Arial" pitchFamily="34" charset="-122"/>
                 <a:cs typeface="Arial" pitchFamily="34" charset="-120"/>
               </a:rPr>
-              <a:t>NETWORK DESIGN</a:t>
+              <a:t>NETWORK FOUNDATION</a:t>
             </a:r>
             <a:endParaRPr lang="en-US" sz="1200" dirty="0"/>
           </a:p>
@@ -3042,8 +7926,8 @@
         </p:nvSpPr>
         <p:spPr>
           <a:xfrm>
-            <a:off x="640080" y="731520"/>
-            <a:ext cx="10972800" cy="822960"/>
+            <a:off x="640080" y="676656"/>
+            <a:ext cx="10972800" cy="731520"/>
           </a:xfrm>
           <a:prstGeom prst="rect">
             <a:avLst/>
@@ -3059,7 +7943,7 @@
               <a:buNone/>
             </a:pPr>
             <a:r>
-              <a:rPr lang="en-US" sz="3000" b="1" dirty="0">
+              <a:rPr lang="en-US" sz="2700" b="1" dirty="0">
                 <a:solidFill>
                   <a:srgbClr val="0F172A"/>
                 </a:solidFill>
@@ -3067,31 +7951,81 @@
                 <a:ea typeface="Arial" pitchFamily="34" charset="-122"/>
                 <a:cs typeface="Arial" pitchFamily="34" charset="-120"/>
               </a:rPr>
-              <a:t>CIDR plan that encodes tier &amp; AZ</a:t>
-            </a:r>
-            <a:endParaRPr lang="en-US" sz="3000" dirty="0"/>
-          </a:p>
-        </p:txBody>
-      </p:sp>
-      <p:sp>
-        <p:nvSpPr>
-          <p:cNvPr id="5" name="Text 3"/>
-          <p:cNvSpPr/>
-          <p:nvPr/>
-        </p:nvSpPr>
-        <p:spPr>
-          <a:xfrm>
-            <a:off x="822960" y="1828800"/>
-            <a:ext cx="10515600" cy="1828800"/>
-          </a:xfrm>
-          <a:prstGeom prst="rect">
-            <a:avLst/>
-          </a:prstGeom>
-          <a:noFill/>
-          <a:ln/>
-        </p:spPr>
-        <p:txBody>
-          <a:bodyPr wrap="square" rtlCol="0" anchor="ctr"/>
+              <a:t>VPC &amp; subnets — 6 subnets across 2 AZs</a:t>
+            </a:r>
+            <a:endParaRPr lang="en-US" sz="2700" dirty="0"/>
+          </a:p>
+        </p:txBody>
+      </p:sp>
+      <p:sp>
+        <p:nvSpPr>
+          <p:cNvPr id="5" name="Shape 3"/>
+          <p:cNvSpPr/>
+          <p:nvPr/>
+        </p:nvSpPr>
+        <p:spPr>
+          <a:xfrm>
+            <a:off x="548640" y="1463040"/>
+            <a:ext cx="7315200" cy="4846320"/>
+          </a:xfrm>
+          <a:prstGeom prst="roundRect">
+            <a:avLst>
+              <a:gd name="adj" fmla="val 943"/>
+            </a:avLst>
+          </a:prstGeom>
+          <a:solidFill>
+            <a:srgbClr val="F6F7F9"/>
+          </a:solidFill>
+          <a:ln w="12700">
+            <a:solidFill>
+              <a:srgbClr val="DBE1EA"/>
+            </a:solidFill>
+            <a:prstDash val="solid"/>
+          </a:ln>
+        </p:spPr>
+      </p:sp>
+      <p:pic>
+        <p:nvPicPr>
+          <p:cNvPr id="6" name="Image 0" descr="C:/Users/beite/Desktop/IRONHACK/Cloud Engineering/week3/project-1-3-tier-cloud-architecture/presentation/screenshots/01-vpc-subnets.png">    </p:cNvPr>
+          <p:cNvPicPr>
+            <a:picLocks noChangeAspect="1"/>
+          </p:cNvPicPr>
+          <p:nvPr/>
+        </p:nvPicPr>
+        <p:blipFill>
+          <a:blip r:embed="rId1"/>
+          <a:srcRect l="0" r="0" t="0" b="0"/>
+          <a:stretch/>
+        </p:blipFill>
+        <p:spPr>
+          <a:xfrm>
+            <a:off x="685800" y="1572768"/>
+            <a:ext cx="7040880" cy="4626864"/>
+          </a:xfrm>
+          <a:prstGeom prst="rect">
+            <a:avLst/>
+          </a:prstGeom>
+        </p:spPr>
+      </p:pic>
+      <p:sp>
+        <p:nvSpPr>
+          <p:cNvPr id="7" name="Text 4"/>
+          <p:cNvSpPr/>
+          <p:nvPr/>
+        </p:nvSpPr>
+        <p:spPr>
+          <a:xfrm>
+            <a:off x="8138160" y="1737360"/>
+            <a:ext cx="3566160" cy="4206240"/>
+          </a:xfrm>
+          <a:prstGeom prst="rect">
+            <a:avLst/>
+          </a:prstGeom>
+          <a:noFill/>
+          <a:ln/>
+        </p:spPr>
+        <p:txBody>
+          <a:bodyPr wrap="square" rtlCol="0" anchor="t"/>
           <a:lstStyle/>
           <a:p>
             <a:pPr marL="177800" indent="-177800">
@@ -3104,13 +8038,13 @@
             <a:r>
               <a:rPr lang="en-US" sz="1500" dirty="0">
                 <a:solidFill>
-                  <a:srgbClr val="B45309"/>
-                </a:solidFill>
-                <a:latin typeface="Arial" pitchFamily="34" charset="0"/>
-                <a:ea typeface="Arial" pitchFamily="34" charset="-122"/>
-                <a:cs typeface="Arial" pitchFamily="34" charset="-120"/>
-              </a:rPr>
-              <a:t>Public   10.0.1.0/24 · 10.0.2.0/24     → public-rt → Internet Gateway</a:t>
+                  <a:srgbClr val="3B5BDB"/>
+                </a:solidFill>
+                <a:latin typeface="Arial" pitchFamily="34" charset="0"/>
+                <a:ea typeface="Arial" pitchFamily="34" charset="-122"/>
+                <a:cs typeface="Arial" pitchFamily="34" charset="-120"/>
+              </a:rPr>
+              <a:t>One VPC, 10.0.0.0/16</a:t>
             </a:r>
             <a:endParaRPr lang="en-US" sz="1500" dirty="0"/>
           </a:p>
@@ -3125,13 +8059,13 @@
             <a:r>
               <a:rPr lang="en-US" sz="1500" dirty="0">
                 <a:solidFill>
-                  <a:srgbClr val="0E7C72"/>
-                </a:solidFill>
-                <a:latin typeface="Arial" pitchFamily="34" charset="0"/>
-                <a:ea typeface="Arial" pitchFamily="34" charset="-122"/>
-                <a:cs typeface="Arial" pitchFamily="34" charset="-120"/>
-              </a:rPr>
-              <a:t>App      10.0.11.0/24 · 10.0.12.0/24   → app-rt → NAT (outbound only)</a:t>
+                  <a:srgbClr val="0F172A"/>
+                </a:solidFill>
+                <a:latin typeface="Arial" pitchFamily="34" charset="0"/>
+                <a:ea typeface="Arial" pitchFamily="34" charset="-122"/>
+                <a:cs typeface="Arial" pitchFamily="34" charset="-120"/>
+              </a:rPr>
+              <a:t>2 public + 2 app + 2 data subnets</a:t>
             </a:r>
             <a:endParaRPr lang="en-US" sz="1500" dirty="0"/>
           </a:p>
@@ -3146,28 +8080,49 @@
             <a:r>
               <a:rPr lang="en-US" sz="1500" dirty="0">
                 <a:solidFill>
-                  <a:srgbClr val="6D28D9"/>
-                </a:solidFill>
-                <a:latin typeface="Arial" pitchFamily="34" charset="0"/>
-                <a:ea typeface="Arial" pitchFamily="34" charset="-122"/>
-                <a:cs typeface="Arial" pitchFamily="34" charset="-120"/>
-              </a:rPr>
-              <a:t>Data     10.0.21.0/24 · 10.0.22.0/24   → data-rt → local only (no internet)</a:t>
+                  <a:srgbClr val="0F172A"/>
+                </a:solidFill>
+                <a:latin typeface="Arial" pitchFamily="34" charset="0"/>
+                <a:ea typeface="Arial" pitchFamily="34" charset="-122"/>
+                <a:cs typeface="Arial" pitchFamily="34" charset="-120"/>
+              </a:rPr>
+              <a:t>Spread across us-east-1a and 1b</a:t>
             </a:r>
             <a:endParaRPr lang="en-US" sz="1500" dirty="0"/>
           </a:p>
-        </p:txBody>
-      </p:sp>
-      <p:sp>
-        <p:nvSpPr>
-          <p:cNvPr id="6" name="Text 4"/>
-          <p:cNvSpPr/>
-          <p:nvPr/>
-        </p:nvSpPr>
-        <p:spPr>
-          <a:xfrm>
-            <a:off x="822960" y="3840480"/>
-            <a:ext cx="10058400" cy="1097280"/>
+          <a:p>
+            <a:pPr marL="177800" indent="-177800">
+              <a:spcAft>
+                <a:spcPts val="800"/>
+              </a:spcAft>
+              <a:buSzPct val="100000"/>
+              <a:buChar char="•"/>
+            </a:pPr>
+            <a:r>
+              <a:rPr lang="en-US" sz="1500" dirty="0">
+                <a:solidFill>
+                  <a:srgbClr val="0F172A"/>
+                </a:solidFill>
+                <a:latin typeface="Arial" pitchFamily="34" charset="0"/>
+                <a:ea typeface="Arial" pitchFamily="34" charset="-122"/>
+                <a:cs typeface="Arial" pitchFamily="34" charset="-120"/>
+              </a:rPr>
+              <a:t>/24 each — room to grow</a:t>
+            </a:r>
+            <a:endParaRPr lang="en-US" sz="1500" dirty="0"/>
+          </a:p>
+        </p:txBody>
+      </p:sp>
+      <p:sp>
+        <p:nvSpPr>
+          <p:cNvPr id="8" name="Text 5"/>
+          <p:cNvSpPr/>
+          <p:nvPr/>
+        </p:nvSpPr>
+        <p:spPr>
+          <a:xfrm>
+            <a:off x="8138160" y="6035040"/>
+            <a:ext cx="3566160" cy="274320"/>
           </a:xfrm>
           <a:prstGeom prst="rect">
             <a:avLst/>
@@ -3183,46 +8138,7 @@
               <a:buNone/>
             </a:pPr>
             <a:r>
-              <a:rPr lang="en-US" sz="1500" dirty="0">
-                <a:solidFill>
-                  <a:srgbClr val="5B6675"/>
-                </a:solidFill>
-                <a:latin typeface="Arial" pitchFamily="34" charset="0"/>
-                <a:ea typeface="Arial" pitchFamily="34" charset="-122"/>
-                <a:cs typeface="Arial" pitchFamily="34" charset="-120"/>
-              </a:rPr>
-              <a:t>3rd octet encodes the tier (1 / 11 / 21), last digit the AZ. Route tables and security-group rules become self-documenting. /16 VPC + /24 subnets leaves room to grow and avoids the “/28 too small” pitfall.</a:t>
-            </a:r>
-            <a:endParaRPr lang="en-US" sz="1500" dirty="0"/>
-          </a:p>
-        </p:txBody>
-      </p:sp>
-      <p:sp>
-        <p:nvSpPr>
-          <p:cNvPr id="7" name="Text 5"/>
-          <p:cNvSpPr/>
-          <p:nvPr/>
-        </p:nvSpPr>
-        <p:spPr>
-          <a:xfrm>
-            <a:off x="640080" y="6400800"/>
-            <a:ext cx="7315200" cy="274320"/>
-          </a:xfrm>
-          <a:prstGeom prst="rect">
-            <a:avLst/>
-          </a:prstGeom>
-          <a:noFill/>
-          <a:ln/>
-        </p:spPr>
-        <p:txBody>
-          <a:bodyPr wrap="square" rtlCol="0" anchor="ctr"/>
-          <a:lstStyle/>
-          <a:p>
-            <a:pPr indent="0" marL="0">
-              <a:buNone/>
-            </a:pPr>
-            <a:r>
-              <a:rPr lang="en-US" sz="1000" dirty="0">
+              <a:rPr lang="en-US" sz="900" i="1" dirty="0">
                 <a:solidFill>
                   <a:srgbClr val="8A94A3"/>
                 </a:solidFill>
@@ -3230,48 +8146,9 @@
                 <a:ea typeface="Arial" pitchFamily="34" charset="-122"/>
                 <a:cs typeface="Arial" pitchFamily="34" charset="-120"/>
               </a:rPr>
-              <a:t>6 subnets · 2 AZs · IGW + 1 NAT Gateway</a:t>
-            </a:r>
-            <a:endParaRPr lang="en-US" sz="1000" dirty="0"/>
-          </a:p>
-        </p:txBody>
-      </p:sp>
-      <p:sp>
-        <p:nvSpPr>
-          <p:cNvPr id="8" name="Text 6"/>
-          <p:cNvSpPr/>
-          <p:nvPr/>
-        </p:nvSpPr>
-        <p:spPr>
-          <a:xfrm>
-            <a:off x="7772400" y="6400800"/>
-            <a:ext cx="3749040" cy="274320"/>
-          </a:xfrm>
-          <a:prstGeom prst="rect">
-            <a:avLst/>
-          </a:prstGeom>
-          <a:noFill/>
-          <a:ln/>
-        </p:spPr>
-        <p:txBody>
-          <a:bodyPr wrap="square" rtlCol="0" anchor="ctr"/>
-          <a:lstStyle/>
-          <a:p>
-            <a:pPr algn="r" indent="0" marL="0">
-              <a:buNone/>
-            </a:pPr>
-            <a:r>
-              <a:rPr lang="en-US" sz="1000" dirty="0">
-                <a:solidFill>
-                  <a:srgbClr val="8A94A3"/>
-                </a:solidFill>
-                <a:latin typeface="Arial" pitchFamily="34" charset="0"/>
-                <a:ea typeface="Arial" pitchFamily="34" charset="-122"/>
-                <a:cs typeface="Arial" pitchFamily="34" charset="-120"/>
-              </a:rPr>
-              <a:t>See ARCHITECTURE.md</a:t>
-            </a:r>
-            <a:endParaRPr lang="en-US" sz="1000" dirty="0"/>
+              <a:t>01-vpc-subnets.png</a:t>
+            </a:r>
+            <a:endParaRPr lang="en-US" sz="900" dirty="0"/>
           </a:p>
         </p:txBody>
       </p:sp>
@@ -3335,7 +8212,7 @@
         </p:nvSpPr>
         <p:spPr>
           <a:xfrm>
-            <a:off x="640080" y="457200"/>
+            <a:off x="640080" y="384048"/>
             <a:ext cx="10972800" cy="274320"/>
           </a:xfrm>
           <a:prstGeom prst="rect">
@@ -3360,7 +8237,7 @@
                 <a:ea typeface="Arial" pitchFamily="34" charset="-122"/>
                 <a:cs typeface="Arial" pitchFamily="34" charset="-120"/>
               </a:rPr>
-              <a:t>SECURITY</a:t>
+              <a:t>NETWORK FOUNDATION</a:t>
             </a:r>
             <a:endParaRPr lang="en-US" sz="1200" dirty="0"/>
           </a:p>
@@ -3374,8 +8251,8 @@
         </p:nvSpPr>
         <p:spPr>
           <a:xfrm>
-            <a:off x="640080" y="731520"/>
-            <a:ext cx="10972800" cy="822960"/>
+            <a:off x="640080" y="676656"/>
+            <a:ext cx="10972800" cy="731520"/>
           </a:xfrm>
           <a:prstGeom prst="rect">
             <a:avLst/>
@@ -3391,7 +8268,7 @@
               <a:buNone/>
             </a:pPr>
             <a:r>
-              <a:rPr lang="en-US" sz="3000" b="1" dirty="0">
+              <a:rPr lang="en-US" sz="2700" b="1" dirty="0">
                 <a:solidFill>
                   <a:srgbClr val="0F172A"/>
                 </a:solidFill>
@@ -3399,9 +8276,9 @@
                 <a:ea typeface="Arial" pitchFamily="34" charset="-122"/>
                 <a:cs typeface="Arial" pitchFamily="34" charset="-120"/>
               </a:rPr>
-              <a:t>Defense in depth, least privilege</a:t>
-            </a:r>
-            <a:endParaRPr lang="en-US" sz="3000" dirty="0"/>
+              <a:t>Data-tier isolation — route table</a:t>
+            </a:r>
+            <a:endParaRPr lang="en-US" sz="2700" dirty="0"/>
           </a:p>
         </p:txBody>
       </p:sp>
@@ -3413,12 +8290,12 @@
         </p:nvSpPr>
         <p:spPr>
           <a:xfrm>
-            <a:off x="822960" y="1828800"/>
-            <a:ext cx="10515600" cy="685800"/>
+            <a:off x="548640" y="1463040"/>
+            <a:ext cx="7315200" cy="4846320"/>
           </a:xfrm>
           <a:prstGeom prst="roundRect">
             <a:avLst>
-              <a:gd name="adj" fmla="val 8000"/>
+              <a:gd name="adj" fmla="val 943"/>
             </a:avLst>
           </a:prstGeom>
           <a:solidFill>
@@ -3432,64 +8309,48 @@
           </a:ln>
         </p:spPr>
       </p:sp>
-      <p:sp>
-        <p:nvSpPr>
-          <p:cNvPr id="6" name="Text 4"/>
-          <p:cNvSpPr/>
-          <p:nvPr/>
-        </p:nvSpPr>
-        <p:spPr>
-          <a:xfrm>
-            <a:off x="822960" y="1828800"/>
-            <a:ext cx="10515600" cy="685800"/>
-          </a:xfrm>
-          <a:prstGeom prst="rect">
-            <a:avLst/>
-          </a:prstGeom>
-          <a:noFill/>
-          <a:ln/>
-        </p:spPr>
-        <p:txBody>
-          <a:bodyPr wrap="square" rtlCol="0" anchor="ctr"/>
-          <a:lstStyle/>
-          <a:p>
-            <a:pPr algn="ctr" indent="0" marL="0">
-              <a:buNone/>
-            </a:pPr>
-            <a:r>
-              <a:rPr lang="en-US" sz="1600" b="1" dirty="0">
-                <a:solidFill>
-                  <a:srgbClr val="0F172A"/>
-                </a:solidFill>
-                <a:latin typeface="Arial" pitchFamily="34" charset="0"/>
-                <a:ea typeface="Arial" pitchFamily="34" charset="-122"/>
-                <a:cs typeface="Arial" pitchFamily="34" charset="-120"/>
-              </a:rPr>
-              <a:t>Internet  —80/443→  ALB SG  —80→  App SG  —3306/5432→  Data SG</a:t>
-            </a:r>
-            <a:endParaRPr lang="en-US" sz="1600" dirty="0"/>
-          </a:p>
-        </p:txBody>
-      </p:sp>
-      <p:sp>
-        <p:nvSpPr>
-          <p:cNvPr id="7" name="Text 5"/>
-          <p:cNvSpPr/>
-          <p:nvPr/>
-        </p:nvSpPr>
-        <p:spPr>
-          <a:xfrm>
-            <a:off x="822960" y="2834640"/>
-            <a:ext cx="10515600" cy="2743200"/>
-          </a:xfrm>
-          <a:prstGeom prst="rect">
-            <a:avLst/>
-          </a:prstGeom>
-          <a:noFill/>
-          <a:ln/>
-        </p:spPr>
-        <p:txBody>
-          <a:bodyPr wrap="square" rtlCol="0" anchor="ctr"/>
+      <p:pic>
+        <p:nvPicPr>
+          <p:cNvPr id="6" name="Image 0" descr="C:/Users/beite/Desktop/IRONHACK/Cloud Engineering/week3/project-1-3-tier-cloud-architecture/presentation/screenshots/02-route-tables-only-local.png">    </p:cNvPr>
+          <p:cNvPicPr>
+            <a:picLocks noChangeAspect="1"/>
+          </p:cNvPicPr>
+          <p:nvPr/>
+        </p:nvPicPr>
+        <p:blipFill>
+          <a:blip r:embed="rId1"/>
+          <a:srcRect l="0" r="0" t="0" b="0"/>
+          <a:stretch/>
+        </p:blipFill>
+        <p:spPr>
+          <a:xfrm>
+            <a:off x="685800" y="1572768"/>
+            <a:ext cx="7040880" cy="4626864"/>
+          </a:xfrm>
+          <a:prstGeom prst="rect">
+            <a:avLst/>
+          </a:prstGeom>
+        </p:spPr>
+      </p:pic>
+      <p:sp>
+        <p:nvSpPr>
+          <p:cNvPr id="7" name="Text 4"/>
+          <p:cNvSpPr/>
+          <p:nvPr/>
+        </p:nvSpPr>
+        <p:spPr>
+          <a:xfrm>
+            <a:off x="8138160" y="1737360"/>
+            <a:ext cx="3566160" cy="4206240"/>
+          </a:xfrm>
+          <a:prstGeom prst="rect">
+            <a:avLst/>
+          </a:prstGeom>
+          <a:noFill/>
+          <a:ln/>
+        </p:spPr>
+        <p:txBody>
+          <a:bodyPr wrap="square" rtlCol="0" anchor="t"/>
           <a:lstStyle/>
           <a:p>
             <a:pPr marL="177800" indent="-177800">
@@ -3502,13 +8363,13 @@
             <a:r>
               <a:rPr lang="en-US" sz="1500" dirty="0">
                 <a:solidFill>
-                  <a:srgbClr val="0F172A"/>
-                </a:solidFill>
-                <a:latin typeface="Arial" pitchFamily="34" charset="0"/>
-                <a:ea typeface="Arial" pitchFamily="34" charset="-122"/>
-                <a:cs typeface="Arial" pitchFamily="34" charset="-120"/>
-              </a:rPr>
-              <a:t>Internet reaches only the ALB — never an app or DB host</a:t>
+                  <a:srgbClr val="6D28D9"/>
+                </a:solidFill>
+                <a:latin typeface="Arial" pitchFamily="34" charset="0"/>
+                <a:ea typeface="Arial" pitchFamily="34" charset="-122"/>
+                <a:cs typeface="Arial" pitchFamily="34" charset="-120"/>
+              </a:rPr>
+              <a:t>data-rt has only the local route</a:t>
             </a:r>
             <a:endParaRPr lang="en-US" sz="1500" dirty="0"/>
           </a:p>
@@ -3529,7 +8390,7 @@
                 <a:ea typeface="Arial" pitchFamily="34" charset="-122"/>
                 <a:cs typeface="Arial" pitchFamily="34" charset="-120"/>
               </a:rPr>
-              <a:t>App accepts traffic only from the ALB security group</a:t>
+              <a:t>No 0.0.0.0/0 → no path to the internet</a:t>
             </a:r>
             <a:endParaRPr lang="en-US" sz="1500" dirty="0"/>
           </a:p>
@@ -3550,64 +8411,22 @@
                 <a:ea typeface="Arial" pitchFamily="34" charset="-122"/>
                 <a:cs typeface="Arial" pitchFamily="34" charset="-120"/>
               </a:rPr>
-              <a:t>DB accepts traffic only from the App security group</a:t>
+              <a:t>Isolated by routing, not just firewall</a:t>
             </a:r>
             <a:endParaRPr lang="en-US" sz="1500" dirty="0"/>
           </a:p>
-          <a:p>
-            <a:pPr marL="177800" indent="-177800">
-              <a:spcAft>
-                <a:spcPts val="800"/>
-              </a:spcAft>
-              <a:buSzPct val="100000"/>
-              <a:buChar char="•"/>
-            </a:pPr>
-            <a:r>
-              <a:rPr lang="en-US" sz="1500" dirty="0">
-                <a:solidFill>
-                  <a:srgbClr val="0F172A"/>
-                </a:solidFill>
-                <a:latin typeface="Arial" pitchFamily="34" charset="0"/>
-                <a:ea typeface="Arial" pitchFamily="34" charset="-122"/>
-                <a:cs typeface="Arial" pitchFamily="34" charset="-120"/>
-              </a:rPr>
-              <a:t>Private tiers have no public IP; data subnet has no internet route (protected twice)</a:t>
-            </a:r>
-            <a:endParaRPr lang="en-US" sz="1500" dirty="0"/>
-          </a:p>
-          <a:p>
-            <a:pPr marL="177800" indent="-177800">
-              <a:spcAft>
-                <a:spcPts val="800"/>
-              </a:spcAft>
-              <a:buSzPct val="100000"/>
-              <a:buChar char="•"/>
-            </a:pPr>
-            <a:r>
-              <a:rPr lang="en-US" sz="1500" dirty="0">
-                <a:solidFill>
-                  <a:srgbClr val="0F172A"/>
-                </a:solidFill>
-                <a:latin typeface="Arial" pitchFamily="34" charset="0"/>
-                <a:ea typeface="Arial" pitchFamily="34" charset="-122"/>
-                <a:cs typeface="Arial" pitchFamily="34" charset="-120"/>
-              </a:rPr>
-              <a:t>Administration via SSM — no SSH, no bastion, no port 22 open</a:t>
-            </a:r>
-            <a:endParaRPr lang="en-US" sz="1500" dirty="0"/>
-          </a:p>
-        </p:txBody>
-      </p:sp>
-      <p:sp>
-        <p:nvSpPr>
-          <p:cNvPr id="8" name="Text 6"/>
-          <p:cNvSpPr/>
-          <p:nvPr/>
-        </p:nvSpPr>
-        <p:spPr>
-          <a:xfrm>
-            <a:off x="640080" y="6400800"/>
-            <a:ext cx="7315200" cy="274320"/>
+        </p:txBody>
+      </p:sp>
+      <p:sp>
+        <p:nvSpPr>
+          <p:cNvPr id="8" name="Text 5"/>
+          <p:cNvSpPr/>
+          <p:nvPr/>
+        </p:nvSpPr>
+        <p:spPr>
+          <a:xfrm>
+            <a:off x="8138160" y="6035040"/>
+            <a:ext cx="3566160" cy="274320"/>
           </a:xfrm>
           <a:prstGeom prst="rect">
             <a:avLst/>
@@ -3623,7 +8442,7 @@
               <a:buNone/>
             </a:pPr>
             <a:r>
-              <a:rPr lang="en-US" sz="1000" dirty="0">
+              <a:rPr lang="en-US" sz="900" i="1" dirty="0">
                 <a:solidFill>
                   <a:srgbClr val="8A94A3"/>
                 </a:solidFill>
@@ -3631,48 +8450,9 @@
                 <a:ea typeface="Arial" pitchFamily="34" charset="-122"/>
                 <a:cs typeface="Arial" pitchFamily="34" charset="-120"/>
               </a:rPr>
-              <a:t>Security groups reference other SGs, not IP ranges</a:t>
-            </a:r>
-            <a:endParaRPr lang="en-US" sz="1000" dirty="0"/>
-          </a:p>
-        </p:txBody>
-      </p:sp>
-      <p:sp>
-        <p:nvSpPr>
-          <p:cNvPr id="9" name="Text 7"/>
-          <p:cNvSpPr/>
-          <p:nvPr/>
-        </p:nvSpPr>
-        <p:spPr>
-          <a:xfrm>
-            <a:off x="7772400" y="6400800"/>
-            <a:ext cx="3749040" cy="274320"/>
-          </a:xfrm>
-          <a:prstGeom prst="rect">
-            <a:avLst/>
-          </a:prstGeom>
-          <a:noFill/>
-          <a:ln/>
-        </p:spPr>
-        <p:txBody>
-          <a:bodyPr wrap="square" rtlCol="0" anchor="ctr"/>
-          <a:lstStyle/>
-          <a:p>
-            <a:pPr algn="r" indent="0" marL="0">
-              <a:buNone/>
-            </a:pPr>
-            <a:r>
-              <a:rPr lang="en-US" sz="1000" dirty="0">
-                <a:solidFill>
-                  <a:srgbClr val="8A94A3"/>
-                </a:solidFill>
-                <a:latin typeface="Arial" pitchFamily="34" charset="0"/>
-                <a:ea typeface="Arial" pitchFamily="34" charset="-122"/>
-                <a:cs typeface="Arial" pitchFamily="34" charset="-120"/>
-              </a:rPr>
-              <a:t>See SECURITY.md</a:t>
-            </a:r>
-            <a:endParaRPr lang="en-US" sz="1000" dirty="0"/>
+              <a:t>02-route-tables-only-local.png</a:t>
+            </a:r>
+            <a:endParaRPr lang="en-US" sz="900" dirty="0"/>
           </a:p>
         </p:txBody>
       </p:sp>
@@ -3736,7 +8516,7 @@
         </p:nvSpPr>
         <p:spPr>
           <a:xfrm>
-            <a:off x="640080" y="457200"/>
+            <a:off x="640080" y="384048"/>
             <a:ext cx="10972800" cy="274320"/>
           </a:xfrm>
           <a:prstGeom prst="rect">
@@ -3761,7 +8541,7 @@
                 <a:ea typeface="Arial" pitchFamily="34" charset="-122"/>
                 <a:cs typeface="Arial" pitchFamily="34" charset="-120"/>
               </a:rPr>
-              <a:t>TEST RESULTS</a:t>
+              <a:t>SECURITY</a:t>
             </a:r>
             <a:endParaRPr lang="en-US" sz="1200" dirty="0"/>
           </a:p>
@@ -3775,8 +8555,8 @@
         </p:nvSpPr>
         <p:spPr>
           <a:xfrm>
-            <a:off x="640080" y="731520"/>
-            <a:ext cx="10972800" cy="822960"/>
+            <a:off x="640080" y="676656"/>
+            <a:ext cx="10972800" cy="731520"/>
           </a:xfrm>
           <a:prstGeom prst="rect">
             <a:avLst/>
@@ -3792,7 +8572,7 @@
               <a:buNone/>
             </a:pPr>
             <a:r>
-              <a:rPr lang="en-US" sz="3000" b="1" dirty="0">
+              <a:rPr lang="en-US" sz="2700" b="1" dirty="0">
                 <a:solidFill>
                   <a:srgbClr val="0F172A"/>
                 </a:solidFill>
@@ -3800,9 +8580,9 @@
                 <a:ea typeface="Arial" pitchFamily="34" charset="-122"/>
                 <a:cs typeface="Arial" pitchFamily="34" charset="-120"/>
               </a:rPr>
-              <a:t>Verified: balanced &amp; self-healing</a:t>
-            </a:r>
-            <a:endParaRPr lang="en-US" sz="3000" dirty="0"/>
+              <a:t>The three tier security groups</a:t>
+            </a:r>
+            <a:endParaRPr lang="en-US" sz="2700" dirty="0"/>
           </a:p>
         </p:txBody>
       </p:sp>
@@ -3814,12 +8594,12 @@
         </p:nvSpPr>
         <p:spPr>
           <a:xfrm>
-            <a:off x="822960" y="1920240"/>
-            <a:ext cx="3291840" cy="1371600"/>
+            <a:off x="548640" y="1463040"/>
+            <a:ext cx="7315200" cy="4846320"/>
           </a:xfrm>
           <a:prstGeom prst="roundRect">
             <a:avLst>
-              <a:gd name="adj" fmla="val 4000"/>
+              <a:gd name="adj" fmla="val 943"/>
             </a:avLst>
           </a:prstGeom>
           <a:solidFill>
@@ -3833,313 +8613,48 @@
           </a:ln>
         </p:spPr>
       </p:sp>
-      <p:sp>
-        <p:nvSpPr>
-          <p:cNvPr id="6" name="Text 4"/>
-          <p:cNvSpPr/>
-          <p:nvPr/>
-        </p:nvSpPr>
-        <p:spPr>
-          <a:xfrm>
-            <a:off x="822960" y="2103120"/>
-            <a:ext cx="3291840" cy="731520"/>
-          </a:xfrm>
-          <a:prstGeom prst="rect">
-            <a:avLst/>
-          </a:prstGeom>
-          <a:noFill/>
-          <a:ln/>
-        </p:spPr>
-        <p:txBody>
-          <a:bodyPr wrap="square" rtlCol="0" anchor="ctr"/>
-          <a:lstStyle/>
-          <a:p>
-            <a:pPr algn="ctr" indent="0" marL="0">
-              <a:buNone/>
-            </a:pPr>
-            <a:r>
-              <a:rPr lang="en-US" sz="3400" b="1" dirty="0">
-                <a:solidFill>
-                  <a:srgbClr val="0F172A"/>
-                </a:solidFill>
-                <a:latin typeface="Arial" pitchFamily="34" charset="0"/>
-                <a:ea typeface="Arial" pitchFamily="34" charset="-122"/>
-                <a:cs typeface="Arial" pitchFamily="34" charset="-120"/>
-              </a:rPr>
-              <a:t>3/3</a:t>
-            </a:r>
-            <a:endParaRPr lang="en-US" sz="3400" dirty="0"/>
-          </a:p>
-        </p:txBody>
-      </p:sp>
-      <p:sp>
-        <p:nvSpPr>
-          <p:cNvPr id="7" name="Text 5"/>
-          <p:cNvSpPr/>
-          <p:nvPr/>
-        </p:nvSpPr>
-        <p:spPr>
-          <a:xfrm>
-            <a:off x="1005840" y="2788920"/>
-            <a:ext cx="2926080" cy="457200"/>
-          </a:xfrm>
-          <a:prstGeom prst="rect">
-            <a:avLst/>
-          </a:prstGeom>
-          <a:noFill/>
-          <a:ln/>
-        </p:spPr>
-        <p:txBody>
-          <a:bodyPr wrap="square" rtlCol="0" anchor="ctr"/>
-          <a:lstStyle/>
-          <a:p>
-            <a:pPr algn="ctr" indent="0" marL="0">
-              <a:buNone/>
-            </a:pPr>
-            <a:r>
-              <a:rPr lang="en-US" sz="1200" dirty="0">
-                <a:solidFill>
-                  <a:srgbClr val="5B6675"/>
-                </a:solidFill>
-                <a:latin typeface="Arial" pitchFamily="34" charset="0"/>
-                <a:ea typeface="Arial" pitchFamily="34" charset="-122"/>
-                <a:cs typeface="Arial" pitchFamily="34" charset="-120"/>
-              </a:rPr>
-              <a:t>targets healthy</a:t>
-            </a:r>
-            <a:endParaRPr lang="en-US" sz="1200" dirty="0"/>
-          </a:p>
-        </p:txBody>
-      </p:sp>
-      <p:sp>
-        <p:nvSpPr>
-          <p:cNvPr id="8" name="Shape 6"/>
-          <p:cNvSpPr/>
-          <p:nvPr/>
-        </p:nvSpPr>
-        <p:spPr>
-          <a:xfrm>
-            <a:off x="4434840" y="1920240"/>
-            <a:ext cx="3291840" cy="1371600"/>
-          </a:xfrm>
-          <a:prstGeom prst="roundRect">
-            <a:avLst>
-              <a:gd name="adj" fmla="val 4000"/>
-            </a:avLst>
-          </a:prstGeom>
-          <a:solidFill>
-            <a:srgbClr val="F6F7F9"/>
-          </a:solidFill>
-          <a:ln w="12700">
-            <a:solidFill>
-              <a:srgbClr val="DBE1EA"/>
-            </a:solidFill>
-            <a:prstDash val="solid"/>
-          </a:ln>
-        </p:spPr>
-      </p:sp>
-      <p:sp>
-        <p:nvSpPr>
-          <p:cNvPr id="9" name="Text 7"/>
-          <p:cNvSpPr/>
-          <p:nvPr/>
-        </p:nvSpPr>
-        <p:spPr>
-          <a:xfrm>
-            <a:off x="4434840" y="2103120"/>
-            <a:ext cx="3291840" cy="731520"/>
-          </a:xfrm>
-          <a:prstGeom prst="rect">
-            <a:avLst/>
-          </a:prstGeom>
-          <a:noFill/>
-          <a:ln/>
-        </p:spPr>
-        <p:txBody>
-          <a:bodyPr wrap="square" rtlCol="0" anchor="ctr"/>
-          <a:lstStyle/>
-          <a:p>
-            <a:pPr algn="ctr" indent="0" marL="0">
-              <a:buNone/>
-            </a:pPr>
-            <a:r>
-              <a:rPr lang="en-US" sz="3400" b="1" dirty="0">
-                <a:solidFill>
-                  <a:srgbClr val="0F172A"/>
-                </a:solidFill>
-                <a:latin typeface="Arial" pitchFamily="34" charset="0"/>
-                <a:ea typeface="Arial" pitchFamily="34" charset="-122"/>
-                <a:cs typeface="Arial" pitchFamily="34" charset="-120"/>
-              </a:rPr>
-              <a:t>6/6/6</a:t>
-            </a:r>
-            <a:endParaRPr lang="en-US" sz="3400" dirty="0"/>
-          </a:p>
-        </p:txBody>
-      </p:sp>
-      <p:sp>
-        <p:nvSpPr>
-          <p:cNvPr id="10" name="Text 8"/>
-          <p:cNvSpPr/>
-          <p:nvPr/>
-        </p:nvSpPr>
-        <p:spPr>
-          <a:xfrm>
-            <a:off x="4617720" y="2788920"/>
-            <a:ext cx="2926080" cy="457200"/>
-          </a:xfrm>
-          <a:prstGeom prst="rect">
-            <a:avLst/>
-          </a:prstGeom>
-          <a:noFill/>
-          <a:ln/>
-        </p:spPr>
-        <p:txBody>
-          <a:bodyPr wrap="square" rtlCol="0" anchor="ctr"/>
-          <a:lstStyle/>
-          <a:p>
-            <a:pPr algn="ctr" indent="0" marL="0">
-              <a:buNone/>
-            </a:pPr>
-            <a:r>
-              <a:rPr lang="en-US" sz="1200" dirty="0">
-                <a:solidFill>
-                  <a:srgbClr val="5B6675"/>
-                </a:solidFill>
-                <a:latin typeface="Arial" pitchFamily="34" charset="0"/>
-                <a:ea typeface="Arial" pitchFamily="34" charset="-122"/>
-                <a:cs typeface="Arial" pitchFamily="34" charset="-120"/>
-              </a:rPr>
-              <a:t>18 requests, even across instances &amp; AZs</a:t>
-            </a:r>
-            <a:endParaRPr lang="en-US" sz="1200" dirty="0"/>
-          </a:p>
-        </p:txBody>
-      </p:sp>
-      <p:sp>
-        <p:nvSpPr>
-          <p:cNvPr id="11" name="Shape 9"/>
-          <p:cNvSpPr/>
-          <p:nvPr/>
-        </p:nvSpPr>
-        <p:spPr>
-          <a:xfrm>
-            <a:off x="8046720" y="1920240"/>
-            <a:ext cx="3291840" cy="1371600"/>
-          </a:xfrm>
-          <a:prstGeom prst="roundRect">
-            <a:avLst>
-              <a:gd name="adj" fmla="val 4000"/>
-            </a:avLst>
-          </a:prstGeom>
-          <a:solidFill>
-            <a:srgbClr val="F6F7F9"/>
-          </a:solidFill>
-          <a:ln w="12700">
-            <a:solidFill>
-              <a:srgbClr val="DBE1EA"/>
-            </a:solidFill>
-            <a:prstDash val="solid"/>
-          </a:ln>
-        </p:spPr>
-      </p:sp>
-      <p:sp>
-        <p:nvSpPr>
-          <p:cNvPr id="12" name="Text 10"/>
-          <p:cNvSpPr/>
-          <p:nvPr/>
-        </p:nvSpPr>
-        <p:spPr>
-          <a:xfrm>
-            <a:off x="8046720" y="2103120"/>
-            <a:ext cx="3291840" cy="731520"/>
-          </a:xfrm>
-          <a:prstGeom prst="rect">
-            <a:avLst/>
-          </a:prstGeom>
-          <a:noFill/>
-          <a:ln/>
-        </p:spPr>
-        <p:txBody>
-          <a:bodyPr wrap="square" rtlCol="0" anchor="ctr"/>
-          <a:lstStyle/>
-          <a:p>
-            <a:pPr algn="ctr" indent="0" marL="0">
-              <a:buNone/>
-            </a:pPr>
-            <a:r>
-              <a:rPr lang="en-US" sz="3400" b="1" dirty="0">
-                <a:solidFill>
-                  <a:srgbClr val="0F172A"/>
-                </a:solidFill>
-                <a:latin typeface="Arial" pitchFamily="34" charset="0"/>
-                <a:ea typeface="Arial" pitchFamily="34" charset="-122"/>
-                <a:cs typeface="Arial" pitchFamily="34" charset="-120"/>
-              </a:rPr>
-              <a:t>~30s</a:t>
-            </a:r>
-            <a:endParaRPr lang="en-US" sz="3400" dirty="0"/>
-          </a:p>
-        </p:txBody>
-      </p:sp>
-      <p:sp>
-        <p:nvSpPr>
-          <p:cNvPr id="13" name="Text 11"/>
-          <p:cNvSpPr/>
-          <p:nvPr/>
-        </p:nvSpPr>
-        <p:spPr>
-          <a:xfrm>
-            <a:off x="8229600" y="2788920"/>
-            <a:ext cx="2926080" cy="457200"/>
-          </a:xfrm>
-          <a:prstGeom prst="rect">
-            <a:avLst/>
-          </a:prstGeom>
-          <a:noFill/>
-          <a:ln/>
-        </p:spPr>
-        <p:txBody>
-          <a:bodyPr wrap="square" rtlCol="0" anchor="ctr"/>
-          <a:lstStyle/>
-          <a:p>
-            <a:pPr algn="ctr" indent="0" marL="0">
-              <a:buNone/>
-            </a:pPr>
-            <a:r>
-              <a:rPr lang="en-US" sz="1200" dirty="0">
-                <a:solidFill>
-                  <a:srgbClr val="5B6675"/>
-                </a:solidFill>
-                <a:latin typeface="Arial" pitchFamily="34" charset="0"/>
-                <a:ea typeface="Arial" pitchFamily="34" charset="-122"/>
-                <a:cs typeface="Arial" pitchFamily="34" charset="-120"/>
-              </a:rPr>
-              <a:t>auto-recovery after instance stop</a:t>
-            </a:r>
-            <a:endParaRPr lang="en-US" sz="1200" dirty="0"/>
-          </a:p>
-        </p:txBody>
-      </p:sp>
-      <p:sp>
-        <p:nvSpPr>
-          <p:cNvPr id="14" name="Text 12"/>
-          <p:cNvSpPr/>
-          <p:nvPr/>
-        </p:nvSpPr>
-        <p:spPr>
-          <a:xfrm>
-            <a:off x="822960" y="3657600"/>
-            <a:ext cx="10515600" cy="2194560"/>
-          </a:xfrm>
-          <a:prstGeom prst="rect">
-            <a:avLst/>
-          </a:prstGeom>
-          <a:noFill/>
-          <a:ln/>
-        </p:spPr>
-        <p:txBody>
-          <a:bodyPr wrap="square" rtlCol="0" anchor="ctr"/>
+      <p:pic>
+        <p:nvPicPr>
+          <p:cNvPr id="6" name="Image 0" descr="C:/Users/beite/Desktop/IRONHACK/Cloud Engineering/week3/project-1-3-tier-cloud-architecture/presentation/screenshots/03-security-groups.png">    </p:cNvPr>
+          <p:cNvPicPr>
+            <a:picLocks noChangeAspect="1"/>
+          </p:cNvPicPr>
+          <p:nvPr/>
+        </p:nvPicPr>
+        <p:blipFill>
+          <a:blip r:embed="rId1"/>
+          <a:srcRect l="0" r="0" t="0" b="0"/>
+          <a:stretch/>
+        </p:blipFill>
+        <p:spPr>
+          <a:xfrm>
+            <a:off x="685800" y="1572768"/>
+            <a:ext cx="7040880" cy="4626864"/>
+          </a:xfrm>
+          <a:prstGeom prst="rect">
+            <a:avLst/>
+          </a:prstGeom>
+        </p:spPr>
+      </p:pic>
+      <p:sp>
+        <p:nvSpPr>
+          <p:cNvPr id="7" name="Text 4"/>
+          <p:cNvSpPr/>
+          <p:nvPr/>
+        </p:nvSpPr>
+        <p:spPr>
+          <a:xfrm>
+            <a:off x="8138160" y="1737360"/>
+            <a:ext cx="3566160" cy="4206240"/>
+          </a:xfrm>
+          <a:prstGeom prst="rect">
+            <a:avLst/>
+          </a:prstGeom>
+          <a:noFill/>
+          <a:ln/>
+        </p:spPr>
+        <p:txBody>
+          <a:bodyPr wrap="square" rtlCol="0" anchor="t"/>
           <a:lstStyle/>
           <a:p>
             <a:pPr marL="177800" indent="-177800">
@@ -4152,13 +8667,13 @@
             <a:r>
               <a:rPr lang="en-US" sz="1500" dirty="0">
                 <a:solidFill>
-                  <a:srgbClr val="0F172A"/>
-                </a:solidFill>
-                <a:latin typeface="Arial" pitchFamily="34" charset="0"/>
-                <a:ea typeface="Arial" pitchFamily="34" charset="-122"/>
-                <a:cs typeface="Arial" pitchFamily="34" charset="-120"/>
-              </a:rPr>
-              <a:t>Failover: 93% of requests succeeded during the ~20s detection window, 100% after</a:t>
+                  <a:srgbClr val="0E7C72"/>
+                </a:solidFill>
+                <a:latin typeface="Arial" pitchFamily="34" charset="0"/>
+                <a:ea typeface="Arial" pitchFamily="34" charset="-122"/>
+                <a:cs typeface="Arial" pitchFamily="34" charset="-120"/>
+              </a:rPr>
+              <a:t>ALB → App → Data chain</a:t>
             </a:r>
             <a:endParaRPr lang="en-US" sz="1500" dirty="0"/>
           </a:p>
@@ -4179,7 +8694,7 @@
                 <a:ea typeface="Arial" pitchFamily="34" charset="-122"/>
                 <a:cs typeface="Arial" pitchFamily="34" charset="-120"/>
               </a:rPr>
-              <a:t>Recovered with no manual step — systemd restarts the app, ALB re-registers the target</a:t>
+              <a:t>One SG per tier</a:t>
             </a:r>
             <a:endParaRPr lang="en-US" sz="1500" dirty="0"/>
           </a:p>
@@ -4200,7 +8715,7 @@
                 <a:ea typeface="Arial" pitchFamily="34" charset="-122"/>
                 <a:cs typeface="Arial" pitchFamily="34" charset="-120"/>
               </a:rPr>
-              <a:t>All private tiers confirmed with no public IP; only the ALB answered from the internet</a:t>
+              <a:t>Each trusts only the tier in front</a:t>
             </a:r>
             <a:endParaRPr lang="en-US" sz="1500" dirty="0"/>
           </a:p>
@@ -4208,14 +8723,14 @@
       </p:sp>
       <p:sp>
         <p:nvSpPr>
-          <p:cNvPr id="15" name="Text 13"/>
-          <p:cNvSpPr/>
-          <p:nvPr/>
-        </p:nvSpPr>
-        <p:spPr>
-          <a:xfrm>
-            <a:off x="640080" y="6400800"/>
-            <a:ext cx="7315200" cy="274320"/>
+          <p:cNvPr id="8" name="Text 5"/>
+          <p:cNvSpPr/>
+          <p:nvPr/>
+        </p:nvSpPr>
+        <p:spPr>
+          <a:xfrm>
+            <a:off x="8138160" y="6035040"/>
+            <a:ext cx="3566160" cy="274320"/>
           </a:xfrm>
           <a:prstGeom prst="rect">
             <a:avLst/>
@@ -4231,7 +8746,7 @@
               <a:buNone/>
             </a:pPr>
             <a:r>
-              <a:rPr lang="en-US" sz="1000" dirty="0">
+              <a:rPr lang="en-US" sz="900" i="1" dirty="0">
                 <a:solidFill>
                   <a:srgbClr val="8A94A3"/>
                 </a:solidFill>
@@ -4239,48 +8754,9 @@
                 <a:ea typeface="Arial" pitchFamily="34" charset="-122"/>
                 <a:cs typeface="Arial" pitchFamily="34" charset="-120"/>
               </a:rPr>
-              <a:t>Full output in tests/</a:t>
-            </a:r>
-            <a:endParaRPr lang="en-US" sz="1000" dirty="0"/>
-          </a:p>
-        </p:txBody>
-      </p:sp>
-      <p:sp>
-        <p:nvSpPr>
-          <p:cNvPr id="16" name="Text 14"/>
-          <p:cNvSpPr/>
-          <p:nvPr/>
-        </p:nvSpPr>
-        <p:spPr>
-          <a:xfrm>
-            <a:off x="7772400" y="6400800"/>
-            <a:ext cx="3749040" cy="274320"/>
-          </a:xfrm>
-          <a:prstGeom prst="rect">
-            <a:avLst/>
-          </a:prstGeom>
-          <a:noFill/>
-          <a:ln/>
-        </p:spPr>
-        <p:txBody>
-          <a:bodyPr wrap="square" rtlCol="0" anchor="ctr"/>
-          <a:lstStyle/>
-          <a:p>
-            <a:pPr algn="r" indent="0" marL="0">
-              <a:buNone/>
-            </a:pPr>
-            <a:r>
-              <a:rPr lang="en-US" sz="1000" dirty="0">
-                <a:solidFill>
-                  <a:srgbClr val="8A94A3"/>
-                </a:solidFill>
-                <a:latin typeface="Arial" pitchFamily="34" charset="0"/>
-                <a:ea typeface="Arial" pitchFamily="34" charset="-122"/>
-                <a:cs typeface="Arial" pitchFamily="34" charset="-120"/>
-              </a:rPr>
-              <a:t>test-results.md · failover-test.md</a:t>
-            </a:r>
-            <a:endParaRPr lang="en-US" sz="1000" dirty="0"/>
+              <a:t>03-security-groups.png</a:t>
+            </a:r>
+            <a:endParaRPr lang="en-US" sz="900" dirty="0"/>
           </a:p>
         </p:txBody>
       </p:sp>
@@ -4344,7 +8820,7 @@
         </p:nvSpPr>
         <p:spPr>
           <a:xfrm>
-            <a:off x="640080" y="457200"/>
+            <a:off x="640080" y="384048"/>
             <a:ext cx="10972800" cy="274320"/>
           </a:xfrm>
           <a:prstGeom prst="rect">
@@ -4369,7 +8845,7 @@
                 <a:ea typeface="Arial" pitchFamily="34" charset="-122"/>
                 <a:cs typeface="Arial" pitchFamily="34" charset="-120"/>
               </a:rPr>
-              <a:t>COST ANALYSIS</a:t>
+              <a:t>SECURITY</a:t>
             </a:r>
             <a:endParaRPr lang="en-US" sz="1200" dirty="0"/>
           </a:p>
@@ -4383,8 +8859,8 @@
         </p:nvSpPr>
         <p:spPr>
           <a:xfrm>
-            <a:off x="640080" y="731520"/>
-            <a:ext cx="10972800" cy="822960"/>
+            <a:off x="640080" y="676656"/>
+            <a:ext cx="10972800" cy="731520"/>
           </a:xfrm>
           <a:prstGeom prst="rect">
             <a:avLst/>
@@ -4400,7 +8876,7 @@
               <a:buNone/>
             </a:pPr>
             <a:r>
-              <a:rPr lang="en-US" sz="3000" b="1" dirty="0">
+              <a:rPr lang="en-US" sz="2700" b="1" dirty="0">
                 <a:solidFill>
                   <a:srgbClr val="0F172A"/>
                 </a:solidFill>
@@ -4408,9 +8884,9 @@
                 <a:ea typeface="Arial" pitchFamily="34" charset="-122"/>
                 <a:cs typeface="Arial" pitchFamily="34" charset="-120"/>
               </a:rPr>
-              <a:t>~$101/month — and where it goes</a:t>
-            </a:r>
-            <a:endParaRPr lang="en-US" sz="3000" dirty="0"/>
+              <a:t>Least privilege — App SG inbound</a:t>
+            </a:r>
+            <a:endParaRPr lang="en-US" sz="2700" dirty="0"/>
           </a:p>
         </p:txBody>
       </p:sp>
@@ -4422,12 +8898,12 @@
         </p:nvSpPr>
         <p:spPr>
           <a:xfrm>
-            <a:off x="822960" y="1920240"/>
-            <a:ext cx="3291840" cy="1371600"/>
+            <a:off x="548640" y="1463040"/>
+            <a:ext cx="7315200" cy="4846320"/>
           </a:xfrm>
           <a:prstGeom prst="roundRect">
             <a:avLst>
-              <a:gd name="adj" fmla="val 4000"/>
+              <a:gd name="adj" fmla="val 943"/>
             </a:avLst>
           </a:prstGeom>
           <a:solidFill>
@@ -4441,313 +8917,48 @@
           </a:ln>
         </p:spPr>
       </p:sp>
-      <p:sp>
-        <p:nvSpPr>
-          <p:cNvPr id="6" name="Text 4"/>
-          <p:cNvSpPr/>
-          <p:nvPr/>
-        </p:nvSpPr>
-        <p:spPr>
-          <a:xfrm>
-            <a:off x="822960" y="2103120"/>
-            <a:ext cx="3291840" cy="731520"/>
-          </a:xfrm>
-          <a:prstGeom prst="rect">
-            <a:avLst/>
-          </a:prstGeom>
-          <a:noFill/>
-          <a:ln/>
-        </p:spPr>
-        <p:txBody>
-          <a:bodyPr wrap="square" rtlCol="0" anchor="ctr"/>
-          <a:lstStyle/>
-          <a:p>
-            <a:pPr algn="ctr" indent="0" marL="0">
-              <a:buNone/>
-            </a:pPr>
-            <a:r>
-              <a:rPr lang="en-US" sz="3400" b="1" dirty="0">
-                <a:solidFill>
-                  <a:srgbClr val="0F172A"/>
-                </a:solidFill>
-                <a:latin typeface="Arial" pitchFamily="34" charset="0"/>
-                <a:ea typeface="Arial" pitchFamily="34" charset="-122"/>
-                <a:cs typeface="Arial" pitchFamily="34" charset="-120"/>
-              </a:rPr>
-              <a:t>~$35</a:t>
-            </a:r>
-            <a:endParaRPr lang="en-US" sz="3400" dirty="0"/>
-          </a:p>
-        </p:txBody>
-      </p:sp>
-      <p:sp>
-        <p:nvSpPr>
-          <p:cNvPr id="7" name="Text 5"/>
-          <p:cNvSpPr/>
-          <p:nvPr/>
-        </p:nvSpPr>
-        <p:spPr>
-          <a:xfrm>
-            <a:off x="1005840" y="2788920"/>
-            <a:ext cx="2926080" cy="457200"/>
-          </a:xfrm>
-          <a:prstGeom prst="rect">
-            <a:avLst/>
-          </a:prstGeom>
-          <a:noFill/>
-          <a:ln/>
-        </p:spPr>
-        <p:txBody>
-          <a:bodyPr wrap="square" rtlCol="0" anchor="ctr"/>
-          <a:lstStyle/>
-          <a:p>
-            <a:pPr algn="ctr" indent="0" marL="0">
-              <a:buNone/>
-            </a:pPr>
-            <a:r>
-              <a:rPr lang="en-US" sz="1200" dirty="0">
-                <a:solidFill>
-                  <a:srgbClr val="5B6675"/>
-                </a:solidFill>
-                <a:latin typeface="Arial" pitchFamily="34" charset="0"/>
-                <a:ea typeface="Arial" pitchFamily="34" charset="-122"/>
-                <a:cs typeface="Arial" pitchFamily="34" charset="-120"/>
-              </a:rPr>
-              <a:t>NAT Gateway</a:t>
-            </a:r>
-            <a:endParaRPr lang="en-US" sz="1200" dirty="0"/>
-          </a:p>
-        </p:txBody>
-      </p:sp>
-      <p:sp>
-        <p:nvSpPr>
-          <p:cNvPr id="8" name="Shape 6"/>
-          <p:cNvSpPr/>
-          <p:nvPr/>
-        </p:nvSpPr>
-        <p:spPr>
-          <a:xfrm>
-            <a:off x="4434840" y="1920240"/>
-            <a:ext cx="3291840" cy="1371600"/>
-          </a:xfrm>
-          <a:prstGeom prst="roundRect">
-            <a:avLst>
-              <a:gd name="adj" fmla="val 4000"/>
-            </a:avLst>
-          </a:prstGeom>
-          <a:solidFill>
-            <a:srgbClr val="F6F7F9"/>
-          </a:solidFill>
-          <a:ln w="12700">
-            <a:solidFill>
-              <a:srgbClr val="DBE1EA"/>
-            </a:solidFill>
-            <a:prstDash val="solid"/>
-          </a:ln>
-        </p:spPr>
-      </p:sp>
-      <p:sp>
-        <p:nvSpPr>
-          <p:cNvPr id="9" name="Text 7"/>
-          <p:cNvSpPr/>
-          <p:nvPr/>
-        </p:nvSpPr>
-        <p:spPr>
-          <a:xfrm>
-            <a:off x="4434840" y="2103120"/>
-            <a:ext cx="3291840" cy="731520"/>
-          </a:xfrm>
-          <a:prstGeom prst="rect">
-            <a:avLst/>
-          </a:prstGeom>
-          <a:noFill/>
-          <a:ln/>
-        </p:spPr>
-        <p:txBody>
-          <a:bodyPr wrap="square" rtlCol="0" anchor="ctr"/>
-          <a:lstStyle/>
-          <a:p>
-            <a:pPr algn="ctr" indent="0" marL="0">
-              <a:buNone/>
-            </a:pPr>
-            <a:r>
-              <a:rPr lang="en-US" sz="3400" b="1" dirty="0">
-                <a:solidFill>
-                  <a:srgbClr val="0F172A"/>
-                </a:solidFill>
-                <a:latin typeface="Arial" pitchFamily="34" charset="0"/>
-                <a:ea typeface="Arial" pitchFamily="34" charset="-122"/>
-                <a:cs typeface="Arial" pitchFamily="34" charset="-120"/>
-              </a:rPr>
-              <a:t>~$22</a:t>
-            </a:r>
-            <a:endParaRPr lang="en-US" sz="3400" dirty="0"/>
-          </a:p>
-        </p:txBody>
-      </p:sp>
-      <p:sp>
-        <p:nvSpPr>
-          <p:cNvPr id="10" name="Text 8"/>
-          <p:cNvSpPr/>
-          <p:nvPr/>
-        </p:nvSpPr>
-        <p:spPr>
-          <a:xfrm>
-            <a:off x="4617720" y="2788920"/>
-            <a:ext cx="2926080" cy="457200"/>
-          </a:xfrm>
-          <a:prstGeom prst="rect">
-            <a:avLst/>
-          </a:prstGeom>
-          <a:noFill/>
-          <a:ln/>
-        </p:spPr>
-        <p:txBody>
-          <a:bodyPr wrap="square" rtlCol="0" anchor="ctr"/>
-          <a:lstStyle/>
-          <a:p>
-            <a:pPr algn="ctr" indent="0" marL="0">
-              <a:buNone/>
-            </a:pPr>
-            <a:r>
-              <a:rPr lang="en-US" sz="1200" dirty="0">
-                <a:solidFill>
-                  <a:srgbClr val="5B6675"/>
-                </a:solidFill>
-                <a:latin typeface="Arial" pitchFamily="34" charset="0"/>
-                <a:ea typeface="Arial" pitchFamily="34" charset="-122"/>
-                <a:cs typeface="Arial" pitchFamily="34" charset="-120"/>
-              </a:rPr>
-              <a:t>Application Load Balancer</a:t>
-            </a:r>
-            <a:endParaRPr lang="en-US" sz="1200" dirty="0"/>
-          </a:p>
-        </p:txBody>
-      </p:sp>
-      <p:sp>
-        <p:nvSpPr>
-          <p:cNvPr id="11" name="Shape 9"/>
-          <p:cNvSpPr/>
-          <p:nvPr/>
-        </p:nvSpPr>
-        <p:spPr>
-          <a:xfrm>
-            <a:off x="8046720" y="1920240"/>
-            <a:ext cx="3291840" cy="1371600"/>
-          </a:xfrm>
-          <a:prstGeom prst="roundRect">
-            <a:avLst>
-              <a:gd name="adj" fmla="val 4000"/>
-            </a:avLst>
-          </a:prstGeom>
-          <a:solidFill>
-            <a:srgbClr val="F6F7F9"/>
-          </a:solidFill>
-          <a:ln w="12700">
-            <a:solidFill>
-              <a:srgbClr val="DBE1EA"/>
-            </a:solidFill>
-            <a:prstDash val="solid"/>
-          </a:ln>
-        </p:spPr>
-      </p:sp>
-      <p:sp>
-        <p:nvSpPr>
-          <p:cNvPr id="12" name="Text 10"/>
-          <p:cNvSpPr/>
-          <p:nvPr/>
-        </p:nvSpPr>
-        <p:spPr>
-          <a:xfrm>
-            <a:off x="8046720" y="2103120"/>
-            <a:ext cx="3291840" cy="731520"/>
-          </a:xfrm>
-          <a:prstGeom prst="rect">
-            <a:avLst/>
-          </a:prstGeom>
-          <a:noFill/>
-          <a:ln/>
-        </p:spPr>
-        <p:txBody>
-          <a:bodyPr wrap="square" rtlCol="0" anchor="ctr"/>
-          <a:lstStyle/>
-          <a:p>
-            <a:pPr algn="ctr" indent="0" marL="0">
-              <a:buNone/>
-            </a:pPr>
-            <a:r>
-              <a:rPr lang="en-US" sz="3400" b="1" dirty="0">
-                <a:solidFill>
-                  <a:srgbClr val="0F172A"/>
-                </a:solidFill>
-                <a:latin typeface="Arial" pitchFamily="34" charset="0"/>
-                <a:ea typeface="Arial" pitchFamily="34" charset="-122"/>
-                <a:cs typeface="Arial" pitchFamily="34" charset="-120"/>
-              </a:rPr>
-              <a:t>~$30</a:t>
-            </a:r>
-            <a:endParaRPr lang="en-US" sz="3400" dirty="0"/>
-          </a:p>
-        </p:txBody>
-      </p:sp>
-      <p:sp>
-        <p:nvSpPr>
-          <p:cNvPr id="13" name="Text 11"/>
-          <p:cNvSpPr/>
-          <p:nvPr/>
-        </p:nvSpPr>
-        <p:spPr>
-          <a:xfrm>
-            <a:off x="8229600" y="2788920"/>
-            <a:ext cx="2926080" cy="457200"/>
-          </a:xfrm>
-          <a:prstGeom prst="rect">
-            <a:avLst/>
-          </a:prstGeom>
-          <a:noFill/>
-          <a:ln/>
-        </p:spPr>
-        <p:txBody>
-          <a:bodyPr wrap="square" rtlCol="0" anchor="ctr"/>
-          <a:lstStyle/>
-          <a:p>
-            <a:pPr algn="ctr" indent="0" marL="0">
-              <a:buNone/>
-            </a:pPr>
-            <a:r>
-              <a:rPr lang="en-US" sz="1200" dirty="0">
-                <a:solidFill>
-                  <a:srgbClr val="5B6675"/>
-                </a:solidFill>
-                <a:latin typeface="Arial" pitchFamily="34" charset="0"/>
-                <a:ea typeface="Arial" pitchFamily="34" charset="-122"/>
-                <a:cs typeface="Arial" pitchFamily="34" charset="-120"/>
-              </a:rPr>
-              <a:t>4× t3.micro EC2</a:t>
-            </a:r>
-            <a:endParaRPr lang="en-US" sz="1200" dirty="0"/>
-          </a:p>
-        </p:txBody>
-      </p:sp>
-      <p:sp>
-        <p:nvSpPr>
-          <p:cNvPr id="14" name="Text 12"/>
-          <p:cNvSpPr/>
-          <p:nvPr/>
-        </p:nvSpPr>
-        <p:spPr>
-          <a:xfrm>
-            <a:off x="822960" y="3657600"/>
-            <a:ext cx="10515600" cy="2194560"/>
-          </a:xfrm>
-          <a:prstGeom prst="rect">
-            <a:avLst/>
-          </a:prstGeom>
-          <a:noFill/>
-          <a:ln/>
-        </p:spPr>
-        <p:txBody>
-          <a:bodyPr wrap="square" rtlCol="0" anchor="ctr"/>
+      <p:pic>
+        <p:nvPicPr>
+          <p:cNvPr id="6" name="Image 0" descr="C:/Users/beite/Desktop/IRONHACK/Cloud Engineering/week3/project-1-3-tier-cloud-architecture/presentation/screenshots/04-app-sg-rules.png">    </p:cNvPr>
+          <p:cNvPicPr>
+            <a:picLocks noChangeAspect="1"/>
+          </p:cNvPicPr>
+          <p:nvPr/>
+        </p:nvPicPr>
+        <p:blipFill>
+          <a:blip r:embed="rId1"/>
+          <a:srcRect l="0" r="0" t="0" b="0"/>
+          <a:stretch/>
+        </p:blipFill>
+        <p:spPr>
+          <a:xfrm>
+            <a:off x="685800" y="1572768"/>
+            <a:ext cx="7040880" cy="4626864"/>
+          </a:xfrm>
+          <a:prstGeom prst="rect">
+            <a:avLst/>
+          </a:prstGeom>
+        </p:spPr>
+      </p:pic>
+      <p:sp>
+        <p:nvSpPr>
+          <p:cNvPr id="7" name="Text 4"/>
+          <p:cNvSpPr/>
+          <p:nvPr/>
+        </p:nvSpPr>
+        <p:spPr>
+          <a:xfrm>
+            <a:off x="8138160" y="1737360"/>
+            <a:ext cx="3566160" cy="4206240"/>
+          </a:xfrm>
+          <a:prstGeom prst="rect">
+            <a:avLst/>
+          </a:prstGeom>
+          <a:noFill/>
+          <a:ln/>
+        </p:spPr>
+        <p:txBody>
+          <a:bodyPr wrap="square" rtlCol="0" anchor="t"/>
           <a:lstStyle/>
           <a:p>
             <a:pPr marL="177800" indent="-177800">
@@ -4760,13 +8971,13 @@
             <a:r>
               <a:rPr lang="en-US" sz="1500" dirty="0">
                 <a:solidFill>
-                  <a:srgbClr val="0F172A"/>
-                </a:solidFill>
-                <a:latin typeface="Arial" pitchFamily="34" charset="0"/>
-                <a:ea typeface="Arial" pitchFamily="34" charset="-122"/>
-                <a:cs typeface="Arial" pitchFamily="34" charset="-120"/>
-              </a:rPr>
-              <a:t>NAT + ALB are ~57% of the bill and run regardless of traffic</a:t>
+                  <a:srgbClr val="0E7C72"/>
+                </a:solidFill>
+                <a:latin typeface="Arial" pitchFamily="34" charset="0"/>
+                <a:ea typeface="Arial" pitchFamily="34" charset="-122"/>
+                <a:cs typeface="Arial" pitchFamily="34" charset="-120"/>
+              </a:rPr>
+              <a:t>App SG: :80 from ALB SG only</a:t>
             </a:r>
             <a:endParaRPr lang="en-US" sz="1500" dirty="0"/>
           </a:p>
@@ -4787,7 +8998,7 @@
                 <a:ea typeface="Arial" pitchFamily="34" charset="-122"/>
                 <a:cs typeface="Arial" pitchFamily="34" charset="-120"/>
               </a:rPr>
-              <a:t>Biggest lever = don’t leave it running idle → ~50–70% saving</a:t>
+              <a:t>SG-to-SG reference, not IP ranges</a:t>
             </a:r>
             <a:endParaRPr lang="en-US" sz="1500" dirty="0"/>
           </a:p>
@@ -4808,7 +9019,7 @@
                 <a:ea typeface="Arial" pitchFamily="34" charset="-122"/>
                 <a:cs typeface="Arial" pitchFamily="34" charset="-120"/>
               </a:rPr>
-              <a:t>Further: S3/SSM VPC endpoints, Graviton t4g, Savings Plans for production</a:t>
+              <a:t>Direct hits to instances are dropped</a:t>
             </a:r>
             <a:endParaRPr lang="en-US" sz="1500" dirty="0"/>
           </a:p>
@@ -4816,14 +9027,14 @@
       </p:sp>
       <p:sp>
         <p:nvSpPr>
-          <p:cNvPr id="15" name="Text 13"/>
-          <p:cNvSpPr/>
-          <p:nvPr/>
-        </p:nvSpPr>
-        <p:spPr>
-          <a:xfrm>
-            <a:off x="640080" y="6400800"/>
-            <a:ext cx="7315200" cy="274320"/>
+          <p:cNvPr id="8" name="Text 5"/>
+          <p:cNvSpPr/>
+          <p:nvPr/>
+        </p:nvSpPr>
+        <p:spPr>
+          <a:xfrm>
+            <a:off x="8138160" y="6035040"/>
+            <a:ext cx="3566160" cy="274320"/>
           </a:xfrm>
           <a:prstGeom prst="rect">
             <a:avLst/>
@@ -4839,7 +9050,7 @@
               <a:buNone/>
             </a:pPr>
             <a:r>
-              <a:rPr lang="en-US" sz="1000" dirty="0">
+              <a:rPr lang="en-US" sz="900" i="1" dirty="0">
                 <a:solidFill>
                   <a:srgbClr val="8A94A3"/>
                 </a:solidFill>
@@ -4847,48 +9058,9 @@
                 <a:ea typeface="Arial" pitchFamily="34" charset="-122"/>
                 <a:cs typeface="Arial" pitchFamily="34" charset="-120"/>
               </a:rPr>
-              <a:t>on-demand, us-east-1, 24/7</a:t>
-            </a:r>
-            <a:endParaRPr lang="en-US" sz="1000" dirty="0"/>
-          </a:p>
-        </p:txBody>
-      </p:sp>
-      <p:sp>
-        <p:nvSpPr>
-          <p:cNvPr id="16" name="Text 14"/>
-          <p:cNvSpPr/>
-          <p:nvPr/>
-        </p:nvSpPr>
-        <p:spPr>
-          <a:xfrm>
-            <a:off x="7772400" y="6400800"/>
-            <a:ext cx="3749040" cy="274320"/>
-          </a:xfrm>
-          <a:prstGeom prst="rect">
-            <a:avLst/>
-          </a:prstGeom>
-          <a:noFill/>
-          <a:ln/>
-        </p:spPr>
-        <p:txBody>
-          <a:bodyPr wrap="square" rtlCol="0" anchor="ctr"/>
-          <a:lstStyle/>
-          <a:p>
-            <a:pPr algn="r" indent="0" marL="0">
-              <a:buNone/>
-            </a:pPr>
-            <a:r>
-              <a:rPr lang="en-US" sz="1000" dirty="0">
-                <a:solidFill>
-                  <a:srgbClr val="8A94A3"/>
-                </a:solidFill>
-                <a:latin typeface="Arial" pitchFamily="34" charset="0"/>
-                <a:ea typeface="Arial" pitchFamily="34" charset="-122"/>
-                <a:cs typeface="Arial" pitchFamily="34" charset="-120"/>
-              </a:rPr>
-              <a:t>See COSTS.md</a:t>
-            </a:r>
-            <a:endParaRPr lang="en-US" sz="1000" dirty="0"/>
+              <a:t>04-app-sg-rules.png</a:t>
+            </a:r>
+            <a:endParaRPr lang="en-US" sz="900" dirty="0"/>
           </a:p>
         </p:txBody>
       </p:sp>
@@ -4952,7 +9124,7 @@
         </p:nvSpPr>
         <p:spPr>
           <a:xfrm>
-            <a:off x="640080" y="457200"/>
+            <a:off x="640080" y="384048"/>
             <a:ext cx="10972800" cy="274320"/>
           </a:xfrm>
           <a:prstGeom prst="rect">
@@ -4977,7 +9149,7 @@
                 <a:ea typeface="Arial" pitchFamily="34" charset="-122"/>
                 <a:cs typeface="Arial" pitchFamily="34" charset="-120"/>
               </a:rPr>
-              <a:t>CHALLENGES &amp; SOLUTIONS</a:t>
+              <a:t>COMPUTE</a:t>
             </a:r>
             <a:endParaRPr lang="en-US" sz="1200" dirty="0"/>
           </a:p>
@@ -4991,8 +9163,8 @@
         </p:nvSpPr>
         <p:spPr>
           <a:xfrm>
-            <a:off x="640080" y="731520"/>
-            <a:ext cx="10972800" cy="822960"/>
+            <a:off x="640080" y="676656"/>
+            <a:ext cx="10972800" cy="731520"/>
           </a:xfrm>
           <a:prstGeom prst="rect">
             <a:avLst/>
@@ -5008,7 +9180,7 @@
               <a:buNone/>
             </a:pPr>
             <a:r>
-              <a:rPr lang="en-US" sz="3000" b="1" dirty="0">
+              <a:rPr lang="en-US" sz="2700" b="1" dirty="0">
                 <a:solidFill>
                   <a:srgbClr val="0F172A"/>
                 </a:solidFill>
@@ -5016,31 +9188,81 @@
                 <a:ea typeface="Arial" pitchFamily="34" charset="-122"/>
                 <a:cs typeface="Arial" pitchFamily="34" charset="-120"/>
               </a:rPr>
-              <a:t>What broke, and how I fixed it</a:t>
-            </a:r>
-            <a:endParaRPr lang="en-US" sz="3000" dirty="0"/>
-          </a:p>
-        </p:txBody>
-      </p:sp>
-      <p:sp>
-        <p:nvSpPr>
-          <p:cNvPr id="5" name="Text 3"/>
-          <p:cNvSpPr/>
-          <p:nvPr/>
-        </p:nvSpPr>
-        <p:spPr>
-          <a:xfrm>
-            <a:off x="822960" y="1828800"/>
-            <a:ext cx="10607040" cy="3657600"/>
-          </a:xfrm>
-          <a:prstGeom prst="rect">
-            <a:avLst/>
-          </a:prstGeom>
-          <a:noFill/>
-          <a:ln/>
-        </p:spPr>
-        <p:txBody>
-          <a:bodyPr wrap="square" rtlCol="0" anchor="ctr"/>
+              <a:t>EC2 instances across both AZs</a:t>
+            </a:r>
+            <a:endParaRPr lang="en-US" sz="2700" dirty="0"/>
+          </a:p>
+        </p:txBody>
+      </p:sp>
+      <p:sp>
+        <p:nvSpPr>
+          <p:cNvPr id="5" name="Shape 3"/>
+          <p:cNvSpPr/>
+          <p:nvPr/>
+        </p:nvSpPr>
+        <p:spPr>
+          <a:xfrm>
+            <a:off x="548640" y="1463040"/>
+            <a:ext cx="7315200" cy="4846320"/>
+          </a:xfrm>
+          <a:prstGeom prst="roundRect">
+            <a:avLst>
+              <a:gd name="adj" fmla="val 943"/>
+            </a:avLst>
+          </a:prstGeom>
+          <a:solidFill>
+            <a:srgbClr val="F6F7F9"/>
+          </a:solidFill>
+          <a:ln w="12700">
+            <a:solidFill>
+              <a:srgbClr val="DBE1EA"/>
+            </a:solidFill>
+            <a:prstDash val="solid"/>
+          </a:ln>
+        </p:spPr>
+      </p:sp>
+      <p:pic>
+        <p:nvPicPr>
+          <p:cNvPr id="6" name="Image 0" descr="C:/Users/beite/Desktop/IRONHACK/Cloud Engineering/week3/project-1-3-tier-cloud-architecture/presentation/screenshots/05-instances.png">    </p:cNvPr>
+          <p:cNvPicPr>
+            <a:picLocks noChangeAspect="1"/>
+          </p:cNvPicPr>
+          <p:nvPr/>
+        </p:nvPicPr>
+        <p:blipFill>
+          <a:blip r:embed="rId1"/>
+          <a:srcRect l="0" r="0" t="0" b="0"/>
+          <a:stretch/>
+        </p:blipFill>
+        <p:spPr>
+          <a:xfrm>
+            <a:off x="685800" y="1572768"/>
+            <a:ext cx="7040880" cy="4626864"/>
+          </a:xfrm>
+          <a:prstGeom prst="rect">
+            <a:avLst/>
+          </a:prstGeom>
+        </p:spPr>
+      </p:pic>
+      <p:sp>
+        <p:nvSpPr>
+          <p:cNvPr id="7" name="Text 4"/>
+          <p:cNvSpPr/>
+          <p:nvPr/>
+        </p:nvSpPr>
+        <p:spPr>
+          <a:xfrm>
+            <a:off x="8138160" y="1737360"/>
+            <a:ext cx="3566160" cy="4206240"/>
+          </a:xfrm>
+          <a:prstGeom prst="rect">
+            <a:avLst/>
+          </a:prstGeom>
+          <a:noFill/>
+          <a:ln/>
+        </p:spPr>
+        <p:txBody>
+          <a:bodyPr wrap="square" rtlCol="0" anchor="t"/>
           <a:lstStyle/>
           <a:p>
             <a:pPr marL="177800" indent="-177800">
@@ -5053,13 +9275,13 @@
             <a:r>
               <a:rPr lang="en-US" sz="1500" dirty="0">
                 <a:solidFill>
-                  <a:srgbClr val="0F172A"/>
-                </a:solidFill>
-                <a:latin typeface="Arial" pitchFamily="34" charset="0"/>
-                <a:ea typeface="Arial" pitchFamily="34" charset="-122"/>
-                <a:cs typeface="Arial" pitchFamily="34" charset="-120"/>
-              </a:rPr>
-              <a:t>Blackholed NAT route — reused VPC pointed at a deleted NAT → created a new NAT + EIP, repaired the route</a:t>
+                  <a:srgbClr val="0E7C72"/>
+                </a:solidFill>
+                <a:latin typeface="Arial" pitchFamily="34" charset="0"/>
+                <a:ea typeface="Arial" pitchFamily="34" charset="-122"/>
+                <a:cs typeface="Arial" pitchFamily="34" charset="-120"/>
+              </a:rPr>
+              <a:t>App instances + data nodes running</a:t>
             </a:r>
             <a:endParaRPr lang="en-US" sz="1500" dirty="0"/>
           </a:p>
@@ -5080,7 +9302,7 @@
                 <a:ea typeface="Arial" pitchFamily="34" charset="-122"/>
                 <a:cs typeface="Arial" pitchFamily="34" charset="-120"/>
               </a:rPr>
-              <a:t>Data-tier isolation — all private subnets shared one route table → split data onto its own, no internet route</a:t>
+              <a:t>Private subnets, no public IP</a:t>
             </a:r>
             <a:endParaRPr lang="en-US" sz="1500" dirty="0"/>
           </a:p>
@@ -5101,43 +9323,22 @@
                 <a:ea typeface="Arial" pitchFamily="34" charset="-122"/>
                 <a:cs typeface="Arial" pitchFamily="34" charset="-120"/>
               </a:rPr>
-              <a:t>Testing private hosts — no SSH → used SSM Session Manager / Run Command (no keys, no bastion)</a:t>
+              <a:t>Spread over us-east-1a / 1b</a:t>
             </a:r>
             <a:endParaRPr lang="en-US" sz="1500" dirty="0"/>
           </a:p>
-          <a:p>
-            <a:pPr marL="177800" indent="-177800">
-              <a:spcAft>
-                <a:spcPts val="800"/>
-              </a:spcAft>
-              <a:buSzPct val="100000"/>
-              <a:buChar char="•"/>
-            </a:pPr>
-            <a:r>
-              <a:rPr lang="en-US" sz="1500" dirty="0">
-                <a:solidFill>
-                  <a:srgbClr val="0F172A"/>
-                </a:solidFill>
-                <a:latin typeface="Arial" pitchFamily="34" charset="0"/>
-                <a:ea typeface="Arial" pitchFamily="34" charset="-122"/>
-                <a:cs typeface="Arial" pitchFamily="34" charset="-120"/>
-              </a:rPr>
-              <a:t>Tooling gotcha — Git Bash rewrote /health into a path → fixed with MSYS_NO_PATHCONV=1</a:t>
-            </a:r>
-            <a:endParaRPr lang="en-US" sz="1500" dirty="0"/>
-          </a:p>
-        </p:txBody>
-      </p:sp>
-      <p:sp>
-        <p:nvSpPr>
-          <p:cNvPr id="6" name="Text 4"/>
-          <p:cNvSpPr/>
-          <p:nvPr/>
-        </p:nvSpPr>
-        <p:spPr>
-          <a:xfrm>
-            <a:off x="640080" y="6400800"/>
-            <a:ext cx="7315200" cy="274320"/>
+        </p:txBody>
+      </p:sp>
+      <p:sp>
+        <p:nvSpPr>
+          <p:cNvPr id="8" name="Text 5"/>
+          <p:cNvSpPr/>
+          <p:nvPr/>
+        </p:nvSpPr>
+        <p:spPr>
+          <a:xfrm>
+            <a:off x="8138160" y="6035040"/>
+            <a:ext cx="3566160" cy="274320"/>
           </a:xfrm>
           <a:prstGeom prst="rect">
             <a:avLst/>
@@ -5152,7 +9353,18 @@
             <a:pPr indent="0" marL="0">
               <a:buNone/>
             </a:pPr>
-            <a:endParaRPr lang="en-US" sz="1000" dirty="0"/>
+            <a:r>
+              <a:rPr lang="en-US" sz="900" i="1" dirty="0">
+                <a:solidFill>
+                  <a:srgbClr val="8A94A3"/>
+                </a:solidFill>
+                <a:latin typeface="Arial" pitchFamily="34" charset="0"/>
+                <a:ea typeface="Arial" pitchFamily="34" charset="-122"/>
+                <a:cs typeface="Arial" pitchFamily="34" charset="-120"/>
+              </a:rPr>
+              <a:t>05-instances.png</a:t>
+            </a:r>
+            <a:endParaRPr lang="en-US" sz="900" dirty="0"/>
           </a:p>
         </p:txBody>
       </p:sp>
@@ -5216,7 +9428,7 @@
         </p:nvSpPr>
         <p:spPr>
           <a:xfrm>
-            <a:off x="640080" y="457200"/>
+            <a:off x="640080" y="384048"/>
             <a:ext cx="10972800" cy="274320"/>
           </a:xfrm>
           <a:prstGeom prst="rect">
@@ -5241,7 +9453,7 @@
                 <a:ea typeface="Arial" pitchFamily="34" charset="-122"/>
                 <a:cs typeface="Arial" pitchFamily="34" charset="-120"/>
               </a:rPr>
-              <a:t>IMPROVEMENTS &amp; NEXT STEPS</a:t>
+              <a:t>LOAD BALANCING</a:t>
             </a:r>
             <a:endParaRPr lang="en-US" sz="1200" dirty="0"/>
           </a:p>
@@ -5255,8 +9467,8 @@
         </p:nvSpPr>
         <p:spPr>
           <a:xfrm>
-            <a:off x="640080" y="731520"/>
-            <a:ext cx="10972800" cy="822960"/>
+            <a:off x="640080" y="676656"/>
+            <a:ext cx="10972800" cy="731520"/>
           </a:xfrm>
           <a:prstGeom prst="rect">
             <a:avLst/>
@@ -5272,7 +9484,7 @@
               <a:buNone/>
             </a:pPr>
             <a:r>
-              <a:rPr lang="en-US" sz="3000" b="1" dirty="0">
+              <a:rPr lang="en-US" sz="2700" b="1" dirty="0">
                 <a:solidFill>
                   <a:srgbClr val="0F172A"/>
                 </a:solidFill>
@@ -5280,50 +9492,82 @@
                 <a:ea typeface="Arial" pitchFamily="34" charset="-122"/>
                 <a:cs typeface="Arial" pitchFamily="34" charset="-120"/>
               </a:rPr>
-              <a:t>Path to production</a:t>
-            </a:r>
-            <a:endParaRPr lang="en-US" sz="3000" dirty="0"/>
-          </a:p>
-        </p:txBody>
-      </p:sp>
-      <p:sp>
-        <p:nvSpPr>
-          <p:cNvPr id="5" name="Text 3"/>
-          <p:cNvSpPr/>
-          <p:nvPr/>
-        </p:nvSpPr>
-        <p:spPr>
-          <a:xfrm>
-            <a:off x="822960" y="1828800"/>
-            <a:ext cx="5212080" cy="2926080"/>
-          </a:xfrm>
-          <a:prstGeom prst="rect">
-            <a:avLst/>
-          </a:prstGeom>
-          <a:noFill/>
-          <a:ln/>
-        </p:spPr>
-        <p:txBody>
-          <a:bodyPr wrap="square" rtlCol="0" anchor="ctr"/>
-          <a:lstStyle/>
-          <a:p>
-            <a:pPr indent="0" marL="0">
-              <a:buNone/>
-            </a:pPr>
-            <a:r>
-              <a:rPr lang="en-US" sz="1600" b="1" dirty="0">
-                <a:solidFill>
-                  <a:srgbClr val="0F172A"/>
-                </a:solidFill>
-                <a:latin typeface="Arial" pitchFamily="34" charset="0"/>
-                <a:ea typeface="Arial" pitchFamily="34" charset="-122"/>
-                <a:cs typeface="Arial" pitchFamily="34" charset="-120"/>
-              </a:rPr>
-              <a:t>Short term
-</a:t>
-            </a:r>
-            <a:endParaRPr lang="en-US" sz="1600" dirty="0"/>
-          </a:p>
+              <a:t>Application Load Balancer</a:t>
+            </a:r>
+            <a:endParaRPr lang="en-US" sz="2700" dirty="0"/>
+          </a:p>
+        </p:txBody>
+      </p:sp>
+      <p:sp>
+        <p:nvSpPr>
+          <p:cNvPr id="5" name="Shape 3"/>
+          <p:cNvSpPr/>
+          <p:nvPr/>
+        </p:nvSpPr>
+        <p:spPr>
+          <a:xfrm>
+            <a:off x="548640" y="1463040"/>
+            <a:ext cx="7315200" cy="4846320"/>
+          </a:xfrm>
+          <a:prstGeom prst="roundRect">
+            <a:avLst>
+              <a:gd name="adj" fmla="val 943"/>
+            </a:avLst>
+          </a:prstGeom>
+          <a:solidFill>
+            <a:srgbClr val="F6F7F9"/>
+          </a:solidFill>
+          <a:ln w="12700">
+            <a:solidFill>
+              <a:srgbClr val="DBE1EA"/>
+            </a:solidFill>
+            <a:prstDash val="solid"/>
+          </a:ln>
+        </p:spPr>
+      </p:sp>
+      <p:pic>
+        <p:nvPicPr>
+          <p:cNvPr id="6" name="Image 0" descr="C:/Users/beite/Desktop/IRONHACK/Cloud Engineering/week3/project-1-3-tier-cloud-architecture/presentation/screenshots/06-load-balancer.png">    </p:cNvPr>
+          <p:cNvPicPr>
+            <a:picLocks noChangeAspect="1"/>
+          </p:cNvPicPr>
+          <p:nvPr/>
+        </p:nvPicPr>
+        <p:blipFill>
+          <a:blip r:embed="rId1"/>
+          <a:srcRect l="0" r="0" t="0" b="0"/>
+          <a:stretch/>
+        </p:blipFill>
+        <p:spPr>
+          <a:xfrm>
+            <a:off x="685800" y="1572768"/>
+            <a:ext cx="7040880" cy="4626864"/>
+          </a:xfrm>
+          <a:prstGeom prst="rect">
+            <a:avLst/>
+          </a:prstGeom>
+        </p:spPr>
+      </p:pic>
+      <p:sp>
+        <p:nvSpPr>
+          <p:cNvPr id="7" name="Text 4"/>
+          <p:cNvSpPr/>
+          <p:nvPr/>
+        </p:nvSpPr>
+        <p:spPr>
+          <a:xfrm>
+            <a:off x="8138160" y="1737360"/>
+            <a:ext cx="3566160" cy="4206240"/>
+          </a:xfrm>
+          <a:prstGeom prst="rect">
+            <a:avLst/>
+          </a:prstGeom>
+          <a:noFill/>
+          <a:ln/>
+        </p:spPr>
+        <p:txBody>
+          <a:bodyPr wrap="square" rtlCol="0" anchor="t"/>
+          <a:lstStyle/>
           <a:p>
             <a:pPr marL="177800" indent="-177800">
               <a:spcAft>
@@ -5335,15 +9579,15 @@
             <a:r>
               <a:rPr lang="en-US" sz="1500" dirty="0">
                 <a:solidFill>
-                  <a:srgbClr val="0F172A"/>
-                </a:solidFill>
-                <a:latin typeface="Arial" pitchFamily="34" charset="0"/>
-                <a:ea typeface="Arial" pitchFamily="34" charset="-122"/>
-                <a:cs typeface="Arial" pitchFamily="34" charset="-120"/>
-              </a:rPr>
-              <a:t>HTTPS listener + ACM certificate</a:t>
-            </a:r>
-            <a:endParaRPr lang="en-US" sz="1600" dirty="0"/>
+                  <a:srgbClr val="0369A1"/>
+                </a:solidFill>
+                <a:latin typeface="Arial" pitchFamily="34" charset="0"/>
+                <a:ea typeface="Arial" pitchFamily="34" charset="-122"/>
+                <a:cs typeface="Arial" pitchFamily="34" charset="-120"/>
+              </a:rPr>
+              <a:t>Internet-facing</a:t>
+            </a:r>
+            <a:endParaRPr lang="en-US" sz="1500" dirty="0"/>
           </a:p>
           <a:p>
             <a:pPr marL="177800" indent="-177800">
@@ -5362,9 +9606,9 @@
                 <a:ea typeface="Arial" pitchFamily="34" charset="-122"/>
                 <a:cs typeface="Arial" pitchFamily="34" charset="-120"/>
               </a:rPr>
-              <a:t>Auto Scaling Group (real self-healing)</a:t>
-            </a:r>
-            <a:endParaRPr lang="en-US" sz="1600" dirty="0"/>
+              <a:t>Listeners :80 (HTTP) and :443 (HTTPS)</a:t>
+            </a:r>
+            <a:endParaRPr lang="en-US" sz="1500" dirty="0"/>
           </a:p>
           <a:p>
             <a:pPr marL="177800" indent="-177800">
@@ -5383,22 +9627,22 @@
                 <a:ea typeface="Arial" pitchFamily="34" charset="-122"/>
                 <a:cs typeface="Arial" pitchFamily="34" charset="-120"/>
               </a:rPr>
-              <a:t>Per-AZ NAT · CloudWatch alarms</a:t>
-            </a:r>
-            <a:endParaRPr lang="en-US" sz="1600" dirty="0"/>
-          </a:p>
-        </p:txBody>
-      </p:sp>
-      <p:sp>
-        <p:nvSpPr>
-          <p:cNvPr id="6" name="Text 4"/>
-          <p:cNvSpPr/>
-          <p:nvPr/>
-        </p:nvSpPr>
-        <p:spPr>
-          <a:xfrm>
-            <a:off x="6309360" y="1828800"/>
-            <a:ext cx="5029200" cy="2926080"/>
+              <a:t>Spans both Availability Zones</a:t>
+            </a:r>
+            <a:endParaRPr lang="en-US" sz="1500" dirty="0"/>
+          </a:p>
+        </p:txBody>
+      </p:sp>
+      <p:sp>
+        <p:nvSpPr>
+          <p:cNvPr id="8" name="Text 5"/>
+          <p:cNvSpPr/>
+          <p:nvPr/>
+        </p:nvSpPr>
+        <p:spPr>
+          <a:xfrm>
+            <a:off x="8138160" y="6035040"/>
+            <a:ext cx="3566160" cy="274320"/>
           </a:xfrm>
           <a:prstGeom prst="rect">
             <a:avLst/>
@@ -5414,149 +9658,7 @@
               <a:buNone/>
             </a:pPr>
             <a:r>
-              <a:rPr lang="en-US" sz="1600" b="1" dirty="0">
-                <a:solidFill>
-                  <a:srgbClr val="0F172A"/>
-                </a:solidFill>
-                <a:latin typeface="Arial" pitchFamily="34" charset="0"/>
-                <a:ea typeface="Arial" pitchFamily="34" charset="-122"/>
-                <a:cs typeface="Arial" pitchFamily="34" charset="-120"/>
-              </a:rPr>
-              <a:t>Long term
-</a:t>
-            </a:r>
-            <a:endParaRPr lang="en-US" sz="1600" dirty="0"/>
-          </a:p>
-          <a:p>
-            <a:pPr marL="177800" indent="-177800">
-              <a:spcAft>
-                <a:spcPts val="800"/>
-              </a:spcAft>
-              <a:buSzPct val="100000"/>
-              <a:buChar char="•"/>
-            </a:pPr>
-            <a:r>
-              <a:rPr lang="en-US" sz="1500" dirty="0">
-                <a:solidFill>
-                  <a:srgbClr val="0F172A"/>
-                </a:solidFill>
-                <a:latin typeface="Arial" pitchFamily="34" charset="0"/>
-                <a:ea typeface="Arial" pitchFamily="34" charset="-122"/>
-                <a:cs typeface="Arial" pitchFamily="34" charset="-120"/>
-              </a:rPr>
-              <a:t>RDS Multi-AZ database</a:t>
-            </a:r>
-            <a:endParaRPr lang="en-US" sz="1600" dirty="0"/>
-          </a:p>
-          <a:p>
-            <a:pPr marL="177800" indent="-177800">
-              <a:spcAft>
-                <a:spcPts val="800"/>
-              </a:spcAft>
-              <a:buSzPct val="100000"/>
-              <a:buChar char="•"/>
-            </a:pPr>
-            <a:r>
-              <a:rPr lang="en-US" sz="1500" dirty="0">
-                <a:solidFill>
-                  <a:srgbClr val="0F172A"/>
-                </a:solidFill>
-                <a:latin typeface="Arial" pitchFamily="34" charset="0"/>
-                <a:ea typeface="Arial" pitchFamily="34" charset="-122"/>
-                <a:cs typeface="Arial" pitchFamily="34" charset="-120"/>
-              </a:rPr>
-              <a:t>Infrastructure as Code (Terraform)</a:t>
-            </a:r>
-            <a:endParaRPr lang="en-US" sz="1600" dirty="0"/>
-          </a:p>
-          <a:p>
-            <a:pPr marL="177800" indent="-177800">
-              <a:spcAft>
-                <a:spcPts val="800"/>
-              </a:spcAft>
-              <a:buSzPct val="100000"/>
-              <a:buChar char="•"/>
-            </a:pPr>
-            <a:r>
-              <a:rPr lang="en-US" sz="1500" dirty="0">
-                <a:solidFill>
-                  <a:srgbClr val="0F172A"/>
-                </a:solidFill>
-                <a:latin typeface="Arial" pitchFamily="34" charset="0"/>
-                <a:ea typeface="Arial" pitchFamily="34" charset="-122"/>
-                <a:cs typeface="Arial" pitchFamily="34" charset="-120"/>
-              </a:rPr>
-              <a:t>CI/CD · WAF · multi-region DR</a:t>
-            </a:r>
-            <a:endParaRPr lang="en-US" sz="1600" dirty="0"/>
-          </a:p>
-        </p:txBody>
-      </p:sp>
-      <p:sp>
-        <p:nvSpPr>
-          <p:cNvPr id="7" name="Text 5"/>
-          <p:cNvSpPr/>
-          <p:nvPr/>
-        </p:nvSpPr>
-        <p:spPr>
-          <a:xfrm>
-            <a:off x="822960" y="4937760"/>
-            <a:ext cx="10515600" cy="548640"/>
-          </a:xfrm>
-          <a:prstGeom prst="rect">
-            <a:avLst/>
-          </a:prstGeom>
-          <a:noFill/>
-          <a:ln/>
-        </p:spPr>
-        <p:txBody>
-          <a:bodyPr wrap="square" rtlCol="0" anchor="ctr"/>
-          <a:lstStyle/>
-          <a:p>
-            <a:pPr indent="0" marL="0">
-              <a:buNone/>
-            </a:pPr>
-            <a:r>
-              <a:rPr lang="en-US" sz="1400" i="1" dirty="0">
-                <a:solidFill>
-                  <a:srgbClr val="3B5BDB"/>
-                </a:solidFill>
-                <a:latin typeface="Arial" pitchFamily="34" charset="0"/>
-                <a:ea typeface="Arial" pitchFamily="34" charset="-122"/>
-                <a:cs typeface="Arial" pitchFamily="34" charset="-120"/>
-              </a:rPr>
-              <a:t>If I did it again: start with IaC and an ASG from day one — same effort, real self-healing.</a:t>
-            </a:r>
-            <a:endParaRPr lang="en-US" sz="1400" dirty="0"/>
-          </a:p>
-        </p:txBody>
-      </p:sp>
-      <p:sp>
-        <p:nvSpPr>
-          <p:cNvPr id="8" name="Text 6"/>
-          <p:cNvSpPr/>
-          <p:nvPr/>
-        </p:nvSpPr>
-        <p:spPr>
-          <a:xfrm>
-            <a:off x="640080" y="6400800"/>
-            <a:ext cx="7315200" cy="274320"/>
-          </a:xfrm>
-          <a:prstGeom prst="rect">
-            <a:avLst/>
-          </a:prstGeom>
-          <a:noFill/>
-          <a:ln/>
-        </p:spPr>
-        <p:txBody>
-          <a:bodyPr wrap="square" rtlCol="0" anchor="ctr"/>
-          <a:lstStyle/>
-          <a:p>
-            <a:pPr indent="0" marL="0">
-              <a:buNone/>
-            </a:pPr>
-            <a:r>
-              <a:rPr lang="en-US" sz="1000" dirty="0">
+              <a:rPr lang="en-US" sz="900" i="1" dirty="0">
                 <a:solidFill>
                   <a:srgbClr val="8A94A3"/>
                 </a:solidFill>
@@ -5564,48 +9666,9 @@
                 <a:ea typeface="Arial" pitchFamily="34" charset="-122"/>
                 <a:cs typeface="Arial" pitchFamily="34" charset="-120"/>
               </a:rPr>
-              <a:t>Current gap: single NAT in AZ-a</a:t>
-            </a:r>
-            <a:endParaRPr lang="en-US" sz="1000" dirty="0"/>
-          </a:p>
-        </p:txBody>
-      </p:sp>
-      <p:sp>
-        <p:nvSpPr>
-          <p:cNvPr id="9" name="Text 7"/>
-          <p:cNvSpPr/>
-          <p:nvPr/>
-        </p:nvSpPr>
-        <p:spPr>
-          <a:xfrm>
-            <a:off x="7772400" y="6400800"/>
-            <a:ext cx="3749040" cy="274320"/>
-          </a:xfrm>
-          <a:prstGeom prst="rect">
-            <a:avLst/>
-          </a:prstGeom>
-          <a:noFill/>
-          <a:ln/>
-        </p:spPr>
-        <p:txBody>
-          <a:bodyPr wrap="square" rtlCol="0" anchor="ctr"/>
-          <a:lstStyle/>
-          <a:p>
-            <a:pPr algn="r" indent="0" marL="0">
-              <a:buNone/>
-            </a:pPr>
-            <a:r>
-              <a:rPr lang="en-US" sz="1000" dirty="0">
-                <a:solidFill>
-                  <a:srgbClr val="8A94A3"/>
-                </a:solidFill>
-                <a:latin typeface="Arial" pitchFamily="34" charset="0"/>
-                <a:ea typeface="Arial" pitchFamily="34" charset="-122"/>
-                <a:cs typeface="Arial" pitchFamily="34" charset="-120"/>
-              </a:rPr>
-              <a:t>See IMPROVEMENTS.md</a:t>
-            </a:r>
-            <a:endParaRPr lang="en-US" sz="1000" dirty="0"/>
+              <a:t>06-load-balancer.png</a:t>
+            </a:r>
+            <a:endParaRPr lang="en-US" sz="900" dirty="0"/>
           </a:p>
         </p:txBody>
       </p:sp>
@@ -5669,8 +9732,8 @@
         </p:nvSpPr>
         <p:spPr>
           <a:xfrm>
-            <a:off x="822960" y="2377440"/>
-            <a:ext cx="10058400" cy="365760"/>
+            <a:off x="640080" y="384048"/>
+            <a:ext cx="10972800" cy="274320"/>
           </a:xfrm>
           <a:prstGeom prst="rect">
             <a:avLst/>
@@ -5686,7 +9749,7 @@
               <a:buNone/>
             </a:pPr>
             <a:r>
-              <a:rPr lang="en-US" sz="1400" b="1" spc="200" kern="0" dirty="0">
+              <a:rPr lang="en-US" sz="1200" b="1" spc="200" kern="0" dirty="0">
                 <a:solidFill>
                   <a:srgbClr val="3B5BDB"/>
                 </a:solidFill>
@@ -5694,9 +9757,9 @@
                 <a:ea typeface="Arial" pitchFamily="34" charset="-122"/>
                 <a:cs typeface="Arial" pitchFamily="34" charset="-120"/>
               </a:rPr>
-              <a:t>THANK YOU</a:t>
-            </a:r>
-            <a:endParaRPr lang="en-US" sz="1400" dirty="0"/>
+              <a:t>LOAD BALANCING</a:t>
+            </a:r>
+            <a:endParaRPr lang="en-US" sz="1200" dirty="0"/>
           </a:p>
         </p:txBody>
       </p:sp>
@@ -5708,8 +9771,8 @@
         </p:nvSpPr>
         <p:spPr>
           <a:xfrm>
-            <a:off x="822960" y="2788920"/>
-            <a:ext cx="10058400" cy="1005840"/>
+            <a:off x="640080" y="676656"/>
+            <a:ext cx="10972800" cy="731520"/>
           </a:xfrm>
           <a:prstGeom prst="rect">
             <a:avLst/>
@@ -5725,7 +9788,7 @@
               <a:buNone/>
             </a:pPr>
             <a:r>
-              <a:rPr lang="en-US" sz="4800" b="1" dirty="0">
+              <a:rPr lang="en-US" sz="2700" b="1" dirty="0">
                 <a:solidFill>
                   <a:srgbClr val="0F172A"/>
                 </a:solidFill>
@@ -5733,22 +9796,157 @@
                 <a:ea typeface="Arial" pitchFamily="34" charset="-122"/>
                 <a:cs typeface="Arial" pitchFamily="34" charset="-120"/>
               </a:rPr>
-              <a:t>Questions?</a:t>
-            </a:r>
-            <a:endParaRPr lang="en-US" sz="4800" dirty="0"/>
-          </a:p>
-        </p:txBody>
-      </p:sp>
-      <p:sp>
-        <p:nvSpPr>
-          <p:cNvPr id="5" name="Text 3"/>
-          <p:cNvSpPr/>
-          <p:nvPr/>
-        </p:nvSpPr>
-        <p:spPr>
-          <a:xfrm>
-            <a:off x="822960" y="3931920"/>
-            <a:ext cx="9601200" cy="914400"/>
+              <a:t>Target group — 3/3 healthy</a:t>
+            </a:r>
+            <a:endParaRPr lang="en-US" sz="2700" dirty="0"/>
+          </a:p>
+        </p:txBody>
+      </p:sp>
+      <p:sp>
+        <p:nvSpPr>
+          <p:cNvPr id="5" name="Shape 3"/>
+          <p:cNvSpPr/>
+          <p:nvPr/>
+        </p:nvSpPr>
+        <p:spPr>
+          <a:xfrm>
+            <a:off x="548640" y="1463040"/>
+            <a:ext cx="7315200" cy="4846320"/>
+          </a:xfrm>
+          <a:prstGeom prst="roundRect">
+            <a:avLst>
+              <a:gd name="adj" fmla="val 943"/>
+            </a:avLst>
+          </a:prstGeom>
+          <a:solidFill>
+            <a:srgbClr val="F6F7F9"/>
+          </a:solidFill>
+          <a:ln w="12700">
+            <a:solidFill>
+              <a:srgbClr val="DBE1EA"/>
+            </a:solidFill>
+            <a:prstDash val="solid"/>
+          </a:ln>
+        </p:spPr>
+      </p:sp>
+      <p:pic>
+        <p:nvPicPr>
+          <p:cNvPr id="6" name="Image 0" descr="C:/Users/beite/Desktop/IRONHACK/Cloud Engineering/week3/project-1-3-tier-cloud-architecture/presentation/screenshots/07-target-group.png">    </p:cNvPr>
+          <p:cNvPicPr>
+            <a:picLocks noChangeAspect="1"/>
+          </p:cNvPicPr>
+          <p:nvPr/>
+        </p:nvPicPr>
+        <p:blipFill>
+          <a:blip r:embed="rId1"/>
+          <a:srcRect l="0" r="0" t="0" b="0"/>
+          <a:stretch/>
+        </p:blipFill>
+        <p:spPr>
+          <a:xfrm>
+            <a:off x="685800" y="1572768"/>
+            <a:ext cx="7040880" cy="4626864"/>
+          </a:xfrm>
+          <a:prstGeom prst="rect">
+            <a:avLst/>
+          </a:prstGeom>
+        </p:spPr>
+      </p:pic>
+      <p:sp>
+        <p:nvSpPr>
+          <p:cNvPr id="7" name="Text 4"/>
+          <p:cNvSpPr/>
+          <p:nvPr/>
+        </p:nvSpPr>
+        <p:spPr>
+          <a:xfrm>
+            <a:off x="8138160" y="1737360"/>
+            <a:ext cx="3566160" cy="4206240"/>
+          </a:xfrm>
+          <a:prstGeom prst="rect">
+            <a:avLst/>
+          </a:prstGeom>
+          <a:noFill/>
+          <a:ln/>
+        </p:spPr>
+        <p:txBody>
+          <a:bodyPr wrap="square" rtlCol="0" anchor="t"/>
+          <a:lstStyle/>
+          <a:p>
+            <a:pPr marL="177800" indent="-177800">
+              <a:spcAft>
+                <a:spcPts val="800"/>
+              </a:spcAft>
+              <a:buSzPct val="100000"/>
+              <a:buChar char="•"/>
+            </a:pPr>
+            <a:r>
+              <a:rPr lang="en-US" sz="1500" dirty="0">
+                <a:solidFill>
+                  <a:srgbClr val="12805C"/>
+                </a:solidFill>
+                <a:latin typeface="Arial" pitchFamily="34" charset="0"/>
+                <a:ea typeface="Arial" pitchFamily="34" charset="-122"/>
+                <a:cs typeface="Arial" pitchFamily="34" charset="-120"/>
+              </a:rPr>
+              <a:t>All targets healthy</a:t>
+            </a:r>
+            <a:endParaRPr lang="en-US" sz="1500" dirty="0"/>
+          </a:p>
+          <a:p>
+            <a:pPr marL="177800" indent="-177800">
+              <a:spcAft>
+                <a:spcPts val="800"/>
+              </a:spcAft>
+              <a:buSzPct val="100000"/>
+              <a:buChar char="•"/>
+            </a:pPr>
+            <a:r>
+              <a:rPr lang="en-US" sz="1500" dirty="0">
+                <a:solidFill>
+                  <a:srgbClr val="0F172A"/>
+                </a:solidFill>
+                <a:latin typeface="Arial" pitchFamily="34" charset="0"/>
+                <a:ea typeface="Arial" pitchFamily="34" charset="-122"/>
+                <a:cs typeface="Arial" pitchFamily="34" charset="-120"/>
+              </a:rPr>
+              <a:t>Health check: GET /health</a:t>
+            </a:r>
+            <a:endParaRPr lang="en-US" sz="1500" dirty="0"/>
+          </a:p>
+          <a:p>
+            <a:pPr marL="177800" indent="-177800">
+              <a:spcAft>
+                <a:spcPts val="800"/>
+              </a:spcAft>
+              <a:buSzPct val="100000"/>
+              <a:buChar char="•"/>
+            </a:pPr>
+            <a:r>
+              <a:rPr lang="en-US" sz="1500" dirty="0">
+                <a:solidFill>
+                  <a:srgbClr val="0F172A"/>
+                </a:solidFill>
+                <a:latin typeface="Arial" pitchFamily="34" charset="0"/>
+                <a:ea typeface="Arial" pitchFamily="34" charset="-122"/>
+                <a:cs typeface="Arial" pitchFamily="34" charset="-120"/>
+              </a:rPr>
+              <a:t>Live load-balancing: app-load-balancing.gif (repo)</a:t>
+            </a:r>
+            <a:endParaRPr lang="en-US" sz="1500" dirty="0"/>
+          </a:p>
+        </p:txBody>
+      </p:sp>
+      <p:sp>
+        <p:nvSpPr>
+          <p:cNvPr id="8" name="Text 5"/>
+          <p:cNvSpPr/>
+          <p:nvPr/>
+        </p:nvSpPr>
+        <p:spPr>
+          <a:xfrm>
+            <a:off x="8138160" y="6035040"/>
+            <a:ext cx="3566160" cy="274320"/>
           </a:xfrm>
           <a:prstGeom prst="rect">
             <a:avLst/>
@@ -5764,46 +9962,7 @@
               <a:buNone/>
             </a:pPr>
             <a:r>
-              <a:rPr lang="en-US" sz="1600" dirty="0">
-                <a:solidFill>
-                  <a:srgbClr val="5B6675"/>
-                </a:solidFill>
-                <a:latin typeface="Arial" pitchFamily="34" charset="0"/>
-                <a:ea typeface="Arial" pitchFamily="34" charset="-122"/>
-                <a:cs typeface="Arial" pitchFamily="34" charset="-120"/>
-              </a:rPr>
-              <a:t>Designed, built, and tested a production-shaped 3-tier architecture: multi-AZ HA, least-privilege security, isolated data tier, and a documented cost model.</a:t>
-            </a:r>
-            <a:endParaRPr lang="en-US" sz="1600" dirty="0"/>
-          </a:p>
-        </p:txBody>
-      </p:sp>
-      <p:sp>
-        <p:nvSpPr>
-          <p:cNvPr id="6" name="Text 4"/>
-          <p:cNvSpPr/>
-          <p:nvPr/>
-        </p:nvSpPr>
-        <p:spPr>
-          <a:xfrm>
-            <a:off x="822960" y="6035040"/>
-            <a:ext cx="10058400" cy="365760"/>
-          </a:xfrm>
-          <a:prstGeom prst="rect">
-            <a:avLst/>
-          </a:prstGeom>
-          <a:noFill/>
-          <a:ln/>
-        </p:spPr>
-        <p:txBody>
-          <a:bodyPr wrap="square" rtlCol="0" anchor="ctr"/>
-          <a:lstStyle/>
-          <a:p>
-            <a:pPr indent="0" marL="0">
-              <a:buNone/>
-            </a:pPr>
-            <a:r>
-              <a:rPr lang="en-US" sz="1200" dirty="0">
+              <a:rPr lang="en-US" sz="900" i="1" dirty="0">
                 <a:solidFill>
                   <a:srgbClr val="8A94A3"/>
                 </a:solidFill>
@@ -5811,9 +9970,9 @@
                 <a:ea typeface="Arial" pitchFamily="34" charset="-122"/>
                 <a:cs typeface="Arial" pitchFamily="34" charset="-120"/>
               </a:rPr>
-              <a:t>Live demo ready · http://ce-app-alb-1960431634.us-east-1.elb.amazonaws.com</a:t>
-            </a:r>
-            <a:endParaRPr lang="en-US" sz="1200" dirty="0"/>
+              <a:t>07-target-group.png</a:t>
+            </a:r>
+            <a:endParaRPr lang="en-US" sz="900" dirty="0"/>
           </a:p>
         </p:txBody>
       </p:sp>
